--- a/slides/pptx/week12.pptx
+++ b/slides/pptx/week12.pptx
@@ -19,9 +19,11 @@
     <p:sldId id="267" r:id="rId13"/>
     <p:sldId id="268" r:id="rId14"/>
     <p:sldId id="269" r:id="rId15"/>
+    <p:sldId id="270" r:id="rId16"/>
+    <p:sldId id="271" r:id="rId17"/>
   </p:sldIdLst>
   <p:notesMasterIdLst>
-    <p:notesMasterId r:id="rId16"/>
+    <p:notesMasterId r:id="rId18"/>
   </p:notesMasterIdLst>
   <p:sldSz cx="9144000" cy="5143500"/>
   <p:notesSz cx="5143500" cy="9144000"/>
@@ -603,7 +605,7 @@
           <a:p>
             <a:r>
               <a:rPr lang="en-US" dirty="0"/>
-              <a:t>The payoff checklist. Pin + scope kills dependency confusion; verify-before-deploy kills tampered artifacts; MFA on maintainer/CI accounts kills the xz/CircleCI vector. "Automate in CI" sets up W15. ~4 min.</a:t>
+              <a:t>Demo the sign→verify loop. sign.sh runs both tools dockerized — match that here, not a bare local binary. Keyless (Sigstore) = identity-based signing via OIDC through Fulcio, logged in Rekor, no key to leak — name both by name, worksheet Q4 grades on the vocabulary. The deploy gate: refuse any image that doesn't verify → a tampered artifact can't ship. This is the lab's defend step. ~4 min.</a:t>
             </a:r>
             <a:endParaRPr lang="en-US" dirty="0"/>
           </a:p>
@@ -691,7 +693,7 @@
           <a:p>
             <a:r>
               <a:rPr lang="en-US" dirty="0"/>
-              <a:t>Explain before lab — all in a controlled local registry (ethics: never publish a real typosquat). Defend side is graded. The SLSA self-assessment makes them reason about their own pipeline. ~3 min.</a:t>
+              <a:t>The managed option students will meet in industry. Dependabot is the practical supply-chain workhorse: it opens PRs bumping vulnerable deps automatically. Push protection stops secrets at push time — local commits with a secret are allowed, the block fires on push to the remote (recall W2). ~3 min.</a:t>
             </a:r>
             <a:endParaRPr lang="en-US" dirty="0"/>
           </a:p>
@@ -779,7 +781,7 @@
           <a:p>
             <a:r>
               <a:rPr lang="en-US" dirty="0"/>
-              <a:t>The SLSA self-assessment is the thinking part — they place their own build on the ladder and justify it. AI-resilient tasks count.</a:t>
+              <a:t>The payoff checklist, now with the exact flags Task 4 grades. --require-hashes and single-index-url are what actually stops dependency confusion — "pin + scope" alone is too vague to reconstruct on the exam. Verify-before-deploy kills tampered artifacts; MFA on maintainer/CI accounts kills the xz/CircleCI vector. "Automate in CI" sets up W15. ~4 min.</a:t>
             </a:r>
             <a:endParaRPr lang="en-US" dirty="0"/>
           </a:p>
@@ -867,7 +869,7 @@
           <a:p>
             <a:r>
               <a:rPr lang="en-US" dirty="0"/>
-              <a:t>Recap with the three verbs. Cold-call: "the next Log4Shell drops at 2am — what artifact tells you if you're affected?" (the SBOM). ~2 min.</a:t>
+              <a:t>Explain before lab — all in a controlled local registry (ethics: never publish a real typosquat). Defend side is graded. The SLSA self-assessment makes them reason about their own pipeline. ~3 min.</a:t>
             </a:r>
             <a:endParaRPr lang="en-US" dirty="0"/>
           </a:p>
@@ -955,7 +957,7 @@
           <a:p>
             <a:r>
               <a:rPr lang="en-US" dirty="0"/>
-              <a:t>Cliffhanger: "Next week — where your code runs. We'll hunt cloud/container misconfigs, the #1 real-world breach cause."</a:t>
+              <a:t>The SLSA self-assessment is the thinking part — they place their own build on the ladder and justify it. AI-resilient tasks count.</a:t>
             </a:r>
             <a:endParaRPr lang="en-US" dirty="0"/>
           </a:p>
@@ -979,6 +981,182 @@
             <a:fld id="{F7021451-1387-4CA6-816F-3879F97B5CBC}" type="slidenum">
               <a:rPr lang="en-US"/>
               <a:t>14</a:t>
+            </a:fld>
+            <a:endParaRPr lang="en-US"/>
+          </a:p>
+        </p:txBody>
+      </p:sp>
+    </p:spTree>
+    <p:extLst>
+      <p:ext uri="{BB962C8B-B14F-4D97-AF65-F5344CB8AC3E}">
+        <p14:creationId xmlns:p14="http://schemas.microsoft.com/office/powerpoint/2010/main" val="1024086991"/>
+      </p:ext>
+    </p:extLst>
+  </p:cSld>
+  <p:clrMapOvr>
+    <a:masterClrMapping/>
+  </p:clrMapOvr>
+</p:notes>
+</file>
+
+<file path=ppt/notesSlides/notesSlide15.xml><?xml version="1.0" encoding="utf-8"?>
+<p:notes xmlns:a="http://schemas.openxmlformats.org/drawingml/2006/main" xmlns:r="http://schemas.openxmlformats.org/officeDocument/2006/relationships" xmlns:p="http://schemas.openxmlformats.org/presentationml/2006/main">
+  <p:cSld>
+    <p:spTree>
+      <p:nvGrpSpPr>
+        <p:cNvPr id="1" name=""/>
+        <p:cNvGrpSpPr/>
+        <p:nvPr/>
+      </p:nvGrpSpPr>
+      <p:grpSpPr>
+        <a:xfrm>
+          <a:off x="0" y="0"/>
+          <a:ext cx="0" cy="0"/>
+          <a:chOff x="0" y="0"/>
+          <a:chExt cx="0" cy="0"/>
+        </a:xfrm>
+      </p:grpSpPr>
+      <p:sp>
+        <p:nvSpPr>
+          <p:cNvPr id="2" name="Slide Image Placeholder 1"/>
+          <p:cNvSpPr>
+            <a:spLocks noGrp="1" noRot="1" noChangeAspect="1"/>
+          </p:cNvSpPr>
+          <p:nvPr>
+            <p:ph type="sldImg"/>
+          </p:nvPr>
+        </p:nvSpPr>
+        <p:spPr/>
+      </p:sp>
+      <p:sp>
+        <p:nvSpPr>
+          <p:cNvPr id="3" name="Notes Placeholder 2"/>
+          <p:cNvSpPr>
+            <a:spLocks noGrp="1"/>
+          </p:cNvSpPr>
+          <p:nvPr>
+            <p:ph type="body" idx="1"/>
+          </p:nvPr>
+        </p:nvSpPr>
+        <p:spPr/>
+        <p:txBody>
+          <a:bodyPr/>
+          <a:lstStyle/>
+          <a:p>
+            <a:r>
+              <a:rPr lang="en-US" dirty="0"/>
+              <a:t>Recap with the three verbs. Cold-call: "the next Log4Shell drops at 2am — what artifact tells you if you're affected?" (the SBOM). ~2 min.</a:t>
+            </a:r>
+            <a:endParaRPr lang="en-US" dirty="0"/>
+          </a:p>
+        </p:txBody>
+      </p:sp>
+      <p:sp>
+        <p:nvSpPr>
+          <p:cNvPr id="4" name="Slide Number Placeholder 3"/>
+          <p:cNvSpPr>
+            <a:spLocks noGrp="1"/>
+          </p:cNvSpPr>
+          <p:nvPr>
+            <p:ph type="sldNum" sz="quarter" idx="10"/>
+          </p:nvPr>
+        </p:nvSpPr>
+        <p:spPr/>
+        <p:txBody>
+          <a:bodyPr/>
+          <a:lstStyle/>
+          <a:p>
+            <a:fld id="{F7021451-1387-4CA6-816F-3879F97B5CBC}" type="slidenum">
+              <a:rPr lang="en-US"/>
+              <a:t>15</a:t>
+            </a:fld>
+            <a:endParaRPr lang="en-US"/>
+          </a:p>
+        </p:txBody>
+      </p:sp>
+    </p:spTree>
+    <p:extLst>
+      <p:ext uri="{BB962C8B-B14F-4D97-AF65-F5344CB8AC3E}">
+        <p14:creationId xmlns:p14="http://schemas.microsoft.com/office/powerpoint/2010/main" val="1024086991"/>
+      </p:ext>
+    </p:extLst>
+  </p:cSld>
+  <p:clrMapOvr>
+    <a:masterClrMapping/>
+  </p:clrMapOvr>
+</p:notes>
+</file>
+
+<file path=ppt/notesSlides/notesSlide16.xml><?xml version="1.0" encoding="utf-8"?>
+<p:notes xmlns:a="http://schemas.openxmlformats.org/drawingml/2006/main" xmlns:r="http://schemas.openxmlformats.org/officeDocument/2006/relationships" xmlns:p="http://schemas.openxmlformats.org/presentationml/2006/main">
+  <p:cSld>
+    <p:spTree>
+      <p:nvGrpSpPr>
+        <p:cNvPr id="1" name=""/>
+        <p:cNvGrpSpPr/>
+        <p:nvPr/>
+      </p:nvGrpSpPr>
+      <p:grpSpPr>
+        <a:xfrm>
+          <a:off x="0" y="0"/>
+          <a:ext cx="0" cy="0"/>
+          <a:chOff x="0" y="0"/>
+          <a:chExt cx="0" cy="0"/>
+        </a:xfrm>
+      </p:grpSpPr>
+      <p:sp>
+        <p:nvSpPr>
+          <p:cNvPr id="2" name="Slide Image Placeholder 1"/>
+          <p:cNvSpPr>
+            <a:spLocks noGrp="1" noRot="1" noChangeAspect="1"/>
+          </p:cNvSpPr>
+          <p:nvPr>
+            <p:ph type="sldImg"/>
+          </p:nvPr>
+        </p:nvSpPr>
+        <p:spPr/>
+      </p:sp>
+      <p:sp>
+        <p:nvSpPr>
+          <p:cNvPr id="3" name="Notes Placeholder 2"/>
+          <p:cNvSpPr>
+            <a:spLocks noGrp="1"/>
+          </p:cNvSpPr>
+          <p:nvPr>
+            <p:ph type="body" idx="1"/>
+          </p:nvPr>
+        </p:nvSpPr>
+        <p:spPr/>
+        <p:txBody>
+          <a:bodyPr/>
+          <a:lstStyle/>
+          <a:p>
+            <a:r>
+              <a:rPr lang="en-US" dirty="0"/>
+              <a:t>Cliffhanger: "Next week — where your code runs. We'll hunt cloud/container misconfigs, the #1 real-world breach cause."</a:t>
+            </a:r>
+            <a:endParaRPr lang="en-US" dirty="0"/>
+          </a:p>
+        </p:txBody>
+      </p:sp>
+      <p:sp>
+        <p:nvSpPr>
+          <p:cNvPr id="4" name="Slide Number Placeholder 3"/>
+          <p:cNvSpPr>
+            <a:spLocks noGrp="1"/>
+          </p:cNvSpPr>
+          <p:nvPr>
+            <p:ph type="sldNum" sz="quarter" idx="10"/>
+          </p:nvPr>
+        </p:nvSpPr>
+        <p:spPr/>
+        <p:txBody>
+          <a:bodyPr/>
+          <a:lstStyle/>
+          <a:p>
+            <a:fld id="{F7021451-1387-4CA6-816F-3879F97B5CBC}" type="slidenum">
+              <a:rPr lang="en-US"/>
+              <a:t>16</a:t>
             </a:fld>
             <a:endParaRPr lang="en-US"/>
           </a:p>
@@ -1307,7 +1485,7 @@
           <a:p>
             <a:r>
               <a:rPr lang="en-US" dirty="0"/>
-              <a:t>Define dependency confusion clearly (it's the game): if your internal pkg "acme-utils" isn't scoped, a public "acme-utils" with a higher version number can get pulled instead. Transitive = you vet your 10 deps, but they pull 800 you never saw. ~5 min.</a:t>
+              <a:t>Spend time on xz (2024): a patient attacker became a trusted maintainer over years, then planted a backdoor caught only by luck (a 0.5s SSH delay). The lesson: trust in maintainers is itself attackable. ~5 min.</a:t>
             </a:r>
             <a:endParaRPr lang="en-US" dirty="0"/>
           </a:p>
@@ -1395,7 +1573,7 @@
           <a:p>
             <a:r>
               <a:rPr lang="en-US" dirty="0"/>
-              <a:t>Hands-on tooling (ties to W2 SCA). Run trivy live on the project — it lists CVEs + the fixed version. Q6 of the quiz asks for one real vulnerable dependency they found + remediation. ~4 min.</a:t>
+              <a:t>Define dependency confusion clearly (it's the game): if your internal pkg "acme-utils" isn't scoped, a public "acme-utils" with a higher version number can get pulled instead. Transitive = you vet your 10 deps, but they pull 800 you never saw. Stress the install-time-execution point — it's why "I never imported it" isn't a defense, and it's exactly what the lab's PWNED.txt marker proves. ~5 min.</a:t>
             </a:r>
             <a:endParaRPr lang="en-US" dirty="0"/>
           </a:p>
@@ -1483,7 +1661,7 @@
           <a:p>
             <a:r>
               <a:rPr lang="en-US" dirty="0"/>
-              <a:t>SBOM = the food-label analogy: you can't manage what you can't list. When the next Log4Shell drops, an SBOM answers "are we affected?" in seconds. SLSA = levels (1-4) of how tamper-resistant your build pipeline is. ~5 min.</a:t>
+              <a:t>Hands-on tooling (ties to W2 SCA). This lab is pure Python — no npm project — so it's trivy fs + pip-audit, not npm audit/dependency-check. Run trivy live on the project — it lists CVEs + the fixed version. Q6 of the quiz asks for one real vulnerable dependency they found + remediation. ~4 min.</a:t>
             </a:r>
             <a:endParaRPr lang="en-US" dirty="0"/>
           </a:p>
@@ -1571,7 +1749,7 @@
           <a:p>
             <a:r>
               <a:rPr lang="en-US" dirty="0"/>
-              <a:t>Demo the sign→verify loop. Keyless (Sigstore) = identity-based signing via OIDC, no key to leak. The deploy gate: refuse any image that doesn't verify → a tampered artifact can't ship. This is the lab's defend step. ~4 min.</a:t>
+              <a:t>SBOM = the food-label analogy: you can't manage what you can't list. When the next Log4Shell drops, an SBOM answers "are we affected?" in seconds. SLSA Build Track = levels L0–L3 of build provenance / tamper-resistance (L3 is the top; the old "1–4" numbering was v0.1 and is deprecated). ~5 min.</a:t>
             </a:r>
             <a:endParaRPr lang="en-US" dirty="0"/>
           </a:p>
@@ -1659,7 +1837,7 @@
           <a:p>
             <a:r>
               <a:rPr lang="en-US" dirty="0"/>
-              <a:t>The managed option students will meet in industry. Dependabot is the practical supply-chain workhorse: it opens PRs bumping vulnerable deps automatically. Push protection stops secrets at commit time (recall W2). ~3 min.</a:t>
+              <a:t>Demo the sign→verify loop. sign.sh runs both tools dockerized — match that here, not a bare local binary. Keyless (Sigstore) = identity-based signing via OIDC through Fulcio, logged in Rekor, no key to leak — name both by name, worksheet Q4 grades on the vocabulary. The deploy gate: refuse any image that doesn't verify → a tampered artifact can't ship. This is the lab's defend step. ~4 min.</a:t>
             </a:r>
             <a:endParaRPr lang="en-US" dirty="0"/>
           </a:p>
@@ -2292,7 +2470,7 @@
                 <a:ea typeface="Arial" pitchFamily="34" charset="-122"/>
                 <a:cs typeface="Arial" pitchFamily="34" charset="-120"/>
               </a:rPr>
-              <a:t>Defenses</a:t>
+              <a:t>Signing with Cosign (keyless) (cont.)</a:t>
             </a:r>
             <a:endParaRPr lang="en-US" sz="2600" dirty="0"/>
           </a:p>
@@ -2307,11 +2485,11 @@
         <p:spPr>
           <a:xfrm>
             <a:off x="457200" y="1325880"/>
-            <a:ext cx="8229600" cy="1828800"/>
+            <a:ext cx="8229600" cy="2523744"/>
           </a:xfrm>
           <a:prstGeom prst="roundRect">
             <a:avLst>
-              <a:gd name="adj" fmla="val 4000"/>
+              <a:gd name="adj" fmla="val 2899"/>
             </a:avLst>
           </a:prstGeom>
           <a:solidFill>
@@ -2336,7 +2514,7 @@
         <p:spPr>
           <a:xfrm>
             <a:off x="731520" y="1435608"/>
-            <a:ext cx="7680960" cy="1609344"/>
+            <a:ext cx="7680960" cy="2304288"/>
           </a:xfrm>
           <a:prstGeom prst="rect">
             <a:avLst/>
@@ -2345,7 +2523,9 @@
           <a:ln/>
         </p:spPr>
         <p:txBody>
-          <a:bodyPr wrap="square" lIns="0" tIns="0" rIns="0" bIns="0" rtlCol="0" anchor="t"/>
+          <a:bodyPr wrap="square" lIns="0" tIns="0" rIns="0" bIns="0" rtlCol="0" anchor="t">
+            <a:normAutofit/>
+          </a:bodyPr>
           <a:lstStyle/>
           <a:p>
             <a:pPr marL="342900" indent="-342900">
@@ -2364,7 +2544,7 @@
                 <a:ea typeface="Calibri" pitchFamily="34" charset="-122"/>
                 <a:cs typeface="Calibri" pitchFamily="34" charset="-120"/>
               </a:rPr>
-              <a:t>Pin versions + lockfiles; scope internal registries</a:t>
+              <a:t>Unsigned/tampered image → verification fails</a:t>
             </a:r>
             <a:endParaRPr lang="en-US" sz="1400" dirty="0"/>
           </a:p>
@@ -2385,7 +2565,7 @@
                 <a:ea typeface="Calibri" pitchFamily="34" charset="-122"/>
                 <a:cs typeface="Calibri" pitchFamily="34" charset="-120"/>
               </a:rPr>
-              <a:t>Verify signatures before deploy (admission policy)</a:t>
+              <a:t>Every step needs the docker-socket mount (trivy has to reach the local image, not just a local dir) — the SBOM step is a common copy-paste failure if it's dropped</a:t>
             </a:r>
             <a:endParaRPr lang="en-US" sz="1400" dirty="0"/>
           </a:p>
@@ -2406,7 +2586,7 @@
                 <a:ea typeface="Calibri" pitchFamily="34" charset="-122"/>
                 <a:cs typeface="Calibri" pitchFamily="34" charset="-120"/>
               </a:rPr>
-              <a:t>Generate + store SBOMs per release</a:t>
+              <a:t>cosign verify needs the two --certificate-*-regexp flags in keyless mode — without them it errors, it doesn't just "fail closed"</a:t>
             </a:r>
             <a:endParaRPr lang="en-US" sz="1400" dirty="0"/>
           </a:p>
@@ -2427,28 +2607,7 @@
                 <a:ea typeface="Calibri" pitchFamily="34" charset="-122"/>
                 <a:cs typeface="Calibri" pitchFamily="34" charset="-120"/>
               </a:rPr>
-              <a:t>2FA/MFA on dev/CI/cloud accounts; least privilege</a:t>
-            </a:r>
-            <a:endParaRPr lang="en-US" sz="1400" dirty="0"/>
-          </a:p>
-          <a:p>
-            <a:pPr marL="342900" indent="-342900">
-              <a:spcAft>
-                <a:spcPts val="600"/>
-              </a:spcAft>
-              <a:buSzPct val="100000"/>
-              <a:buChar char="•"/>
-            </a:pPr>
-            <a:r>
-              <a:rPr lang="en-US" sz="1400" dirty="0">
-                <a:solidFill>
-                  <a:srgbClr val="1F2937"/>
-                </a:solidFill>
-                <a:latin typeface="Calibri" pitchFamily="34" charset="0"/>
-                <a:ea typeface="Calibri" pitchFamily="34" charset="-122"/>
-                <a:cs typeface="Calibri" pitchFamily="34" charset="-120"/>
-              </a:rPr>
-              <a:t>Automate SCA in CI (next week)</a:t>
+              <a:t>Keyless signing is backed by Fulcio (short-lived cert authority) + Rekor (public transparency log) — no long-lived private key sitting on disk to leak (CWE-321)</a:t>
             </a:r>
             <a:endParaRPr lang="en-US" sz="1400" dirty="0"/>
           </a:p>
@@ -2633,7 +2792,7 @@
                 <a:ea typeface="Arial" pitchFamily="34" charset="-122"/>
                 <a:cs typeface="Arial" pitchFamily="34" charset="-120"/>
               </a:rPr>
-              <a:t>📦 Game — Dependency Confusion Heist</a:t>
+              <a:t>Tooling — GitHub Advanced Security (GHAS)</a:t>
             </a:r>
             <a:endParaRPr lang="en-US" sz="2600" dirty="0"/>
           </a:p>
@@ -2647,16 +2806,25 @@
         </p:nvSpPr>
         <p:spPr>
           <a:xfrm>
-            <a:off x="502920" y="1325880"/>
-            <a:ext cx="384048" cy="384048"/>
-          </a:xfrm>
-          <a:prstGeom prst="ellipse">
-            <a:avLst/>
+            <a:off x="457200" y="1325880"/>
+            <a:ext cx="8229600" cy="1719072"/>
+          </a:xfrm>
+          <a:prstGeom prst="roundRect">
+            <a:avLst>
+              <a:gd name="adj" fmla="val 4255"/>
+            </a:avLst>
           </a:prstGeom>
           <a:solidFill>
-            <a:srgbClr val="E35205"/>
+            <a:srgbClr val="F1F5F9"/>
           </a:solidFill>
           <a:ln/>
+          <a:effectLst>
+            <a:outerShdw sx="100000" sy="100000" kx="0" ky="0" algn="bl" rotWithShape="0" blurRad="76200" dist="25400" dir="5400000">
+              <a:srgbClr val="000000">
+                <a:alpha val="12000"/>
+              </a:srgbClr>
+            </a:outerShdw>
+          </a:effectLst>
         </p:spPr>
       </p:sp>
       <p:sp>
@@ -2667,8 +2835,8 @@
         </p:nvSpPr>
         <p:spPr>
           <a:xfrm>
-            <a:off x="502920" y="1325880"/>
-            <a:ext cx="384048" cy="384048"/>
+            <a:off x="731520" y="1435608"/>
+            <a:ext cx="7680960" cy="1499616"/>
           </a:xfrm>
           <a:prstGeom prst="rect">
             <a:avLst/>
@@ -2677,53 +2845,20 @@
           <a:ln/>
         </p:spPr>
         <p:txBody>
-          <a:bodyPr wrap="square" lIns="0" tIns="0" rIns="0" bIns="0" rtlCol="0" anchor="ctr"/>
-          <a:lstStyle/>
-          <a:p>
-            <a:pPr algn="ctr" indent="0" marL="0">
-              <a:buNone/>
-            </a:pPr>
-            <a:r>
-              <a:rPr lang="en-US" sz="1500" b="1" dirty="0">
-                <a:solidFill>
-                  <a:srgbClr val="0E1726"/>
-                </a:solidFill>
-                <a:latin typeface="Arial" pitchFamily="34" charset="0"/>
-                <a:ea typeface="Arial" pitchFamily="34" charset="-122"/>
-                <a:cs typeface="Arial" pitchFamily="34" charset="-120"/>
-              </a:rPr>
-              <a:t>1</a:t>
-            </a:r>
-            <a:endParaRPr lang="en-US" sz="1500" dirty="0"/>
-          </a:p>
-        </p:txBody>
-      </p:sp>
-      <p:sp>
-        <p:nvSpPr>
-          <p:cNvPr id="7" name="Text 4"/>
-          <p:cNvSpPr/>
-          <p:nvPr/>
-        </p:nvSpPr>
-        <p:spPr>
-          <a:xfrm>
-            <a:off x="1051560" y="1325880"/>
-            <a:ext cx="7589520" cy="384048"/>
-          </a:xfrm>
-          <a:prstGeom prst="rect">
-            <a:avLst/>
-          </a:prstGeom>
-          <a:noFill/>
-          <a:ln/>
-        </p:spPr>
-        <p:txBody>
-          <a:bodyPr wrap="square" lIns="0" tIns="0" rIns="0" bIns="0" rtlCol="0" anchor="ctr"/>
-          <a:lstStyle/>
-          <a:p>
-            <a:pPr indent="0" marL="0">
-              <a:buNone/>
-            </a:pPr>
-            <a:r>
-              <a:rPr lang="en-US" sz="1350" dirty="0">
+          <a:bodyPr wrap="square" lIns="0" tIns="0" rIns="0" bIns="0" rtlCol="0" anchor="t">
+            <a:normAutofit/>
+          </a:bodyPr>
+          <a:lstStyle/>
+          <a:p>
+            <a:pPr marL="342900" indent="-342900">
+              <a:spcAft>
+                <a:spcPts val="600"/>
+              </a:spcAft>
+              <a:buSzPct val="100000"/>
+              <a:buChar char="•"/>
+            </a:pPr>
+            <a:r>
+              <a:rPr lang="en-US" sz="1400" dirty="0">
                 <a:solidFill>
                   <a:srgbClr val="1F2937"/>
                 </a:solidFill>
@@ -2731,97 +2866,20 @@
                 <a:ea typeface="Calibri" pitchFamily="34" charset="-122"/>
                 <a:cs typeface="Calibri" pitchFamily="34" charset="-120"/>
               </a:rPr>
-              <a:t>Attack: in a controlled registry, plant/identify a typosquat or higher-version public pkg that gets pulled in</a:t>
-            </a:r>
-            <a:endParaRPr lang="en-US" sz="1350" dirty="0"/>
-          </a:p>
-        </p:txBody>
-      </p:sp>
-      <p:sp>
-        <p:nvSpPr>
-          <p:cNvPr id="8" name="Shape 5"/>
-          <p:cNvSpPr/>
-          <p:nvPr/>
-        </p:nvSpPr>
-        <p:spPr>
-          <a:xfrm>
-            <a:off x="502920" y="1783080"/>
-            <a:ext cx="384048" cy="384048"/>
-          </a:xfrm>
-          <a:prstGeom prst="ellipse">
-            <a:avLst/>
-          </a:prstGeom>
-          <a:solidFill>
-            <a:srgbClr val="E35205"/>
-          </a:solidFill>
-          <a:ln/>
-        </p:spPr>
-      </p:sp>
-      <p:sp>
-        <p:nvSpPr>
-          <p:cNvPr id="9" name="Text 6"/>
-          <p:cNvSpPr/>
-          <p:nvPr/>
-        </p:nvSpPr>
-        <p:spPr>
-          <a:xfrm>
-            <a:off x="502920" y="1783080"/>
-            <a:ext cx="384048" cy="384048"/>
-          </a:xfrm>
-          <a:prstGeom prst="rect">
-            <a:avLst/>
-          </a:prstGeom>
-          <a:noFill/>
-          <a:ln/>
-        </p:spPr>
-        <p:txBody>
-          <a:bodyPr wrap="square" lIns="0" tIns="0" rIns="0" bIns="0" rtlCol="0" anchor="ctr"/>
-          <a:lstStyle/>
-          <a:p>
-            <a:pPr algn="ctr" indent="0" marL="0">
-              <a:buNone/>
-            </a:pPr>
-            <a:r>
-              <a:rPr lang="en-US" sz="1500" b="1" dirty="0">
-                <a:solidFill>
-                  <a:srgbClr val="0E1726"/>
-                </a:solidFill>
-                <a:latin typeface="Arial" pitchFamily="34" charset="0"/>
-                <a:ea typeface="Arial" pitchFamily="34" charset="-122"/>
-                <a:cs typeface="Arial" pitchFamily="34" charset="-120"/>
-              </a:rPr>
-              <a:t>2</a:t>
-            </a:r>
-            <a:endParaRPr lang="en-US" sz="1500" dirty="0"/>
-          </a:p>
-        </p:txBody>
-      </p:sp>
-      <p:sp>
-        <p:nvSpPr>
-          <p:cNvPr id="10" name="Text 7"/>
-          <p:cNvSpPr/>
-          <p:nvPr/>
-        </p:nvSpPr>
-        <p:spPr>
-          <a:xfrm>
-            <a:off x="1051560" y="1783080"/>
-            <a:ext cx="7589520" cy="384048"/>
-          </a:xfrm>
-          <a:prstGeom prst="rect">
-            <a:avLst/>
-          </a:prstGeom>
-          <a:noFill/>
-          <a:ln/>
-        </p:spPr>
-        <p:txBody>
-          <a:bodyPr wrap="square" lIns="0" tIns="0" rIns="0" bIns="0" rtlCol="0" anchor="ctr"/>
-          <a:lstStyle/>
-          <a:p>
-            <a:pPr indent="0" marL="0">
-              <a:buNone/>
-            </a:pPr>
-            <a:r>
-              <a:rPr lang="en-US" sz="1350" dirty="0">
+              <a:t>Secret scanning + push protection — block secrets at push time (before they reach the remote)</a:t>
+            </a:r>
+            <a:endParaRPr lang="en-US" sz="1400" dirty="0"/>
+          </a:p>
+          <a:p>
+            <a:pPr marL="342900" indent="-342900">
+              <a:spcAft>
+                <a:spcPts val="600"/>
+              </a:spcAft>
+              <a:buSzPct val="100000"/>
+              <a:buChar char="•"/>
+            </a:pPr>
+            <a:r>
+              <a:rPr lang="en-US" sz="1400" dirty="0">
                 <a:solidFill>
                   <a:srgbClr val="1F2937"/>
                 </a:solidFill>
@@ -2829,45 +2887,87 @@
                 <a:ea typeface="Calibri" pitchFamily="34" charset="-122"/>
                 <a:cs typeface="Calibri" pitchFamily="34" charset="-120"/>
               </a:rPr>
-              <a:t>Defend: pin + scope; generate SBOM; sign &amp; verify with Cosign; add a provenance gate</a:t>
-            </a:r>
-            <a:endParaRPr lang="en-US" sz="1350" dirty="0"/>
-          </a:p>
-        </p:txBody>
-      </p:sp>
-      <p:sp>
-        <p:nvSpPr>
-          <p:cNvPr id="11" name="Text 8"/>
-          <p:cNvSpPr/>
-          <p:nvPr/>
-        </p:nvSpPr>
-        <p:spPr>
-          <a:xfrm>
-            <a:off x="457200" y="4800600"/>
-            <a:ext cx="6949440" cy="274320"/>
-          </a:xfrm>
-          <a:prstGeom prst="rect">
-            <a:avLst/>
-          </a:prstGeom>
-          <a:noFill/>
-          <a:ln/>
-        </p:spPr>
-        <p:txBody>
-          <a:bodyPr wrap="square" lIns="0" tIns="0" rIns="0" bIns="0" rtlCol="0" anchor="ctr"/>
-          <a:lstStyle/>
-          <a:p>
-            <a:pPr indent="0" marL="0">
-              <a:buNone/>
-            </a:pPr>
-            <a:r>
-              <a:rPr lang="en-US" sz="900" dirty="0">
-                <a:solidFill>
-                  <a:srgbClr val="64748B"/>
+              <a:t>CodeQL code scanning — semantic SAST queries</a:t>
+            </a:r>
+            <a:endParaRPr lang="en-US" sz="1400" dirty="0"/>
+          </a:p>
+          <a:p>
+            <a:pPr marL="342900" indent="-342900">
+              <a:spcAft>
+                <a:spcPts val="600"/>
+              </a:spcAft>
+              <a:buSzPct val="100000"/>
+              <a:buChar char="•"/>
+            </a:pPr>
+            <a:r>
+              <a:rPr lang="en-US" sz="1400" dirty="0">
+                <a:solidFill>
+                  <a:srgbClr val="1F2937"/>
                 </a:solidFill>
                 <a:latin typeface="Calibri" pitchFamily="34" charset="0"/>
                 <a:ea typeface="Calibri" pitchFamily="34" charset="-122"/>
                 <a:cs typeface="Calibri" pitchFamily="34" charset="-120"/>
               </a:rPr>
+              <a:t>Dependabot — alerts + auto-PRs for vulnerable deps</a:t>
+            </a:r>
+            <a:endParaRPr lang="en-US" sz="1400" dirty="0"/>
+          </a:p>
+          <a:p>
+            <a:pPr marL="342900" indent="-342900">
+              <a:spcAft>
+                <a:spcPts val="600"/>
+              </a:spcAft>
+              <a:buSzPct val="100000"/>
+              <a:buChar char="•"/>
+            </a:pPr>
+            <a:r>
+              <a:rPr lang="en-US" sz="1400" dirty="0">
+                <a:solidFill>
+                  <a:srgbClr val="1F2937"/>
+                </a:solidFill>
+                <a:latin typeface="Calibri" pitchFamily="34" charset="0"/>
+                <a:ea typeface="Calibri" pitchFamily="34" charset="-122"/>
+                <a:cs typeface="Calibri" pitchFamily="34" charset="-120"/>
+              </a:rPr>
+              <a:t>Native in the repo → results in the Security tab</a:t>
+            </a:r>
+            <a:endParaRPr lang="en-US" sz="1400" dirty="0"/>
+          </a:p>
+        </p:txBody>
+      </p:sp>
+      <p:sp>
+        <p:nvSpPr>
+          <p:cNvPr id="7" name="Text 4"/>
+          <p:cNvSpPr/>
+          <p:nvPr/>
+        </p:nvSpPr>
+        <p:spPr>
+          <a:xfrm>
+            <a:off x="457200" y="4800600"/>
+            <a:ext cx="6949440" cy="274320"/>
+          </a:xfrm>
+          <a:prstGeom prst="rect">
+            <a:avLst/>
+          </a:prstGeom>
+          <a:noFill/>
+          <a:ln/>
+        </p:spPr>
+        <p:txBody>
+          <a:bodyPr wrap="square" lIns="0" tIns="0" rIns="0" bIns="0" rtlCol="0" anchor="ctr"/>
+          <a:lstStyle/>
+          <a:p>
+            <a:pPr indent="0" marL="0">
+              <a:buNone/>
+            </a:pPr>
+            <a:r>
+              <a:rPr lang="en-US" sz="900" dirty="0">
+                <a:solidFill>
+                  <a:srgbClr val="64748B"/>
+                </a:solidFill>
+                <a:latin typeface="Calibri" pitchFamily="34" charset="0"/>
+                <a:ea typeface="Calibri" pitchFamily="34" charset="-122"/>
+                <a:cs typeface="Calibri" pitchFamily="34" charset="-120"/>
+              </a:rPr>
               <a:t>Software Security · Week 12</a:t>
             </a:r>
             <a:endParaRPr lang="en-US" sz="900" dirty="0"/>
@@ -2876,7 +2976,7 @@
       </p:sp>
       <p:pic>
         <p:nvPicPr>
-          <p:cNvPr id="12" name="Image 1" descr="/Users/pop7/Library/CloudStorage/OneDrive-MonsterConnectCo.,Ltd/Lecture/KOSEN69 - software-security/slides/pptx/assets/logo-small.png">    </p:cNvPr>
+          <p:cNvPr id="8" name="Image 1" descr="/Users/pop7/Library/CloudStorage/OneDrive-MonsterConnectCo.,Ltd/Lecture/KOSEN69 - software-security/slides/pptx/assets/logo-small.png">    </p:cNvPr>
           <p:cNvPicPr>
             <a:picLocks noChangeAspect="1"/>
           </p:cNvPicPr>
@@ -3014,7 +3114,7 @@
                 <a:ea typeface="Arial" pitchFamily="34" charset="-122"/>
                 <a:cs typeface="Arial" pitchFamily="34" charset="-120"/>
               </a:rPr>
-              <a:t>Deliverable</a:t>
+              <a:t>Defenses</a:t>
             </a:r>
             <a:endParaRPr lang="en-US" sz="2600" dirty="0"/>
           </a:p>
@@ -3029,72 +3129,11 @@
         <p:spPr>
           <a:xfrm>
             <a:off x="457200" y="1325880"/>
-            <a:ext cx="8229600" cy="822960"/>
+            <a:ext cx="8229600" cy="2743200"/>
           </a:xfrm>
           <a:prstGeom prst="roundRect">
             <a:avLst>
-              <a:gd name="adj" fmla="val 8889"/>
-            </a:avLst>
-          </a:prstGeom>
-          <a:solidFill>
-            <a:srgbClr val="E8EDF3"/>
-          </a:solidFill>
-          <a:ln/>
-        </p:spPr>
-      </p:sp>
-      <p:sp>
-        <p:nvSpPr>
-          <p:cNvPr id="6" name="Text 3"/>
-          <p:cNvSpPr/>
-          <p:nvPr/>
-        </p:nvSpPr>
-        <p:spPr>
-          <a:xfrm>
-            <a:off x="731520" y="1325880"/>
-            <a:ext cx="7680960" cy="822960"/>
-          </a:xfrm>
-          <a:prstGeom prst="rect">
-            <a:avLst/>
-          </a:prstGeom>
-          <a:noFill/>
-          <a:ln/>
-        </p:spPr>
-        <p:txBody>
-          <a:bodyPr wrap="square" lIns="0" tIns="0" rIns="0" bIns="0" rtlCol="0" anchor="ctr"/>
-          <a:lstStyle/>
-          <a:p>
-            <a:pPr indent="0" marL="0">
-              <a:buNone/>
-            </a:pPr>
-            <a:r>
-              <a:rPr lang="en-US" sz="1400" i="1" dirty="0">
-                <a:solidFill>
-                  <a:srgbClr val="E35205"/>
-                </a:solidFill>
-                <a:latin typeface="Calibri" pitchFamily="34" charset="0"/>
-                <a:ea typeface="Calibri" pitchFamily="34" charset="-122"/>
-                <a:cs typeface="Calibri" pitchFamily="34" charset="-120"/>
-              </a:rPr>
-              <a:t>📋 Worksheet 12 — labs/week12-supply-chain/worksheet.md (Part 3) · kickoff: bash sca_scan.sh (trivy fs + pip-audit)</a:t>
-            </a:r>
-            <a:endParaRPr lang="en-US" sz="1400" dirty="0"/>
-          </a:p>
-        </p:txBody>
-      </p:sp>
-      <p:sp>
-        <p:nvSpPr>
-          <p:cNvPr id="7" name="Shape 4"/>
-          <p:cNvSpPr/>
-          <p:nvPr/>
-        </p:nvSpPr>
-        <p:spPr>
-          <a:xfrm>
-            <a:off x="457200" y="2313432"/>
-            <a:ext cx="8229600" cy="1517904"/>
-          </a:xfrm>
-          <a:prstGeom prst="roundRect">
-            <a:avLst>
-              <a:gd name="adj" fmla="val 4819"/>
+              <a:gd name="adj" fmla="val 2667"/>
             </a:avLst>
           </a:prstGeom>
           <a:solidFill>
@@ -3112,14 +3151,14 @@
       </p:sp>
       <p:sp>
         <p:nvSpPr>
-          <p:cNvPr id="8" name="Text 5"/>
+          <p:cNvPr id="6" name="Text 3"/>
           <p:cNvSpPr/>
           <p:nvPr/>
         </p:nvSpPr>
         <p:spPr>
           <a:xfrm>
-            <a:off x="731520" y="2423160"/>
-            <a:ext cx="7680960" cy="1298448"/>
+            <a:off x="731520" y="1435608"/>
+            <a:ext cx="7680960" cy="2523744"/>
           </a:xfrm>
           <a:prstGeom prst="rect">
             <a:avLst/>
@@ -3128,7 +3167,9 @@
           <a:ln/>
         </p:spPr>
         <p:txBody>
-          <a:bodyPr wrap="square" lIns="0" tIns="0" rIns="0" bIns="0" rtlCol="0" anchor="t"/>
+          <a:bodyPr wrap="square" lIns="0" tIns="0" rIns="0" bIns="0" rtlCol="0" anchor="t">
+            <a:normAutofit/>
+          </a:bodyPr>
           <a:lstStyle/>
           <a:p>
             <a:pPr marL="342900" indent="-342900">
@@ -3147,7 +3188,7 @@
                 <a:ea typeface="Calibri" pitchFamily="34" charset="-122"/>
                 <a:cs typeface="Calibri" pitchFamily="34" charset="-120"/>
               </a:rPr>
-              <a:t>SCA report + remediation plan</a:t>
+              <a:t>pip install --require-hashes — a substituted package's hash won't match; install refuses</a:t>
             </a:r>
             <a:endParaRPr lang="en-US" sz="1400" dirty="0"/>
           </a:p>
@@ -3168,7 +3209,7 @@
                 <a:ea typeface="Calibri" pitchFamily="34" charset="-122"/>
                 <a:cs typeface="Calibri" pitchFamily="34" charset="-120"/>
               </a:rPr>
-              <a:t>SBOM file + sign/verify transcript</a:t>
+              <a:t>Single --index-url, not --extra-index-url — one trusted index; the resolver won't "shop around" and pick a higher-versioned public package over your internal one</a:t>
             </a:r>
             <a:endParaRPr lang="en-US" sz="1400" dirty="0"/>
           </a:p>
@@ -3189,7 +3230,7 @@
                 <a:ea typeface="Calibri" pitchFamily="34" charset="-122"/>
                 <a:cs typeface="Calibri" pitchFamily="34" charset="-120"/>
               </a:rPr>
-              <a:t>One-paragraph SLSA self-assessment (which level + why)</a:t>
+              <a:t>Verify signatures before deploy (admission policy)</a:t>
             </a:r>
             <a:endParaRPr lang="en-US" sz="1400" dirty="0"/>
           </a:p>
@@ -3210,45 +3251,87 @@
                 <a:ea typeface="Calibri" pitchFamily="34" charset="-122"/>
                 <a:cs typeface="Calibri" pitchFamily="34" charset="-120"/>
               </a:rPr>
-              <a:t>+ Audit the AI / EiPE / Prompt Problem (see worksheet)</a:t>
+              <a:t>Generate + store SBOMs per release</a:t>
             </a:r>
             <a:endParaRPr lang="en-US" sz="1400" dirty="0"/>
           </a:p>
-        </p:txBody>
-      </p:sp>
-      <p:sp>
-        <p:nvSpPr>
-          <p:cNvPr id="9" name="Text 6"/>
-          <p:cNvSpPr/>
-          <p:nvPr/>
-        </p:nvSpPr>
-        <p:spPr>
-          <a:xfrm>
-            <a:off x="457200" y="4800600"/>
-            <a:ext cx="6949440" cy="274320"/>
-          </a:xfrm>
-          <a:prstGeom prst="rect">
-            <a:avLst/>
-          </a:prstGeom>
-          <a:noFill/>
-          <a:ln/>
-        </p:spPr>
-        <p:txBody>
-          <a:bodyPr wrap="square" lIns="0" tIns="0" rIns="0" bIns="0" rtlCol="0" anchor="ctr"/>
-          <a:lstStyle/>
-          <a:p>
-            <a:pPr indent="0" marL="0">
-              <a:buNone/>
-            </a:pPr>
-            <a:r>
-              <a:rPr lang="en-US" sz="900" dirty="0">
-                <a:solidFill>
-                  <a:srgbClr val="64748B"/>
+          <a:p>
+            <a:pPr marL="342900" indent="-342900">
+              <a:spcAft>
+                <a:spcPts val="600"/>
+              </a:spcAft>
+              <a:buSzPct val="100000"/>
+              <a:buChar char="•"/>
+            </a:pPr>
+            <a:r>
+              <a:rPr lang="en-US" sz="1400" dirty="0">
+                <a:solidFill>
+                  <a:srgbClr val="1F2937"/>
                 </a:solidFill>
                 <a:latin typeface="Calibri" pitchFamily="34" charset="0"/>
                 <a:ea typeface="Calibri" pitchFamily="34" charset="-122"/>
                 <a:cs typeface="Calibri" pitchFamily="34" charset="-120"/>
               </a:rPr>
+              <a:t>2FA/MFA on dev/CI/cloud accounts; least privilege</a:t>
+            </a:r>
+            <a:endParaRPr lang="en-US" sz="1400" dirty="0"/>
+          </a:p>
+          <a:p>
+            <a:pPr marL="342900" indent="-342900">
+              <a:spcAft>
+                <a:spcPts val="600"/>
+              </a:spcAft>
+              <a:buSzPct val="100000"/>
+              <a:buChar char="•"/>
+            </a:pPr>
+            <a:r>
+              <a:rPr lang="en-US" sz="1400" dirty="0">
+                <a:solidFill>
+                  <a:srgbClr val="1F2937"/>
+                </a:solidFill>
+                <a:latin typeface="Calibri" pitchFamily="34" charset="0"/>
+                <a:ea typeface="Calibri" pitchFamily="34" charset="-122"/>
+                <a:cs typeface="Calibri" pitchFamily="34" charset="-120"/>
+              </a:rPr>
+              <a:t>Automate SCA in CI (next week)</a:t>
+            </a:r>
+            <a:endParaRPr lang="en-US" sz="1400" dirty="0"/>
+          </a:p>
+        </p:txBody>
+      </p:sp>
+      <p:sp>
+        <p:nvSpPr>
+          <p:cNvPr id="7" name="Text 4"/>
+          <p:cNvSpPr/>
+          <p:nvPr/>
+        </p:nvSpPr>
+        <p:spPr>
+          <a:xfrm>
+            <a:off x="457200" y="4800600"/>
+            <a:ext cx="6949440" cy="274320"/>
+          </a:xfrm>
+          <a:prstGeom prst="rect">
+            <a:avLst/>
+          </a:prstGeom>
+          <a:noFill/>
+          <a:ln/>
+        </p:spPr>
+        <p:txBody>
+          <a:bodyPr wrap="square" lIns="0" tIns="0" rIns="0" bIns="0" rtlCol="0" anchor="ctr"/>
+          <a:lstStyle/>
+          <a:p>
+            <a:pPr indent="0" marL="0">
+              <a:buNone/>
+            </a:pPr>
+            <a:r>
+              <a:rPr lang="en-US" sz="900" dirty="0">
+                <a:solidFill>
+                  <a:srgbClr val="64748B"/>
+                </a:solidFill>
+                <a:latin typeface="Calibri" pitchFamily="34" charset="0"/>
+                <a:ea typeface="Calibri" pitchFamily="34" charset="-122"/>
+                <a:cs typeface="Calibri" pitchFamily="34" charset="-120"/>
+              </a:rPr>
               <a:t>Software Security · Week 12</a:t>
             </a:r>
             <a:endParaRPr lang="en-US" sz="900" dirty="0"/>
@@ -3257,7 +3340,7 @@
       </p:sp>
       <p:pic>
         <p:nvPicPr>
-          <p:cNvPr id="10" name="Image 1" descr="/Users/pop7/Library/CloudStorage/OneDrive-MonsterConnectCo.,Ltd/Lecture/KOSEN69 - software-security/slides/pptx/assets/logo-small.png">    </p:cNvPr>
+          <p:cNvPr id="8" name="Image 1" descr="/Users/pop7/Library/CloudStorage/OneDrive-MonsterConnectCo.,Ltd/Lecture/KOSEN69 - software-security/slides/pptx/assets/logo-small.png">    </p:cNvPr>
           <p:cNvPicPr>
             <a:picLocks noChangeAspect="1"/>
           </p:cNvPicPr>
@@ -3395,7 +3478,7 @@
                 <a:ea typeface="Arial" pitchFamily="34" charset="-122"/>
                 <a:cs typeface="Arial" pitchFamily="34" charset="-120"/>
               </a:rPr>
-              <a:t>Key takeaways</a:t>
+              <a:t>📦 Game — Dependency Confusion Heist</a:t>
             </a:r>
             <a:endParaRPr lang="en-US" sz="2600" dirty="0"/>
           </a:p>
@@ -3409,25 +3492,16 @@
         </p:nvSpPr>
         <p:spPr>
           <a:xfrm>
-            <a:off x="457200" y="1325880"/>
-            <a:ext cx="8229600" cy="1207008"/>
-          </a:xfrm>
-          <a:prstGeom prst="roundRect">
-            <a:avLst>
-              <a:gd name="adj" fmla="val 6061"/>
-            </a:avLst>
+            <a:off x="502920" y="1325880"/>
+            <a:ext cx="384048" cy="384048"/>
+          </a:xfrm>
+          <a:prstGeom prst="ellipse">
+            <a:avLst/>
           </a:prstGeom>
           <a:solidFill>
-            <a:srgbClr val="F1F5F9"/>
+            <a:srgbClr val="E35205"/>
           </a:solidFill>
           <a:ln/>
-          <a:effectLst>
-            <a:outerShdw sx="100000" sy="100000" kx="0" ky="0" algn="bl" rotWithShape="0" blurRad="76200" dist="25400" dir="5400000">
-              <a:srgbClr val="000000">
-                <a:alpha val="12000"/>
-              </a:srgbClr>
-            </a:outerShdw>
-          </a:effectLst>
         </p:spPr>
       </p:sp>
       <p:sp>
@@ -3438,8 +3512,8 @@
         </p:nvSpPr>
         <p:spPr>
           <a:xfrm>
-            <a:off x="731520" y="1435608"/>
-            <a:ext cx="7680960" cy="987552"/>
+            <a:off x="502920" y="1325880"/>
+            <a:ext cx="384048" cy="384048"/>
           </a:xfrm>
           <a:prstGeom prst="rect">
             <a:avLst/>
@@ -3448,18 +3522,55 @@
           <a:ln/>
         </p:spPr>
         <p:txBody>
-          <a:bodyPr wrap="square" lIns="0" tIns="0" rIns="0" bIns="0" rtlCol="0" anchor="t"/>
-          <a:lstStyle/>
-          <a:p>
-            <a:pPr marL="342900" indent="-342900">
-              <a:spcAft>
-                <a:spcPts val="600"/>
-              </a:spcAft>
-              <a:buSzPct val="100000"/>
-              <a:buChar char="•"/>
-            </a:pPr>
-            <a:r>
-              <a:rPr lang="en-US" sz="1400" dirty="0">
+          <a:bodyPr wrap="square" lIns="0" tIns="0" rIns="0" bIns="0" rtlCol="0" anchor="ctr"/>
+          <a:lstStyle/>
+          <a:p>
+            <a:pPr algn="ctr" indent="0" marL="0">
+              <a:buNone/>
+            </a:pPr>
+            <a:r>
+              <a:rPr lang="en-US" sz="1500" b="1" dirty="0">
+                <a:solidFill>
+                  <a:srgbClr val="0E1726"/>
+                </a:solidFill>
+                <a:latin typeface="Arial" pitchFamily="34" charset="0"/>
+                <a:ea typeface="Arial" pitchFamily="34" charset="-122"/>
+                <a:cs typeface="Arial" pitchFamily="34" charset="-120"/>
+              </a:rPr>
+              <a:t>1</a:t>
+            </a:r>
+            <a:endParaRPr lang="en-US" sz="1500" dirty="0"/>
+          </a:p>
+        </p:txBody>
+      </p:sp>
+      <p:sp>
+        <p:nvSpPr>
+          <p:cNvPr id="7" name="Text 4"/>
+          <p:cNvSpPr/>
+          <p:nvPr/>
+        </p:nvSpPr>
+        <p:spPr>
+          <a:xfrm>
+            <a:off x="1051560" y="1325880"/>
+            <a:ext cx="7589520" cy="658368"/>
+          </a:xfrm>
+          <a:prstGeom prst="rect">
+            <a:avLst/>
+          </a:prstGeom>
+          <a:noFill/>
+          <a:ln/>
+        </p:spPr>
+        <p:txBody>
+          <a:bodyPr wrap="square" lIns="0" tIns="0" rIns="0" bIns="0" rtlCol="0" anchor="ctr">
+            <a:normAutofit/>
+          </a:bodyPr>
+          <a:lstStyle/>
+          <a:p>
+            <a:pPr indent="0" marL="0">
+              <a:buNone/>
+            </a:pPr>
+            <a:r>
+              <a:rPr lang="en-US" sz="1350" dirty="0">
                 <a:solidFill>
                   <a:srgbClr val="1F2937"/>
                 </a:solidFill>
@@ -3467,20 +3578,99 @@
                 <a:ea typeface="Calibri" pitchFamily="34" charset="-122"/>
                 <a:cs typeface="Calibri" pitchFamily="34" charset="-120"/>
               </a:rPr>
-              <a:t>Most of your attack surface is other people's code</a:t>
-            </a:r>
-            <a:endParaRPr lang="en-US" sz="1400" dirty="0"/>
-          </a:p>
-          <a:p>
-            <a:pPr marL="342900" indent="-342900">
-              <a:spcAft>
-                <a:spcPts val="600"/>
-              </a:spcAft>
-              <a:buSzPct val="100000"/>
-              <a:buChar char="•"/>
-            </a:pPr>
-            <a:r>
-              <a:rPr lang="en-US" sz="1400" dirty="0">
+              <a:t>Attack: in a controlled registry, plant/identify a typosquat or higher-version public pkg that gets pulled in</a:t>
+            </a:r>
+            <a:endParaRPr lang="en-US" sz="1350" dirty="0"/>
+          </a:p>
+        </p:txBody>
+      </p:sp>
+      <p:sp>
+        <p:nvSpPr>
+          <p:cNvPr id="8" name="Shape 5"/>
+          <p:cNvSpPr/>
+          <p:nvPr/>
+        </p:nvSpPr>
+        <p:spPr>
+          <a:xfrm>
+            <a:off x="502920" y="2057400"/>
+            <a:ext cx="384048" cy="384048"/>
+          </a:xfrm>
+          <a:prstGeom prst="ellipse">
+            <a:avLst/>
+          </a:prstGeom>
+          <a:solidFill>
+            <a:srgbClr val="E35205"/>
+          </a:solidFill>
+          <a:ln/>
+        </p:spPr>
+      </p:sp>
+      <p:sp>
+        <p:nvSpPr>
+          <p:cNvPr id="9" name="Text 6"/>
+          <p:cNvSpPr/>
+          <p:nvPr/>
+        </p:nvSpPr>
+        <p:spPr>
+          <a:xfrm>
+            <a:off x="502920" y="2057400"/>
+            <a:ext cx="384048" cy="384048"/>
+          </a:xfrm>
+          <a:prstGeom prst="rect">
+            <a:avLst/>
+          </a:prstGeom>
+          <a:noFill/>
+          <a:ln/>
+        </p:spPr>
+        <p:txBody>
+          <a:bodyPr wrap="square" lIns="0" tIns="0" rIns="0" bIns="0" rtlCol="0" anchor="ctr"/>
+          <a:lstStyle/>
+          <a:p>
+            <a:pPr algn="ctr" indent="0" marL="0">
+              <a:buNone/>
+            </a:pPr>
+            <a:r>
+              <a:rPr lang="en-US" sz="1500" b="1" dirty="0">
+                <a:solidFill>
+                  <a:srgbClr val="0E1726"/>
+                </a:solidFill>
+                <a:latin typeface="Arial" pitchFamily="34" charset="0"/>
+                <a:ea typeface="Arial" pitchFamily="34" charset="-122"/>
+                <a:cs typeface="Arial" pitchFamily="34" charset="-120"/>
+              </a:rPr>
+              <a:t>2</a:t>
+            </a:r>
+            <a:endParaRPr lang="en-US" sz="1500" dirty="0"/>
+          </a:p>
+        </p:txBody>
+      </p:sp>
+      <p:sp>
+        <p:nvSpPr>
+          <p:cNvPr id="10" name="Text 7"/>
+          <p:cNvSpPr/>
+          <p:nvPr/>
+        </p:nvSpPr>
+        <p:spPr>
+          <a:xfrm>
+            <a:off x="1051560" y="2057400"/>
+            <a:ext cx="7589520" cy="402336"/>
+          </a:xfrm>
+          <a:prstGeom prst="rect">
+            <a:avLst/>
+          </a:prstGeom>
+          <a:noFill/>
+          <a:ln/>
+        </p:spPr>
+        <p:txBody>
+          <a:bodyPr wrap="square" lIns="0" tIns="0" rIns="0" bIns="0" rtlCol="0" anchor="ctr">
+            <a:normAutofit/>
+          </a:bodyPr>
+          <a:lstStyle/>
+          <a:p>
+            <a:pPr indent="0" marL="0">
+              <a:buNone/>
+            </a:pPr>
+            <a:r>
+              <a:rPr lang="en-US" sz="1350" dirty="0">
                 <a:solidFill>
                   <a:srgbClr val="1F2937"/>
                 </a:solidFill>
@@ -3488,66 +3678,45 @@
                 <a:ea typeface="Calibri" pitchFamily="34" charset="-122"/>
                 <a:cs typeface="Calibri" pitchFamily="34" charset="-120"/>
               </a:rPr>
-              <a:t>Know your ingredients (SBOM), prove your build (SLSA), sign your artifacts</a:t>
-            </a:r>
-            <a:endParaRPr lang="en-US" sz="1400" dirty="0"/>
-          </a:p>
-          <a:p>
-            <a:pPr marL="342900" indent="-342900">
-              <a:spcAft>
-                <a:spcPts val="600"/>
-              </a:spcAft>
-              <a:buSzPct val="100000"/>
-              <a:buChar char="•"/>
-            </a:pPr>
-            <a:r>
-              <a:rPr lang="en-US" sz="1400" dirty="0">
-                <a:solidFill>
-                  <a:srgbClr val="1F2937"/>
+              <a:t>Defend: pin + scope; generate SBOM; sign &amp; verify with Cosign; add a provenance gate</a:t>
+            </a:r>
+            <a:endParaRPr lang="en-US" sz="1350" dirty="0"/>
+          </a:p>
+        </p:txBody>
+      </p:sp>
+      <p:sp>
+        <p:nvSpPr>
+          <p:cNvPr id="11" name="Text 8"/>
+          <p:cNvSpPr/>
+          <p:nvPr/>
+        </p:nvSpPr>
+        <p:spPr>
+          <a:xfrm>
+            <a:off x="457200" y="4800600"/>
+            <a:ext cx="6949440" cy="274320"/>
+          </a:xfrm>
+          <a:prstGeom prst="rect">
+            <a:avLst/>
+          </a:prstGeom>
+          <a:noFill/>
+          <a:ln/>
+        </p:spPr>
+        <p:txBody>
+          <a:bodyPr wrap="square" lIns="0" tIns="0" rIns="0" bIns="0" rtlCol="0" anchor="ctr"/>
+          <a:lstStyle/>
+          <a:p>
+            <a:pPr indent="0" marL="0">
+              <a:buNone/>
+            </a:pPr>
+            <a:r>
+              <a:rPr lang="en-US" sz="900" dirty="0">
+                <a:solidFill>
+                  <a:srgbClr val="64748B"/>
                 </a:solidFill>
                 <a:latin typeface="Calibri" pitchFamily="34" charset="0"/>
                 <a:ea typeface="Calibri" pitchFamily="34" charset="-122"/>
                 <a:cs typeface="Calibri" pitchFamily="34" charset="-120"/>
               </a:rPr>
-              <a:t>Verify before you trust</a:t>
-            </a:r>
-            <a:endParaRPr lang="en-US" sz="1400" dirty="0"/>
-          </a:p>
-        </p:txBody>
-      </p:sp>
-      <p:sp>
-        <p:nvSpPr>
-          <p:cNvPr id="7" name="Text 4"/>
-          <p:cNvSpPr/>
-          <p:nvPr/>
-        </p:nvSpPr>
-        <p:spPr>
-          <a:xfrm>
-            <a:off x="457200" y="4800600"/>
-            <a:ext cx="6949440" cy="274320"/>
-          </a:xfrm>
-          <a:prstGeom prst="rect">
-            <a:avLst/>
-          </a:prstGeom>
-          <a:noFill/>
-          <a:ln/>
-        </p:spPr>
-        <p:txBody>
-          <a:bodyPr wrap="square" lIns="0" tIns="0" rIns="0" bIns="0" rtlCol="0" anchor="ctr"/>
-          <a:lstStyle/>
-          <a:p>
-            <a:pPr indent="0" marL="0">
-              <a:buNone/>
-            </a:pPr>
-            <a:r>
-              <a:rPr lang="en-US" sz="900" dirty="0">
-                <a:solidFill>
-                  <a:srgbClr val="64748B"/>
-                </a:solidFill>
-                <a:latin typeface="Calibri" pitchFamily="34" charset="0"/>
-                <a:ea typeface="Calibri" pitchFamily="34" charset="-122"/>
-                <a:cs typeface="Calibri" pitchFamily="34" charset="-120"/>
-              </a:rPr>
               <a:t>Software Security · Week 12</a:t>
             </a:r>
             <a:endParaRPr lang="en-US" sz="900" dirty="0"/>
@@ -3556,7 +3725,7 @@
       </p:sp>
       <p:pic>
         <p:nvPicPr>
-          <p:cNvPr id="8" name="Image 1" descr="/Users/pop7/Library/CloudStorage/OneDrive-MonsterConnectCo.,Ltd/Lecture/KOSEN69 - software-security/slides/pptx/assets/logo-small.png">    </p:cNvPr>
+          <p:cNvPr id="12" name="Image 1" descr="/Users/pop7/Library/CloudStorage/OneDrive-MonsterConnectCo.,Ltd/Lecture/KOSEN69 - software-security/slides/pptx/assets/logo-small.png">    </p:cNvPr>
           <p:cNvPicPr>
             <a:picLocks noChangeAspect="1"/>
           </p:cNvPicPr>
@@ -3612,6 +3781,692 @@
       </p:grpSpPr>
       <p:sp>
         <p:nvSpPr>
+          <p:cNvPr id="2" name="Shape 0"/>
+          <p:cNvSpPr/>
+          <p:nvPr/>
+        </p:nvSpPr>
+        <p:spPr>
+          <a:xfrm>
+            <a:off x="457200" y="384048"/>
+            <a:ext cx="530352" cy="530352"/>
+          </a:xfrm>
+          <a:prstGeom prst="ellipse">
+            <a:avLst/>
+          </a:prstGeom>
+          <a:solidFill>
+            <a:srgbClr val="E35205"/>
+          </a:solidFill>
+          <a:ln/>
+          <a:effectLst>
+            <a:outerShdw sx="100000" sy="100000" kx="0" ky="0" algn="bl" rotWithShape="0" blurRad="76200" dist="25400" dir="5400000">
+              <a:srgbClr val="000000">
+                <a:alpha val="12000"/>
+              </a:srgbClr>
+            </a:outerShdw>
+          </a:effectLst>
+        </p:spPr>
+      </p:sp>
+      <p:pic>
+        <p:nvPicPr>
+          <p:cNvPr id="3" name="Image 0" descr="preencoded.png">    </p:cNvPr>
+          <p:cNvPicPr>
+            <a:picLocks noChangeAspect="1"/>
+          </p:cNvPicPr>
+          <p:nvPr/>
+        </p:nvPicPr>
+        <p:blipFill>
+          <a:blip r:embed="rId1"/>
+          <a:stretch>
+            <a:fillRect/>
+          </a:stretch>
+        </p:blipFill>
+        <p:spPr>
+          <a:xfrm>
+            <a:off x="594360" y="521208"/>
+            <a:ext cx="256032" cy="256032"/>
+          </a:xfrm>
+          <a:prstGeom prst="rect">
+            <a:avLst/>
+          </a:prstGeom>
+        </p:spPr>
+      </p:pic>
+      <p:sp>
+        <p:nvSpPr>
+          <p:cNvPr id="4" name="Text 1"/>
+          <p:cNvSpPr/>
+          <p:nvPr/>
+        </p:nvSpPr>
+        <p:spPr>
+          <a:xfrm>
+            <a:off x="1143000" y="329184"/>
+            <a:ext cx="7498080" cy="603504"/>
+          </a:xfrm>
+          <a:prstGeom prst="rect">
+            <a:avLst/>
+          </a:prstGeom>
+          <a:noFill/>
+          <a:ln/>
+        </p:spPr>
+        <p:txBody>
+          <a:bodyPr wrap="square" lIns="0" tIns="0" rIns="0" bIns="0" rtlCol="0" anchor="ctr"/>
+          <a:lstStyle/>
+          <a:p>
+            <a:pPr indent="0" marL="0">
+              <a:buNone/>
+            </a:pPr>
+            <a:r>
+              <a:rPr lang="en-US" sz="2600" b="1" dirty="0">
+                <a:solidFill>
+                  <a:srgbClr val="1F2937"/>
+                </a:solidFill>
+                <a:latin typeface="Arial" pitchFamily="34" charset="0"/>
+                <a:ea typeface="Arial" pitchFamily="34" charset="-122"/>
+                <a:cs typeface="Arial" pitchFamily="34" charset="-120"/>
+              </a:rPr>
+              <a:t>Deliverable</a:t>
+            </a:r>
+            <a:endParaRPr lang="en-US" sz="2600" dirty="0"/>
+          </a:p>
+        </p:txBody>
+      </p:sp>
+      <p:sp>
+        <p:nvSpPr>
+          <p:cNvPr id="5" name="Shape 2"/>
+          <p:cNvSpPr/>
+          <p:nvPr/>
+        </p:nvSpPr>
+        <p:spPr>
+          <a:xfrm>
+            <a:off x="457200" y="1325880"/>
+            <a:ext cx="8229600" cy="822960"/>
+          </a:xfrm>
+          <a:prstGeom prst="roundRect">
+            <a:avLst>
+              <a:gd name="adj" fmla="val 8889"/>
+            </a:avLst>
+          </a:prstGeom>
+          <a:solidFill>
+            <a:srgbClr val="E8EDF3"/>
+          </a:solidFill>
+          <a:ln/>
+        </p:spPr>
+      </p:sp>
+      <p:sp>
+        <p:nvSpPr>
+          <p:cNvPr id="6" name="Text 3"/>
+          <p:cNvSpPr/>
+          <p:nvPr/>
+        </p:nvSpPr>
+        <p:spPr>
+          <a:xfrm>
+            <a:off x="731520" y="1325880"/>
+            <a:ext cx="7680960" cy="822960"/>
+          </a:xfrm>
+          <a:prstGeom prst="rect">
+            <a:avLst/>
+          </a:prstGeom>
+          <a:noFill/>
+          <a:ln/>
+        </p:spPr>
+        <p:txBody>
+          <a:bodyPr wrap="square" lIns="0" tIns="0" rIns="0" bIns="0" rtlCol="0" anchor="ctr">
+            <a:normAutofit/>
+          </a:bodyPr>
+          <a:lstStyle/>
+          <a:p>
+            <a:pPr indent="0" marL="0">
+              <a:buNone/>
+            </a:pPr>
+            <a:r>
+              <a:rPr lang="en-US" sz="1400" i="1" dirty="0">
+                <a:solidFill>
+                  <a:srgbClr val="E35205"/>
+                </a:solidFill>
+                <a:latin typeface="Calibri" pitchFamily="34" charset="0"/>
+                <a:ea typeface="Calibri" pitchFamily="34" charset="-122"/>
+                <a:cs typeface="Calibri" pitchFamily="34" charset="-120"/>
+              </a:rPr>
+              <a:t>📋 Worksheet 12 — labs/week12-supply-chain/worksheet.md (Parts 1–4) · kickoff: bash sca_scan.sh (trivy fs + pip-audit)</a:t>
+            </a:r>
+            <a:endParaRPr lang="en-US" sz="1400" dirty="0"/>
+          </a:p>
+        </p:txBody>
+      </p:sp>
+      <p:sp>
+        <p:nvSpPr>
+          <p:cNvPr id="7" name="Shape 4"/>
+          <p:cNvSpPr/>
+          <p:nvPr/>
+        </p:nvSpPr>
+        <p:spPr>
+          <a:xfrm>
+            <a:off x="457200" y="2313432"/>
+            <a:ext cx="8229600" cy="1517904"/>
+          </a:xfrm>
+          <a:prstGeom prst="roundRect">
+            <a:avLst>
+              <a:gd name="adj" fmla="val 4819"/>
+            </a:avLst>
+          </a:prstGeom>
+          <a:solidFill>
+            <a:srgbClr val="F1F5F9"/>
+          </a:solidFill>
+          <a:ln/>
+          <a:effectLst>
+            <a:outerShdw sx="100000" sy="100000" kx="0" ky="0" algn="bl" rotWithShape="0" blurRad="76200" dist="25400" dir="5400000">
+              <a:srgbClr val="000000">
+                <a:alpha val="12000"/>
+              </a:srgbClr>
+            </a:outerShdw>
+          </a:effectLst>
+        </p:spPr>
+      </p:sp>
+      <p:sp>
+        <p:nvSpPr>
+          <p:cNvPr id="8" name="Text 5"/>
+          <p:cNvSpPr/>
+          <p:nvPr/>
+        </p:nvSpPr>
+        <p:spPr>
+          <a:xfrm>
+            <a:off x="731520" y="2423160"/>
+            <a:ext cx="7680960" cy="1298448"/>
+          </a:xfrm>
+          <a:prstGeom prst="rect">
+            <a:avLst/>
+          </a:prstGeom>
+          <a:noFill/>
+          <a:ln/>
+        </p:spPr>
+        <p:txBody>
+          <a:bodyPr wrap="square" lIns="0" tIns="0" rIns="0" bIns="0" rtlCol="0" anchor="t">
+            <a:normAutofit/>
+          </a:bodyPr>
+          <a:lstStyle/>
+          <a:p>
+            <a:pPr marL="342900" indent="-342900">
+              <a:spcAft>
+                <a:spcPts val="600"/>
+              </a:spcAft>
+              <a:buSzPct val="100000"/>
+              <a:buChar char="•"/>
+            </a:pPr>
+            <a:r>
+              <a:rPr lang="en-US" sz="1400" dirty="0">
+                <a:solidFill>
+                  <a:srgbClr val="1F2937"/>
+                </a:solidFill>
+                <a:latin typeface="Calibri" pitchFamily="34" charset="0"/>
+                <a:ea typeface="Calibri" pitchFamily="34" charset="-122"/>
+                <a:cs typeface="Calibri" pitchFamily="34" charset="-120"/>
+              </a:rPr>
+              <a:t>SCA report + remediation plan (Part 3)</a:t>
+            </a:r>
+            <a:endParaRPr lang="en-US" sz="1400" dirty="0"/>
+          </a:p>
+          <a:p>
+            <a:pPr marL="342900" indent="-342900">
+              <a:spcAft>
+                <a:spcPts val="600"/>
+              </a:spcAft>
+              <a:buSzPct val="100000"/>
+              <a:buChar char="•"/>
+            </a:pPr>
+            <a:r>
+              <a:rPr lang="en-US" sz="1400" dirty="0">
+                <a:solidFill>
+                  <a:srgbClr val="1F2937"/>
+                </a:solidFill>
+                <a:latin typeface="Calibri" pitchFamily="34" charset="0"/>
+                <a:ea typeface="Calibri" pitchFamily="34" charset="-122"/>
+                <a:cs typeface="Calibri" pitchFamily="34" charset="-120"/>
+              </a:rPr>
+              <a:t>SBOM file + sign/verify transcript (Part 3)</a:t>
+            </a:r>
+            <a:endParaRPr lang="en-US" sz="1400" dirty="0"/>
+          </a:p>
+          <a:p>
+            <a:pPr marL="342900" indent="-342900">
+              <a:spcAft>
+                <a:spcPts val="600"/>
+              </a:spcAft>
+              <a:buSzPct val="100000"/>
+              <a:buChar char="•"/>
+            </a:pPr>
+            <a:r>
+              <a:rPr lang="en-US" sz="1400" dirty="0">
+                <a:solidFill>
+                  <a:srgbClr val="1F2937"/>
+                </a:solidFill>
+                <a:latin typeface="Calibri" pitchFamily="34" charset="0"/>
+                <a:ea typeface="Calibri" pitchFamily="34" charset="-122"/>
+                <a:cs typeface="Calibri" pitchFamily="34" charset="-120"/>
+              </a:rPr>
+              <a:t>One-paragraph SLSA self-assessment + XZ Utils case analysis (Part 4)</a:t>
+            </a:r>
+            <a:endParaRPr lang="en-US" sz="1400" dirty="0"/>
+          </a:p>
+          <a:p>
+            <a:pPr marL="342900" indent="-342900">
+              <a:spcAft>
+                <a:spcPts val="600"/>
+              </a:spcAft>
+              <a:buSzPct val="100000"/>
+              <a:buChar char="•"/>
+            </a:pPr>
+            <a:r>
+              <a:rPr lang="en-US" sz="1400" dirty="0">
+                <a:solidFill>
+                  <a:srgbClr val="1F2937"/>
+                </a:solidFill>
+                <a:latin typeface="Calibri" pitchFamily="34" charset="0"/>
+                <a:ea typeface="Calibri" pitchFamily="34" charset="-122"/>
+                <a:cs typeface="Calibri" pitchFamily="34" charset="-120"/>
+              </a:rPr>
+              <a:t>+ Audit the AI / EiPE / Prompt Problem (required, after Part 4 — see worksheet)</a:t>
+            </a:r>
+            <a:endParaRPr lang="en-US" sz="1400" dirty="0"/>
+          </a:p>
+        </p:txBody>
+      </p:sp>
+      <p:sp>
+        <p:nvSpPr>
+          <p:cNvPr id="9" name="Text 6"/>
+          <p:cNvSpPr/>
+          <p:nvPr/>
+        </p:nvSpPr>
+        <p:spPr>
+          <a:xfrm>
+            <a:off x="457200" y="4800600"/>
+            <a:ext cx="6949440" cy="274320"/>
+          </a:xfrm>
+          <a:prstGeom prst="rect">
+            <a:avLst/>
+          </a:prstGeom>
+          <a:noFill/>
+          <a:ln/>
+        </p:spPr>
+        <p:txBody>
+          <a:bodyPr wrap="square" lIns="0" tIns="0" rIns="0" bIns="0" rtlCol="0" anchor="ctr"/>
+          <a:lstStyle/>
+          <a:p>
+            <a:pPr indent="0" marL="0">
+              <a:buNone/>
+            </a:pPr>
+            <a:r>
+              <a:rPr lang="en-US" sz="900" dirty="0">
+                <a:solidFill>
+                  <a:srgbClr val="64748B"/>
+                </a:solidFill>
+                <a:latin typeface="Calibri" pitchFamily="34" charset="0"/>
+                <a:ea typeface="Calibri" pitchFamily="34" charset="-122"/>
+                <a:cs typeface="Calibri" pitchFamily="34" charset="-120"/>
+              </a:rPr>
+              <a:t>Software Security · Week 12</a:t>
+            </a:r>
+            <a:endParaRPr lang="en-US" sz="900" dirty="0"/>
+          </a:p>
+        </p:txBody>
+      </p:sp>
+      <p:pic>
+        <p:nvPicPr>
+          <p:cNvPr id="10" name="Image 1" descr="/Users/pop7/Library/CloudStorage/OneDrive-MonsterConnectCo.,Ltd/Lecture/KOSEN69 - software-security/slides/pptx/assets/logo-small.png">    </p:cNvPr>
+          <p:cNvPicPr>
+            <a:picLocks noChangeAspect="1"/>
+          </p:cNvPicPr>
+          <p:nvPr/>
+        </p:nvPicPr>
+        <p:blipFill>
+          <a:blip r:embed="rId2"/>
+          <a:stretch>
+            <a:fillRect/>
+          </a:stretch>
+        </p:blipFill>
+        <p:spPr>
+          <a:xfrm>
+            <a:off x="7882128" y="4700016"/>
+            <a:ext cx="768096" cy="356616"/>
+          </a:xfrm>
+          <a:prstGeom prst="rect">
+            <a:avLst/>
+          </a:prstGeom>
+        </p:spPr>
+      </p:pic>
+    </p:spTree>
+  </p:cSld>
+  <p:clrMapOvr>
+    <a:masterClrMapping/>
+  </p:clrMapOvr>
+</p:sld>
+</file>
+
+<file path=ppt/slides/slide15.xml><?xml version="1.0" encoding="utf-8"?>
+<p:sld xmlns:a="http://schemas.openxmlformats.org/drawingml/2006/main" xmlns:r="http://schemas.openxmlformats.org/officeDocument/2006/relationships" xmlns:p="http://schemas.openxmlformats.org/presentationml/2006/main">
+  <p:cSld name="Slide 15">
+    <p:bg>
+      <p:bgPr>
+        <a:solidFill>
+          <a:srgbClr val="FFFFFF"/>
+        </a:solidFill>
+      </p:bgPr>
+    </p:bg>
+    <p:spTree>
+      <p:nvGrpSpPr>
+        <p:cNvPr id="1" name=""/>
+        <p:cNvGrpSpPr/>
+        <p:nvPr/>
+      </p:nvGrpSpPr>
+      <p:grpSpPr>
+        <a:xfrm>
+          <a:off x="0" y="0"/>
+          <a:ext cx="0" cy="0"/>
+          <a:chOff x="0" y="0"/>
+          <a:chExt cx="0" cy="0"/>
+        </a:xfrm>
+      </p:grpSpPr>
+      <p:sp>
+        <p:nvSpPr>
+          <p:cNvPr id="2" name="Shape 0"/>
+          <p:cNvSpPr/>
+          <p:nvPr/>
+        </p:nvSpPr>
+        <p:spPr>
+          <a:xfrm>
+            <a:off x="457200" y="384048"/>
+            <a:ext cx="530352" cy="530352"/>
+          </a:xfrm>
+          <a:prstGeom prst="ellipse">
+            <a:avLst/>
+          </a:prstGeom>
+          <a:solidFill>
+            <a:srgbClr val="E35205"/>
+          </a:solidFill>
+          <a:ln/>
+          <a:effectLst>
+            <a:outerShdw sx="100000" sy="100000" kx="0" ky="0" algn="bl" rotWithShape="0" blurRad="76200" dist="25400" dir="5400000">
+              <a:srgbClr val="000000">
+                <a:alpha val="12000"/>
+              </a:srgbClr>
+            </a:outerShdw>
+          </a:effectLst>
+        </p:spPr>
+      </p:sp>
+      <p:pic>
+        <p:nvPicPr>
+          <p:cNvPr id="3" name="Image 0" descr="preencoded.png">    </p:cNvPr>
+          <p:cNvPicPr>
+            <a:picLocks noChangeAspect="1"/>
+          </p:cNvPicPr>
+          <p:nvPr/>
+        </p:nvPicPr>
+        <p:blipFill>
+          <a:blip r:embed="rId1"/>
+          <a:stretch>
+            <a:fillRect/>
+          </a:stretch>
+        </p:blipFill>
+        <p:spPr>
+          <a:xfrm>
+            <a:off x="594360" y="521208"/>
+            <a:ext cx="256032" cy="256032"/>
+          </a:xfrm>
+          <a:prstGeom prst="rect">
+            <a:avLst/>
+          </a:prstGeom>
+        </p:spPr>
+      </p:pic>
+      <p:sp>
+        <p:nvSpPr>
+          <p:cNvPr id="4" name="Text 1"/>
+          <p:cNvSpPr/>
+          <p:nvPr/>
+        </p:nvSpPr>
+        <p:spPr>
+          <a:xfrm>
+            <a:off x="1143000" y="329184"/>
+            <a:ext cx="7498080" cy="603504"/>
+          </a:xfrm>
+          <a:prstGeom prst="rect">
+            <a:avLst/>
+          </a:prstGeom>
+          <a:noFill/>
+          <a:ln/>
+        </p:spPr>
+        <p:txBody>
+          <a:bodyPr wrap="square" lIns="0" tIns="0" rIns="0" bIns="0" rtlCol="0" anchor="ctr"/>
+          <a:lstStyle/>
+          <a:p>
+            <a:pPr indent="0" marL="0">
+              <a:buNone/>
+            </a:pPr>
+            <a:r>
+              <a:rPr lang="en-US" sz="2600" b="1" dirty="0">
+                <a:solidFill>
+                  <a:srgbClr val="1F2937"/>
+                </a:solidFill>
+                <a:latin typeface="Arial" pitchFamily="34" charset="0"/>
+                <a:ea typeface="Arial" pitchFamily="34" charset="-122"/>
+                <a:cs typeface="Arial" pitchFamily="34" charset="-120"/>
+              </a:rPr>
+              <a:t>Key takeaways</a:t>
+            </a:r>
+            <a:endParaRPr lang="en-US" sz="2600" dirty="0"/>
+          </a:p>
+        </p:txBody>
+      </p:sp>
+      <p:sp>
+        <p:nvSpPr>
+          <p:cNvPr id="5" name="Shape 2"/>
+          <p:cNvSpPr/>
+          <p:nvPr/>
+        </p:nvSpPr>
+        <p:spPr>
+          <a:xfrm>
+            <a:off x="457200" y="1325880"/>
+            <a:ext cx="8229600" cy="1207008"/>
+          </a:xfrm>
+          <a:prstGeom prst="roundRect">
+            <a:avLst>
+              <a:gd name="adj" fmla="val 6061"/>
+            </a:avLst>
+          </a:prstGeom>
+          <a:solidFill>
+            <a:srgbClr val="F1F5F9"/>
+          </a:solidFill>
+          <a:ln/>
+          <a:effectLst>
+            <a:outerShdw sx="100000" sy="100000" kx="0" ky="0" algn="bl" rotWithShape="0" blurRad="76200" dist="25400" dir="5400000">
+              <a:srgbClr val="000000">
+                <a:alpha val="12000"/>
+              </a:srgbClr>
+            </a:outerShdw>
+          </a:effectLst>
+        </p:spPr>
+      </p:sp>
+      <p:sp>
+        <p:nvSpPr>
+          <p:cNvPr id="6" name="Text 3"/>
+          <p:cNvSpPr/>
+          <p:nvPr/>
+        </p:nvSpPr>
+        <p:spPr>
+          <a:xfrm>
+            <a:off x="731520" y="1435608"/>
+            <a:ext cx="7680960" cy="987552"/>
+          </a:xfrm>
+          <a:prstGeom prst="rect">
+            <a:avLst/>
+          </a:prstGeom>
+          <a:noFill/>
+          <a:ln/>
+        </p:spPr>
+        <p:txBody>
+          <a:bodyPr wrap="square" lIns="0" tIns="0" rIns="0" bIns="0" rtlCol="0" anchor="t">
+            <a:normAutofit/>
+          </a:bodyPr>
+          <a:lstStyle/>
+          <a:p>
+            <a:pPr marL="342900" indent="-342900">
+              <a:spcAft>
+                <a:spcPts val="600"/>
+              </a:spcAft>
+              <a:buSzPct val="100000"/>
+              <a:buChar char="•"/>
+            </a:pPr>
+            <a:r>
+              <a:rPr lang="en-US" sz="1400" dirty="0">
+                <a:solidFill>
+                  <a:srgbClr val="1F2937"/>
+                </a:solidFill>
+                <a:latin typeface="Calibri" pitchFamily="34" charset="0"/>
+                <a:ea typeface="Calibri" pitchFamily="34" charset="-122"/>
+                <a:cs typeface="Calibri" pitchFamily="34" charset="-120"/>
+              </a:rPr>
+              <a:t>Most of your attack surface is other people's code</a:t>
+            </a:r>
+            <a:endParaRPr lang="en-US" sz="1400" dirty="0"/>
+          </a:p>
+          <a:p>
+            <a:pPr marL="342900" indent="-342900">
+              <a:spcAft>
+                <a:spcPts val="600"/>
+              </a:spcAft>
+              <a:buSzPct val="100000"/>
+              <a:buChar char="•"/>
+            </a:pPr>
+            <a:r>
+              <a:rPr lang="en-US" sz="1400" dirty="0">
+                <a:solidFill>
+                  <a:srgbClr val="1F2937"/>
+                </a:solidFill>
+                <a:latin typeface="Calibri" pitchFamily="34" charset="0"/>
+                <a:ea typeface="Calibri" pitchFamily="34" charset="-122"/>
+                <a:cs typeface="Calibri" pitchFamily="34" charset="-120"/>
+              </a:rPr>
+              <a:t>Know your ingredients (SBOM), prove your build (SLSA), sign your artifacts</a:t>
+            </a:r>
+            <a:endParaRPr lang="en-US" sz="1400" dirty="0"/>
+          </a:p>
+          <a:p>
+            <a:pPr marL="342900" indent="-342900">
+              <a:spcAft>
+                <a:spcPts val="600"/>
+              </a:spcAft>
+              <a:buSzPct val="100000"/>
+              <a:buChar char="•"/>
+            </a:pPr>
+            <a:r>
+              <a:rPr lang="en-US" sz="1400" dirty="0">
+                <a:solidFill>
+                  <a:srgbClr val="1F2937"/>
+                </a:solidFill>
+                <a:latin typeface="Calibri" pitchFamily="34" charset="0"/>
+                <a:ea typeface="Calibri" pitchFamily="34" charset="-122"/>
+                <a:cs typeface="Calibri" pitchFamily="34" charset="-120"/>
+              </a:rPr>
+              <a:t>Verify before you trust</a:t>
+            </a:r>
+            <a:endParaRPr lang="en-US" sz="1400" dirty="0"/>
+          </a:p>
+        </p:txBody>
+      </p:sp>
+      <p:sp>
+        <p:nvSpPr>
+          <p:cNvPr id="7" name="Text 4"/>
+          <p:cNvSpPr/>
+          <p:nvPr/>
+        </p:nvSpPr>
+        <p:spPr>
+          <a:xfrm>
+            <a:off x="457200" y="4800600"/>
+            <a:ext cx="6949440" cy="274320"/>
+          </a:xfrm>
+          <a:prstGeom prst="rect">
+            <a:avLst/>
+          </a:prstGeom>
+          <a:noFill/>
+          <a:ln/>
+        </p:spPr>
+        <p:txBody>
+          <a:bodyPr wrap="square" lIns="0" tIns="0" rIns="0" bIns="0" rtlCol="0" anchor="ctr"/>
+          <a:lstStyle/>
+          <a:p>
+            <a:pPr indent="0" marL="0">
+              <a:buNone/>
+            </a:pPr>
+            <a:r>
+              <a:rPr lang="en-US" sz="900" dirty="0">
+                <a:solidFill>
+                  <a:srgbClr val="64748B"/>
+                </a:solidFill>
+                <a:latin typeface="Calibri" pitchFamily="34" charset="0"/>
+                <a:ea typeface="Calibri" pitchFamily="34" charset="-122"/>
+                <a:cs typeface="Calibri" pitchFamily="34" charset="-120"/>
+              </a:rPr>
+              <a:t>Software Security · Week 12</a:t>
+            </a:r>
+            <a:endParaRPr lang="en-US" sz="900" dirty="0"/>
+          </a:p>
+        </p:txBody>
+      </p:sp>
+      <p:pic>
+        <p:nvPicPr>
+          <p:cNvPr id="8" name="Image 1" descr="/Users/pop7/Library/CloudStorage/OneDrive-MonsterConnectCo.,Ltd/Lecture/KOSEN69 - software-security/slides/pptx/assets/logo-small.png">    </p:cNvPr>
+          <p:cNvPicPr>
+            <a:picLocks noChangeAspect="1"/>
+          </p:cNvPicPr>
+          <p:nvPr/>
+        </p:nvPicPr>
+        <p:blipFill>
+          <a:blip r:embed="rId2"/>
+          <a:stretch>
+            <a:fillRect/>
+          </a:stretch>
+        </p:blipFill>
+        <p:spPr>
+          <a:xfrm>
+            <a:off x="7882128" y="4700016"/>
+            <a:ext cx="768096" cy="356616"/>
+          </a:xfrm>
+          <a:prstGeom prst="rect">
+            <a:avLst/>
+          </a:prstGeom>
+        </p:spPr>
+      </p:pic>
+    </p:spTree>
+  </p:cSld>
+  <p:clrMapOvr>
+    <a:masterClrMapping/>
+  </p:clrMapOvr>
+</p:sld>
+</file>
+
+<file path=ppt/slides/slide16.xml><?xml version="1.0" encoding="utf-8"?>
+<p:sld xmlns:a="http://schemas.openxmlformats.org/drawingml/2006/main" xmlns:r="http://schemas.openxmlformats.org/officeDocument/2006/relationships" xmlns:p="http://schemas.openxmlformats.org/presentationml/2006/main">
+  <p:cSld name="Slide 16">
+    <p:bg>
+      <p:bgPr>
+        <a:solidFill>
+          <a:srgbClr val="FFFFFF"/>
+        </a:solidFill>
+      </p:bgPr>
+    </p:bg>
+    <p:spTree>
+      <p:nvGrpSpPr>
+        <p:cNvPr id="1" name=""/>
+        <p:cNvGrpSpPr/>
+        <p:nvPr/>
+      </p:nvGrpSpPr>
+      <p:grpSpPr>
+        <a:xfrm>
+          <a:off x="0" y="0"/>
+          <a:ext cx="0" cy="0"/>
+          <a:chOff x="0" y="0"/>
+          <a:chExt cx="0" cy="0"/>
+        </a:xfrm>
+      </p:grpSpPr>
+      <p:sp>
+        <p:nvSpPr>
           <p:cNvPr id="2" name="Text 0"/>
           <p:cNvSpPr/>
           <p:nvPr/>
@@ -3881,7 +4736,9 @@
           <a:ln/>
         </p:spPr>
         <p:txBody>
-          <a:bodyPr wrap="square" lIns="0" tIns="0" rIns="0" bIns="0" rtlCol="0" anchor="t"/>
+          <a:bodyPr wrap="square" lIns="0" tIns="0" rIns="0" bIns="0" rtlCol="0" anchor="t">
+            <a:normAutofit/>
+          </a:bodyPr>
           <a:lstStyle/>
           <a:p>
             <a:pPr marL="342900" indent="-342900">
@@ -4222,7 +5079,9 @@
           <a:ln/>
         </p:spPr>
         <p:txBody>
-          <a:bodyPr wrap="square" lIns="0" tIns="0" rIns="0" bIns="0" rtlCol="0" anchor="t"/>
+          <a:bodyPr wrap="square" lIns="0" tIns="0" rIns="0" bIns="0" rtlCol="0" anchor="t">
+            <a:normAutofit/>
+          </a:bodyPr>
           <a:lstStyle/>
           <a:p>
             <a:pPr marL="342900" indent="-342900">
@@ -5250,36 +6109,14 @@
       </p:graphicFrame>
       <p:sp>
         <p:nvSpPr>
-          <p:cNvPr id="6" name="Shape 2"/>
+          <p:cNvPr id="6" name="Text 2"/>
           <p:cNvSpPr/>
           <p:nvPr/>
         </p:nvSpPr>
         <p:spPr>
           <a:xfrm>
-            <a:off x="457200" y="4032504"/>
-            <a:ext cx="8229600" cy="539496"/>
-          </a:xfrm>
-          <a:prstGeom prst="roundRect">
-            <a:avLst>
-              <a:gd name="adj" fmla="val 13559"/>
-            </a:avLst>
-          </a:prstGeom>
-          <a:solidFill>
-            <a:srgbClr val="E8EDF3"/>
-          </a:solidFill>
-          <a:ln/>
-        </p:spPr>
-      </p:sp>
-      <p:sp>
-        <p:nvSpPr>
-          <p:cNvPr id="7" name="Text 3"/>
-          <p:cNvSpPr/>
-          <p:nvPr/>
-        </p:nvSpPr>
-        <p:spPr>
-          <a:xfrm>
-            <a:off x="731520" y="4032504"/>
-            <a:ext cx="7680960" cy="539496"/>
+            <a:off x="457200" y="4800600"/>
+            <a:ext cx="6949440" cy="274320"/>
           </a:xfrm>
           <a:prstGeom prst="rect">
             <a:avLst/>
@@ -5295,53 +6132,14 @@
               <a:buNone/>
             </a:pPr>
             <a:r>
-              <a:rPr lang="en-US" sz="1400" i="1" dirty="0">
-                <a:solidFill>
-                  <a:srgbClr val="E35205"/>
+              <a:rPr lang="en-US" sz="900" dirty="0">
+                <a:solidFill>
+                  <a:srgbClr val="64748B"/>
                 </a:solidFill>
                 <a:latin typeface="Calibri" pitchFamily="34" charset="0"/>
                 <a:ea typeface="Calibri" pitchFamily="34" charset="-122"/>
                 <a:cs typeface="Calibri" pitchFamily="34" charset="-120"/>
               </a:rPr>
-              <a:t>Attacks are shifting upstream: registry → maintainer → CI/CD.</a:t>
-            </a:r>
-            <a:endParaRPr lang="en-US" sz="1400" dirty="0"/>
-          </a:p>
-        </p:txBody>
-      </p:sp>
-      <p:sp>
-        <p:nvSpPr>
-          <p:cNvPr id="8" name="Text 4"/>
-          <p:cNvSpPr/>
-          <p:nvPr/>
-        </p:nvSpPr>
-        <p:spPr>
-          <a:xfrm>
-            <a:off x="457200" y="4800600"/>
-            <a:ext cx="6949440" cy="274320"/>
-          </a:xfrm>
-          <a:prstGeom prst="rect">
-            <a:avLst/>
-          </a:prstGeom>
-          <a:noFill/>
-          <a:ln/>
-        </p:spPr>
-        <p:txBody>
-          <a:bodyPr wrap="square" lIns="0" tIns="0" rIns="0" bIns="0" rtlCol="0" anchor="ctr"/>
-          <a:lstStyle/>
-          <a:p>
-            <a:pPr indent="0" marL="0">
-              <a:buNone/>
-            </a:pPr>
-            <a:r>
-              <a:rPr lang="en-US" sz="900" dirty="0">
-                <a:solidFill>
-                  <a:srgbClr val="64748B"/>
-                </a:solidFill>
-                <a:latin typeface="Calibri" pitchFamily="34" charset="0"/>
-                <a:ea typeface="Calibri" pitchFamily="34" charset="-122"/>
-                <a:cs typeface="Calibri" pitchFamily="34" charset="-120"/>
-              </a:rPr>
               <a:t>Software Security · Week 12</a:t>
             </a:r>
             <a:endParaRPr lang="en-US" sz="900" dirty="0"/>
@@ -5350,7 +6148,7 @@
       </p:sp>
       <p:pic>
         <p:nvPicPr>
-          <p:cNvPr id="9" name="Image 1" descr="/Users/pop7/Library/CloudStorage/OneDrive-MonsterConnectCo.,Ltd/Lecture/KOSEN69 - software-security/slides/pptx/assets/logo-small.png">    </p:cNvPr>
+          <p:cNvPr id="7" name="Image 1" descr="/Users/pop7/Library/CloudStorage/OneDrive-MonsterConnectCo.,Ltd/Lecture/KOSEN69 - software-security/slides/pptx/assets/logo-small.png">    </p:cNvPr>
           <p:cNvPicPr>
             <a:picLocks noChangeAspect="1"/>
           </p:cNvPicPr>
@@ -5488,7 +6286,7 @@
                 <a:ea typeface="Arial" pitchFamily="34" charset="-122"/>
                 <a:cs typeface="Arial" pitchFamily="34" charset="-120"/>
               </a:rPr>
-              <a:t>Attack vectors</a:t>
+              <a:t>Real supply-chain attacks (cont.)</a:t>
             </a:r>
             <a:endParaRPr lang="en-US" sz="2600" dirty="0"/>
           </a:p>
@@ -5503,24 +6301,17 @@
         <p:spPr>
           <a:xfrm>
             <a:off x="457200" y="1325880"/>
-            <a:ext cx="8229600" cy="1517904"/>
+            <a:ext cx="8229600" cy="822960"/>
           </a:xfrm>
           <a:prstGeom prst="roundRect">
             <a:avLst>
-              <a:gd name="adj" fmla="val 4819"/>
+              <a:gd name="adj" fmla="val 8889"/>
             </a:avLst>
           </a:prstGeom>
           <a:solidFill>
-            <a:srgbClr val="F1F5F9"/>
+            <a:srgbClr val="E8EDF3"/>
           </a:solidFill>
           <a:ln/>
-          <a:effectLst>
-            <a:outerShdw sx="100000" sy="100000" kx="0" ky="0" algn="bl" rotWithShape="0" blurRad="76200" dist="25400" dir="5400000">
-              <a:srgbClr val="000000">
-                <a:alpha val="12000"/>
-              </a:srgbClr>
-            </a:outerShdw>
-          </a:effectLst>
         </p:spPr>
       </p:sp>
       <p:sp>
@@ -5531,8 +6322,8 @@
         </p:nvSpPr>
         <p:spPr>
           <a:xfrm>
-            <a:off x="731520" y="1435608"/>
-            <a:ext cx="7680960" cy="1298448"/>
+            <a:off x="731520" y="1325880"/>
+            <a:ext cx="7680960" cy="822960"/>
           </a:xfrm>
           <a:prstGeom prst="rect">
             <a:avLst/>
@@ -5541,89 +6332,24 @@
           <a:ln/>
         </p:spPr>
         <p:txBody>
-          <a:bodyPr wrap="square" lIns="0" tIns="0" rIns="0" bIns="0" rtlCol="0" anchor="t"/>
-          <a:lstStyle/>
-          <a:p>
-            <a:pPr marL="342900" indent="-342900">
-              <a:spcAft>
-                <a:spcPts val="600"/>
-              </a:spcAft>
-              <a:buSzPct val="100000"/>
-              <a:buChar char="•"/>
-            </a:pPr>
-            <a:r>
-              <a:rPr lang="en-US" sz="1400" dirty="0">
-                <a:solidFill>
-                  <a:srgbClr val="1F2937"/>
+          <a:bodyPr wrap="square" lIns="0" tIns="0" rIns="0" bIns="0" rtlCol="0" anchor="ctr">
+            <a:normAutofit/>
+          </a:bodyPr>
+          <a:lstStyle/>
+          <a:p>
+            <a:pPr indent="0" marL="0">
+              <a:buNone/>
+            </a:pPr>
+            <a:r>
+              <a:rPr lang="en-US" sz="1400" i="1" dirty="0">
+                <a:solidFill>
+                  <a:srgbClr val="E35205"/>
                 </a:solidFill>
                 <a:latin typeface="Calibri" pitchFamily="34" charset="0"/>
                 <a:ea typeface="Calibri" pitchFamily="34" charset="-122"/>
                 <a:cs typeface="Calibri" pitchFamily="34" charset="-120"/>
               </a:rPr>
-              <a:t>Typosquatting — reqeusts vs requests</a:t>
-            </a:r>
-            <a:endParaRPr lang="en-US" sz="1400" dirty="0"/>
-          </a:p>
-          <a:p>
-            <a:pPr marL="342900" indent="-342900">
-              <a:spcAft>
-                <a:spcPts val="600"/>
-              </a:spcAft>
-              <a:buSzPct val="100000"/>
-              <a:buChar char="•"/>
-            </a:pPr>
-            <a:r>
-              <a:rPr lang="en-US" sz="1400" dirty="0">
-                <a:solidFill>
-                  <a:srgbClr val="1F2937"/>
-                </a:solidFill>
-                <a:latin typeface="Calibri" pitchFamily="34" charset="0"/>
-                <a:ea typeface="Calibri" pitchFamily="34" charset="-122"/>
-                <a:cs typeface="Calibri" pitchFamily="34" charset="-120"/>
-              </a:rPr>
-              <a:t>Dependency confusion — public pkg shadows internal name</a:t>
-            </a:r>
-            <a:endParaRPr lang="en-US" sz="1400" dirty="0"/>
-          </a:p>
-          <a:p>
-            <a:pPr marL="342900" indent="-342900">
-              <a:spcAft>
-                <a:spcPts val="600"/>
-              </a:spcAft>
-              <a:buSzPct val="100000"/>
-              <a:buChar char="•"/>
-            </a:pPr>
-            <a:r>
-              <a:rPr lang="en-US" sz="1400" dirty="0">
-                <a:solidFill>
-                  <a:srgbClr val="1F2937"/>
-                </a:solidFill>
-                <a:latin typeface="Calibri" pitchFamily="34" charset="0"/>
-                <a:ea typeface="Calibri" pitchFamily="34" charset="-122"/>
-                <a:cs typeface="Calibri" pitchFamily="34" charset="-120"/>
-              </a:rPr>
-              <a:t>Malicious updates — compromised maintainer</a:t>
-            </a:r>
-            <a:endParaRPr lang="en-US" sz="1400" dirty="0"/>
-          </a:p>
-          <a:p>
-            <a:pPr marL="342900" indent="-342900">
-              <a:spcAft>
-                <a:spcPts val="600"/>
-              </a:spcAft>
-              <a:buSzPct val="100000"/>
-              <a:buChar char="•"/>
-            </a:pPr>
-            <a:r>
-              <a:rPr lang="en-US" sz="1400" dirty="0">
-                <a:solidFill>
-                  <a:srgbClr val="1F2937"/>
-                </a:solidFill>
-                <a:latin typeface="Calibri" pitchFamily="34" charset="0"/>
-                <a:ea typeface="Calibri" pitchFamily="34" charset="-122"/>
-                <a:cs typeface="Calibri" pitchFamily="34" charset="-120"/>
-              </a:rPr>
-              <a:t>Transitive risk — deps of deps you never chose</a:t>
+              <a:t>Attacks are shifting upstream: registry → maintainer → CI/CD.</a:t>
             </a:r>
             <a:endParaRPr lang="en-US" sz="1400" dirty="0"/>
           </a:p>
@@ -5808,7 +6534,7 @@
                 <a:ea typeface="Arial" pitchFamily="34" charset="-122"/>
                 <a:cs typeface="Arial" pitchFamily="34" charset="-120"/>
               </a:rPr>
-              <a:t>SCA — find vulnerable deps</a:t>
+              <a:t>Attack vectors</a:t>
             </a:r>
             <a:endParaRPr lang="en-US" sz="2600" dirty="0"/>
           </a:p>
@@ -5823,111 +6549,11 @@
         <p:spPr>
           <a:xfrm>
             <a:off x="457200" y="1325880"/>
-            <a:ext cx="8229600" cy="1042416"/>
+            <a:ext cx="8229600" cy="1920240"/>
           </a:xfrm>
           <a:prstGeom prst="roundRect">
             <a:avLst>
-              <a:gd name="adj" fmla="val 5263"/>
-            </a:avLst>
-          </a:prstGeom>
-          <a:solidFill>
-            <a:srgbClr val="0A1020"/>
-          </a:solidFill>
-          <a:ln w="12700">
-            <a:solidFill>
-              <a:srgbClr val="E8EDF3"/>
-            </a:solidFill>
-            <a:prstDash val="solid"/>
-          </a:ln>
-        </p:spPr>
-      </p:sp>
-      <p:sp>
-        <p:nvSpPr>
-          <p:cNvPr id="6" name="Text 3"/>
-          <p:cNvSpPr/>
-          <p:nvPr/>
-        </p:nvSpPr>
-        <p:spPr>
-          <a:xfrm>
-            <a:off x="640080" y="1399032"/>
-            <a:ext cx="7863840" cy="896112"/>
-          </a:xfrm>
-          <a:prstGeom prst="rect">
-            <a:avLst/>
-          </a:prstGeom>
-          <a:noFill/>
-          <a:ln/>
-        </p:spPr>
-        <p:txBody>
-          <a:bodyPr wrap="square" lIns="0" tIns="0" rIns="0" bIns="0" rtlCol="0" anchor="t"/>
-          <a:lstStyle/>
-          <a:p>
-            <a:pPr indent="0" marL="0">
-              <a:buNone/>
-            </a:pPr>
-            <a:r>
-              <a:rPr lang="en-US" sz="1150" dirty="0">
-                <a:solidFill>
-                  <a:srgbClr val="9FE7D6"/>
-                </a:solidFill>
-                <a:latin typeface="Courier New" pitchFamily="34" charset="0"/>
-                <a:ea typeface="Courier New" pitchFamily="34" charset="-122"/>
-                <a:cs typeface="Courier New" pitchFamily="34" charset="-120"/>
-              </a:rPr>
-              <a:t>npm audit</a:t>
-            </a:r>
-            <a:endParaRPr lang="en-US" sz="1150" dirty="0"/>
-          </a:p>
-          <a:p>
-            <a:pPr indent="0" marL="0">
-              <a:buNone/>
-            </a:pPr>
-            <a:r>
-              <a:rPr lang="en-US" sz="1150" dirty="0">
-                <a:solidFill>
-                  <a:srgbClr val="9FE7D6"/>
-                </a:solidFill>
-                <a:latin typeface="Courier New" pitchFamily="34" charset="0"/>
-                <a:ea typeface="Courier New" pitchFamily="34" charset="-122"/>
-                <a:cs typeface="Courier New" pitchFamily="34" charset="-120"/>
-              </a:rPr>
-              <a:t>docker run --rm -v "$PWD:/src" aquasec/trivy fs /src</a:t>
-            </a:r>
-            <a:endParaRPr lang="en-US" sz="1150" dirty="0"/>
-          </a:p>
-          <a:p>
-            <a:pPr indent="0" marL="0">
-              <a:buNone/>
-            </a:pPr>
-            <a:r>
-              <a:rPr lang="en-US" sz="1150" dirty="0">
-                <a:solidFill>
-                  <a:srgbClr val="9FE7D6"/>
-                </a:solidFill>
-                <a:latin typeface="Courier New" pitchFamily="34" charset="0"/>
-                <a:ea typeface="Courier New" pitchFamily="34" charset="-122"/>
-                <a:cs typeface="Courier New" pitchFamily="34" charset="-120"/>
-              </a:rPr>
-              <a:t>owasp/dependency-check --scan /src --format HTML</a:t>
-            </a:r>
-            <a:endParaRPr lang="en-US" sz="1150" dirty="0"/>
-          </a:p>
-        </p:txBody>
-      </p:sp>
-      <p:sp>
-        <p:nvSpPr>
-          <p:cNvPr id="7" name="Shape 4"/>
-          <p:cNvSpPr/>
-          <p:nvPr/>
-        </p:nvSpPr>
-        <p:spPr>
-          <a:xfrm>
-            <a:off x="457200" y="2532888"/>
-            <a:ext cx="8229600" cy="896112"/>
-          </a:xfrm>
-          <a:prstGeom prst="roundRect">
-            <a:avLst>
-              <a:gd name="adj" fmla="val 8163"/>
+              <a:gd name="adj" fmla="val 3810"/>
             </a:avLst>
           </a:prstGeom>
           <a:solidFill>
@@ -5945,14 +6571,14 @@
       </p:sp>
       <p:sp>
         <p:nvSpPr>
-          <p:cNvPr id="8" name="Text 5"/>
+          <p:cNvPr id="6" name="Text 3"/>
           <p:cNvSpPr/>
           <p:nvPr/>
         </p:nvSpPr>
         <p:spPr>
           <a:xfrm>
-            <a:off x="731520" y="2642616"/>
-            <a:ext cx="7680960" cy="676656"/>
+            <a:off x="731520" y="1435608"/>
+            <a:ext cx="7680960" cy="1700784"/>
           </a:xfrm>
           <a:prstGeom prst="rect">
             <a:avLst/>
@@ -5961,7 +6587,9 @@
           <a:ln/>
         </p:spPr>
         <p:txBody>
-          <a:bodyPr wrap="square" lIns="0" tIns="0" rIns="0" bIns="0" rtlCol="0" anchor="t"/>
+          <a:bodyPr wrap="square" lIns="0" tIns="0" rIns="0" bIns="0" rtlCol="0" anchor="t">
+            <a:normAutofit/>
+          </a:bodyPr>
           <a:lstStyle/>
           <a:p>
             <a:pPr marL="342900" indent="-342900">
@@ -5980,7 +6608,7 @@
                 <a:ea typeface="Calibri" pitchFamily="34" charset="-122"/>
                 <a:cs typeface="Calibri" pitchFamily="34" charset="-120"/>
               </a:rPr>
-              <a:t>Produces CVEs + fix versions</a:t>
+              <a:t>Typosquatting — reqeusts vs requests; the malicious package's setup.py runs at install time, before any of your code runs — you don't have to import it to be owned</a:t>
             </a:r>
             <a:endParaRPr lang="en-US" sz="1400" dirty="0"/>
           </a:p>
@@ -6001,45 +6629,87 @@
                 <a:ea typeface="Calibri" pitchFamily="34" charset="-122"/>
                 <a:cs typeface="Calibri" pitchFamily="34" charset="-120"/>
               </a:rPr>
-              <a:t>CWE-1104 (unmaintained), CWE-829 (untrusted inclusion)</a:t>
+              <a:t>Dependency confusion (CWE-1357) — public pkg shadows internal name</a:t>
             </a:r>
             <a:endParaRPr lang="en-US" sz="1400" dirty="0"/>
           </a:p>
-        </p:txBody>
-      </p:sp>
-      <p:sp>
-        <p:nvSpPr>
-          <p:cNvPr id="9" name="Text 6"/>
-          <p:cNvSpPr/>
-          <p:nvPr/>
-        </p:nvSpPr>
-        <p:spPr>
-          <a:xfrm>
-            <a:off x="457200" y="4800600"/>
-            <a:ext cx="6949440" cy="274320"/>
-          </a:xfrm>
-          <a:prstGeom prst="rect">
-            <a:avLst/>
-          </a:prstGeom>
-          <a:noFill/>
-          <a:ln/>
-        </p:spPr>
-        <p:txBody>
-          <a:bodyPr wrap="square" lIns="0" tIns="0" rIns="0" bIns="0" rtlCol="0" anchor="ctr"/>
-          <a:lstStyle/>
-          <a:p>
-            <a:pPr indent="0" marL="0">
-              <a:buNone/>
-            </a:pPr>
-            <a:r>
-              <a:rPr lang="en-US" sz="900" dirty="0">
-                <a:solidFill>
-                  <a:srgbClr val="64748B"/>
+          <a:p>
+            <a:pPr marL="342900" indent="-342900">
+              <a:spcAft>
+                <a:spcPts val="600"/>
+              </a:spcAft>
+              <a:buSzPct val="100000"/>
+              <a:buChar char="•"/>
+            </a:pPr>
+            <a:r>
+              <a:rPr lang="en-US" sz="1400" dirty="0">
+                <a:solidFill>
+                  <a:srgbClr val="1F2937"/>
                 </a:solidFill>
                 <a:latin typeface="Calibri" pitchFamily="34" charset="0"/>
                 <a:ea typeface="Calibri" pitchFamily="34" charset="-122"/>
                 <a:cs typeface="Calibri" pitchFamily="34" charset="-120"/>
               </a:rPr>
+              <a:t>Malicious updates — compromised maintainer</a:t>
+            </a:r>
+            <a:endParaRPr lang="en-US" sz="1400" dirty="0"/>
+          </a:p>
+          <a:p>
+            <a:pPr marL="342900" indent="-342900">
+              <a:spcAft>
+                <a:spcPts val="600"/>
+              </a:spcAft>
+              <a:buSzPct val="100000"/>
+              <a:buChar char="•"/>
+            </a:pPr>
+            <a:r>
+              <a:rPr lang="en-US" sz="1400" dirty="0">
+                <a:solidFill>
+                  <a:srgbClr val="1F2937"/>
+                </a:solidFill>
+                <a:latin typeface="Calibri" pitchFamily="34" charset="0"/>
+                <a:ea typeface="Calibri" pitchFamily="34" charset="-122"/>
+                <a:cs typeface="Calibri" pitchFamily="34" charset="-120"/>
+              </a:rPr>
+              <a:t>Transitive risk — deps of deps you never chose</a:t>
+            </a:r>
+            <a:endParaRPr lang="en-US" sz="1400" dirty="0"/>
+          </a:p>
+        </p:txBody>
+      </p:sp>
+      <p:sp>
+        <p:nvSpPr>
+          <p:cNvPr id="7" name="Text 4"/>
+          <p:cNvSpPr/>
+          <p:nvPr/>
+        </p:nvSpPr>
+        <p:spPr>
+          <a:xfrm>
+            <a:off x="457200" y="4800600"/>
+            <a:ext cx="6949440" cy="274320"/>
+          </a:xfrm>
+          <a:prstGeom prst="rect">
+            <a:avLst/>
+          </a:prstGeom>
+          <a:noFill/>
+          <a:ln/>
+        </p:spPr>
+        <p:txBody>
+          <a:bodyPr wrap="square" lIns="0" tIns="0" rIns="0" bIns="0" rtlCol="0" anchor="ctr"/>
+          <a:lstStyle/>
+          <a:p>
+            <a:pPr indent="0" marL="0">
+              <a:buNone/>
+            </a:pPr>
+            <a:r>
+              <a:rPr lang="en-US" sz="900" dirty="0">
+                <a:solidFill>
+                  <a:srgbClr val="64748B"/>
+                </a:solidFill>
+                <a:latin typeface="Calibri" pitchFamily="34" charset="0"/>
+                <a:ea typeface="Calibri" pitchFamily="34" charset="-122"/>
+                <a:cs typeface="Calibri" pitchFamily="34" charset="-120"/>
+              </a:rPr>
               <a:t>Software Security · Week 12</a:t>
             </a:r>
             <a:endParaRPr lang="en-US" sz="900" dirty="0"/>
@@ -6048,7 +6718,7 @@
       </p:sp>
       <p:pic>
         <p:nvPicPr>
-          <p:cNvPr id="10" name="Image 1" descr="/Users/pop7/Library/CloudStorage/OneDrive-MonsterConnectCo.,Ltd/Lecture/KOSEN69 - software-security/slides/pptx/assets/logo-small.png">    </p:cNvPr>
+          <p:cNvPr id="8" name="Image 1" descr="/Users/pop7/Library/CloudStorage/OneDrive-MonsterConnectCo.,Ltd/Lecture/KOSEN69 - software-security/slides/pptx/assets/logo-small.png">    </p:cNvPr>
           <p:cNvPicPr>
             <a:picLocks noChangeAspect="1"/>
           </p:cNvPicPr>
@@ -6186,7 +6856,7 @@
                 <a:ea typeface="Arial" pitchFamily="34" charset="-122"/>
                 <a:cs typeface="Arial" pitchFamily="34" charset="-120"/>
               </a:rPr>
-              <a:t>Integrity: prove what you shipped</a:t>
+              <a:t>SCA — find vulnerable deps</a:t>
             </a:r>
             <a:endParaRPr lang="en-US" sz="2600" dirty="0"/>
           </a:p>
@@ -6201,11 +6871,96 @@
         <p:spPr>
           <a:xfrm>
             <a:off x="457200" y="1325880"/>
-            <a:ext cx="8229600" cy="1207008"/>
+            <a:ext cx="8229600" cy="713232"/>
           </a:xfrm>
           <a:prstGeom prst="roundRect">
             <a:avLst>
-              <a:gd name="adj" fmla="val 6061"/>
+              <a:gd name="adj" fmla="val 7692"/>
+            </a:avLst>
+          </a:prstGeom>
+          <a:solidFill>
+            <a:srgbClr val="0A1020"/>
+          </a:solidFill>
+          <a:ln w="12700">
+            <a:solidFill>
+              <a:srgbClr val="E8EDF3"/>
+            </a:solidFill>
+            <a:prstDash val="solid"/>
+          </a:ln>
+        </p:spPr>
+      </p:sp>
+      <p:sp>
+        <p:nvSpPr>
+          <p:cNvPr id="6" name="Text 3"/>
+          <p:cNvSpPr/>
+          <p:nvPr/>
+        </p:nvSpPr>
+        <p:spPr>
+          <a:xfrm>
+            <a:off x="640080" y="1399032"/>
+            <a:ext cx="7863840" cy="566928"/>
+          </a:xfrm>
+          <a:prstGeom prst="rect">
+            <a:avLst/>
+          </a:prstGeom>
+          <a:noFill/>
+          <a:ln/>
+        </p:spPr>
+        <p:txBody>
+          <a:bodyPr wrap="square" lIns="0" tIns="0" rIns="0" bIns="0" rtlCol="0" anchor="t">
+            <a:normAutofit/>
+          </a:bodyPr>
+          <a:lstStyle/>
+          <a:p>
+            <a:pPr indent="0" marL="0">
+              <a:buNone/>
+            </a:pPr>
+            <a:r>
+              <a:rPr lang="en-US" sz="1150" dirty="0">
+                <a:solidFill>
+                  <a:srgbClr val="9FE7D6"/>
+                </a:solidFill>
+                <a:latin typeface="Courier New" pitchFamily="34" charset="0"/>
+                <a:ea typeface="Courier New" pitchFamily="34" charset="-122"/>
+                <a:cs typeface="Courier New" pitchFamily="34" charset="-120"/>
+              </a:rPr>
+              <a:t>docker run --rm -v "$PWD:/src" aquasec/trivy fs /src   # this lab's Python deps</a:t>
+            </a:r>
+            <a:endParaRPr lang="en-US" sz="1150" dirty="0"/>
+          </a:p>
+          <a:p>
+            <a:pPr indent="0" marL="0">
+              <a:buNone/>
+            </a:pPr>
+            <a:r>
+              <a:rPr lang="en-US" sz="1150" dirty="0">
+                <a:solidFill>
+                  <a:srgbClr val="9FE7D6"/>
+                </a:solidFill>
+                <a:latin typeface="Courier New" pitchFamily="34" charset="0"/>
+                <a:ea typeface="Courier New" pitchFamily="34" charset="-122"/>
+                <a:cs typeface="Courier New" pitchFamily="34" charset="-120"/>
+              </a:rPr>
+              <a:t>pip-audit                                                          # vs PyPI advisories</a:t>
+            </a:r>
+            <a:endParaRPr lang="en-US" sz="1150" dirty="0"/>
+          </a:p>
+        </p:txBody>
+      </p:sp>
+      <p:sp>
+        <p:nvSpPr>
+          <p:cNvPr id="7" name="Shape 4"/>
+          <p:cNvSpPr/>
+          <p:nvPr/>
+        </p:nvSpPr>
+        <p:spPr>
+          <a:xfrm>
+            <a:off x="457200" y="2203704"/>
+            <a:ext cx="8229600" cy="1097280"/>
+          </a:xfrm>
+          <a:prstGeom prst="roundRect">
+            <a:avLst>
+              <a:gd name="adj" fmla="val 6667"/>
             </a:avLst>
           </a:prstGeom>
           <a:solidFill>
@@ -6223,14 +6978,14 @@
       </p:sp>
       <p:sp>
         <p:nvSpPr>
-          <p:cNvPr id="6" name="Text 3"/>
+          <p:cNvPr id="8" name="Text 5"/>
           <p:cNvSpPr/>
           <p:nvPr/>
         </p:nvSpPr>
         <p:spPr>
           <a:xfrm>
-            <a:off x="731520" y="1435608"/>
-            <a:ext cx="7680960" cy="987552"/>
+            <a:off x="731520" y="2313432"/>
+            <a:ext cx="7680960" cy="877824"/>
           </a:xfrm>
           <a:prstGeom prst="rect">
             <a:avLst/>
@@ -6239,7 +6994,9 @@
           <a:ln/>
         </p:spPr>
         <p:txBody>
-          <a:bodyPr wrap="square" lIns="0" tIns="0" rIns="0" bIns="0" rtlCol="0" anchor="t"/>
+          <a:bodyPr wrap="square" lIns="0" tIns="0" rIns="0" bIns="0" rtlCol="0" anchor="t">
+            <a:normAutofit/>
+          </a:bodyPr>
           <a:lstStyle/>
           <a:p>
             <a:pPr marL="342900" indent="-342900">
@@ -6258,7 +7015,7 @@
                 <a:ea typeface="Calibri" pitchFamily="34" charset="-122"/>
                 <a:cs typeface="Calibri" pitchFamily="34" charset="-120"/>
               </a:rPr>
-              <a:t>SBOM (CycloneDX/SPDX) — ingredient list of the build</a:t>
+              <a:t>Produces CVEs + fix versions</a:t>
             </a:r>
             <a:endParaRPr lang="en-US" sz="1400" dirty="0"/>
           </a:p>
@@ -6279,66 +7036,45 @@
                 <a:ea typeface="Calibri" pitchFamily="34" charset="-122"/>
                 <a:cs typeface="Calibri" pitchFamily="34" charset="-120"/>
               </a:rPr>
-              <a:t>SLSA — levels of build provenance &amp; tamper-resistance</a:t>
+              <a:t>CWE-1104 (unmaintained), CWE-829 (untrusted inclusion), CWE-1395 (known-vulnerable 3rd-party dependency)</a:t>
             </a:r>
             <a:endParaRPr lang="en-US" sz="1400" dirty="0"/>
           </a:p>
-          <a:p>
-            <a:pPr marL="342900" indent="-342900">
-              <a:spcAft>
-                <a:spcPts val="600"/>
-              </a:spcAft>
-              <a:buSzPct val="100000"/>
-              <a:buChar char="•"/>
-            </a:pPr>
-            <a:r>
-              <a:rPr lang="en-US" sz="1400" dirty="0">
-                <a:solidFill>
-                  <a:srgbClr val="1F2937"/>
+        </p:txBody>
+      </p:sp>
+      <p:sp>
+        <p:nvSpPr>
+          <p:cNvPr id="9" name="Text 6"/>
+          <p:cNvSpPr/>
+          <p:nvPr/>
+        </p:nvSpPr>
+        <p:spPr>
+          <a:xfrm>
+            <a:off x="457200" y="4800600"/>
+            <a:ext cx="6949440" cy="274320"/>
+          </a:xfrm>
+          <a:prstGeom prst="rect">
+            <a:avLst/>
+          </a:prstGeom>
+          <a:noFill/>
+          <a:ln/>
+        </p:spPr>
+        <p:txBody>
+          <a:bodyPr wrap="square" lIns="0" tIns="0" rIns="0" bIns="0" rtlCol="0" anchor="ctr"/>
+          <a:lstStyle/>
+          <a:p>
+            <a:pPr indent="0" marL="0">
+              <a:buNone/>
+            </a:pPr>
+            <a:r>
+              <a:rPr lang="en-US" sz="900" dirty="0">
+                <a:solidFill>
+                  <a:srgbClr val="64748B"/>
                 </a:solidFill>
                 <a:latin typeface="Calibri" pitchFamily="34" charset="0"/>
                 <a:ea typeface="Calibri" pitchFamily="34" charset="-122"/>
                 <a:cs typeface="Calibri" pitchFamily="34" charset="-120"/>
               </a:rPr>
-              <a:t>A08:2025 Software/Data Integrity Failures</a:t>
-            </a:r>
-            <a:endParaRPr lang="en-US" sz="1400" dirty="0"/>
-          </a:p>
-        </p:txBody>
-      </p:sp>
-      <p:sp>
-        <p:nvSpPr>
-          <p:cNvPr id="7" name="Text 4"/>
-          <p:cNvSpPr/>
-          <p:nvPr/>
-        </p:nvSpPr>
-        <p:spPr>
-          <a:xfrm>
-            <a:off x="457200" y="4800600"/>
-            <a:ext cx="6949440" cy="274320"/>
-          </a:xfrm>
-          <a:prstGeom prst="rect">
-            <a:avLst/>
-          </a:prstGeom>
-          <a:noFill/>
-          <a:ln/>
-        </p:spPr>
-        <p:txBody>
-          <a:bodyPr wrap="square" lIns="0" tIns="0" rIns="0" bIns="0" rtlCol="0" anchor="ctr"/>
-          <a:lstStyle/>
-          <a:p>
-            <a:pPr indent="0" marL="0">
-              <a:buNone/>
-            </a:pPr>
-            <a:r>
-              <a:rPr lang="en-US" sz="900" dirty="0">
-                <a:solidFill>
-                  <a:srgbClr val="64748B"/>
-                </a:solidFill>
-                <a:latin typeface="Calibri" pitchFamily="34" charset="0"/>
-                <a:ea typeface="Calibri" pitchFamily="34" charset="-122"/>
-                <a:cs typeface="Calibri" pitchFamily="34" charset="-120"/>
-              </a:rPr>
               <a:t>Software Security · Week 12</a:t>
             </a:r>
             <a:endParaRPr lang="en-US" sz="900" dirty="0"/>
@@ -6347,7 +7083,7 @@
       </p:sp>
       <p:pic>
         <p:nvPicPr>
-          <p:cNvPr id="8" name="Image 1" descr="/Users/pop7/Library/CloudStorage/OneDrive-MonsterConnectCo.,Ltd/Lecture/KOSEN69 - software-security/slides/pptx/assets/logo-small.png">    </p:cNvPr>
+          <p:cNvPr id="10" name="Image 1" descr="/Users/pop7/Library/CloudStorage/OneDrive-MonsterConnectCo.,Ltd/Lecture/KOSEN69 - software-security/slides/pptx/assets/logo-small.png">    </p:cNvPr>
           <p:cNvPicPr>
             <a:picLocks noChangeAspect="1"/>
           </p:cNvPicPr>
@@ -6485,7 +7221,7 @@
                 <a:ea typeface="Arial" pitchFamily="34" charset="-122"/>
                 <a:cs typeface="Arial" pitchFamily="34" charset="-120"/>
               </a:rPr>
-              <a:t>Signing with Cosign (keyless)</a:t>
+              <a:t>Integrity: prove what you shipped</a:t>
             </a:r>
             <a:endParaRPr lang="en-US" sz="2600" dirty="0"/>
           </a:p>
@@ -6500,111 +7236,11 @@
         <p:spPr>
           <a:xfrm>
             <a:off x="457200" y="1325880"/>
-            <a:ext cx="8229600" cy="1042416"/>
+            <a:ext cx="8229600" cy="1207008"/>
           </a:xfrm>
           <a:prstGeom prst="roundRect">
             <a:avLst>
-              <a:gd name="adj" fmla="val 5263"/>
-            </a:avLst>
-          </a:prstGeom>
-          <a:solidFill>
-            <a:srgbClr val="0A1020"/>
-          </a:solidFill>
-          <a:ln w="12700">
-            <a:solidFill>
-              <a:srgbClr val="E8EDF3"/>
-            </a:solidFill>
-            <a:prstDash val="solid"/>
-          </a:ln>
-        </p:spPr>
-      </p:sp>
-      <p:sp>
-        <p:nvSpPr>
-          <p:cNvPr id="6" name="Text 3"/>
-          <p:cNvSpPr/>
-          <p:nvPr/>
-        </p:nvSpPr>
-        <p:spPr>
-          <a:xfrm>
-            <a:off x="640080" y="1399032"/>
-            <a:ext cx="7863840" cy="896112"/>
-          </a:xfrm>
-          <a:prstGeom prst="rect">
-            <a:avLst/>
-          </a:prstGeom>
-          <a:noFill/>
-          <a:ln/>
-        </p:spPr>
-        <p:txBody>
-          <a:bodyPr wrap="square" lIns="0" tIns="0" rIns="0" bIns="0" rtlCol="0" anchor="t"/>
-          <a:lstStyle/>
-          <a:p>
-            <a:pPr indent="0" marL="0">
-              <a:buNone/>
-            </a:pPr>
-            <a:r>
-              <a:rPr lang="en-US" sz="1150" dirty="0">
-                <a:solidFill>
-                  <a:srgbClr val="9FE7D6"/>
-                </a:solidFill>
-                <a:latin typeface="Courier New" pitchFamily="34" charset="0"/>
-                <a:ea typeface="Courier New" pitchFamily="34" charset="-122"/>
-                <a:cs typeface="Courier New" pitchFamily="34" charset="-120"/>
-              </a:rPr>
-              <a:t>trivy image --format cyclonedx -o sbom.json myapp:lab   # SBOM</a:t>
-            </a:r>
-            <a:endParaRPr lang="en-US" sz="1150" dirty="0"/>
-          </a:p>
-          <a:p>
-            <a:pPr indent="0" marL="0">
-              <a:buNone/>
-            </a:pPr>
-            <a:r>
-              <a:rPr lang="en-US" sz="1150" dirty="0">
-                <a:solidFill>
-                  <a:srgbClr val="9FE7D6"/>
-                </a:solidFill>
-                <a:latin typeface="Courier New" pitchFamily="34" charset="0"/>
-                <a:ea typeface="Courier New" pitchFamily="34" charset="-122"/>
-                <a:cs typeface="Courier New" pitchFamily="34" charset="-120"/>
-              </a:rPr>
-              <a:t>cosign sign myapp:lab                                   # sign (OIDC)</a:t>
-            </a:r>
-            <a:endParaRPr lang="en-US" sz="1150" dirty="0"/>
-          </a:p>
-          <a:p>
-            <a:pPr indent="0" marL="0">
-              <a:buNone/>
-            </a:pPr>
-            <a:r>
-              <a:rPr lang="en-US" sz="1150" dirty="0">
-                <a:solidFill>
-                  <a:srgbClr val="9FE7D6"/>
-                </a:solidFill>
-                <a:latin typeface="Courier New" pitchFamily="34" charset="0"/>
-                <a:ea typeface="Courier New" pitchFamily="34" charset="-122"/>
-                <a:cs typeface="Courier New" pitchFamily="34" charset="-120"/>
-              </a:rPr>
-              <a:t>cosign verify myapp:lab                                 # verify</a:t>
-            </a:r>
-            <a:endParaRPr lang="en-US" sz="1150" dirty="0"/>
-          </a:p>
-        </p:txBody>
-      </p:sp>
-      <p:sp>
-        <p:nvSpPr>
-          <p:cNvPr id="7" name="Shape 4"/>
-          <p:cNvSpPr/>
-          <p:nvPr/>
-        </p:nvSpPr>
-        <p:spPr>
-          <a:xfrm>
-            <a:off x="457200" y="2532888"/>
-            <a:ext cx="8229600" cy="585216"/>
-          </a:xfrm>
-          <a:prstGeom prst="roundRect">
-            <a:avLst>
-              <a:gd name="adj" fmla="val 12500"/>
+              <a:gd name="adj" fmla="val 6061"/>
             </a:avLst>
           </a:prstGeom>
           <a:solidFill>
@@ -6622,14 +7258,14 @@
       </p:sp>
       <p:sp>
         <p:nvSpPr>
-          <p:cNvPr id="8" name="Text 5"/>
+          <p:cNvPr id="6" name="Text 3"/>
           <p:cNvSpPr/>
           <p:nvPr/>
         </p:nvSpPr>
         <p:spPr>
           <a:xfrm>
-            <a:off x="731520" y="2642616"/>
-            <a:ext cx="7680960" cy="365760"/>
+            <a:off x="731520" y="1435608"/>
+            <a:ext cx="7680960" cy="987552"/>
           </a:xfrm>
           <a:prstGeom prst="rect">
             <a:avLst/>
@@ -6638,7 +7274,9 @@
           <a:ln/>
         </p:spPr>
         <p:txBody>
-          <a:bodyPr wrap="square" lIns="0" tIns="0" rIns="0" bIns="0" rtlCol="0" anchor="t"/>
+          <a:bodyPr wrap="square" lIns="0" tIns="0" rIns="0" bIns="0" rtlCol="0" anchor="t">
+            <a:normAutofit/>
+          </a:bodyPr>
           <a:lstStyle/>
           <a:p>
             <a:pPr marL="342900" indent="-342900">
@@ -6657,45 +7295,87 @@
                 <a:ea typeface="Calibri" pitchFamily="34" charset="-122"/>
                 <a:cs typeface="Calibri" pitchFamily="34" charset="-120"/>
               </a:rPr>
-              <a:t>Unsigned/tampered image → verification fails</a:t>
+              <a:t>SBOM (CycloneDX/SPDX) — ingredient list of the build</a:t>
             </a:r>
             <a:endParaRPr lang="en-US" sz="1400" dirty="0"/>
           </a:p>
-        </p:txBody>
-      </p:sp>
-      <p:sp>
-        <p:nvSpPr>
-          <p:cNvPr id="9" name="Text 6"/>
-          <p:cNvSpPr/>
-          <p:nvPr/>
-        </p:nvSpPr>
-        <p:spPr>
-          <a:xfrm>
-            <a:off x="457200" y="4800600"/>
-            <a:ext cx="6949440" cy="274320"/>
-          </a:xfrm>
-          <a:prstGeom prst="rect">
-            <a:avLst/>
-          </a:prstGeom>
-          <a:noFill/>
-          <a:ln/>
-        </p:spPr>
-        <p:txBody>
-          <a:bodyPr wrap="square" lIns="0" tIns="0" rIns="0" bIns="0" rtlCol="0" anchor="ctr"/>
-          <a:lstStyle/>
-          <a:p>
-            <a:pPr indent="0" marL="0">
-              <a:buNone/>
-            </a:pPr>
-            <a:r>
-              <a:rPr lang="en-US" sz="900" dirty="0">
-                <a:solidFill>
-                  <a:srgbClr val="64748B"/>
+          <a:p>
+            <a:pPr marL="342900" indent="-342900">
+              <a:spcAft>
+                <a:spcPts val="600"/>
+              </a:spcAft>
+              <a:buSzPct val="100000"/>
+              <a:buChar char="•"/>
+            </a:pPr>
+            <a:r>
+              <a:rPr lang="en-US" sz="1400" dirty="0">
+                <a:solidFill>
+                  <a:srgbClr val="1F2937"/>
                 </a:solidFill>
                 <a:latin typeface="Calibri" pitchFamily="34" charset="0"/>
                 <a:ea typeface="Calibri" pitchFamily="34" charset="-122"/>
                 <a:cs typeface="Calibri" pitchFamily="34" charset="-120"/>
               </a:rPr>
+              <a:t>SLSA — levels of build provenance &amp; tamper-resistance</a:t>
+            </a:r>
+            <a:endParaRPr lang="en-US" sz="1400" dirty="0"/>
+          </a:p>
+          <a:p>
+            <a:pPr marL="342900" indent="-342900">
+              <a:spcAft>
+                <a:spcPts val="600"/>
+              </a:spcAft>
+              <a:buSzPct val="100000"/>
+              <a:buChar char="•"/>
+            </a:pPr>
+            <a:r>
+              <a:rPr lang="en-US" sz="1400" dirty="0">
+                <a:solidFill>
+                  <a:srgbClr val="1F2937"/>
+                </a:solidFill>
+                <a:latin typeface="Calibri" pitchFamily="34" charset="0"/>
+                <a:ea typeface="Calibri" pitchFamily="34" charset="-122"/>
+                <a:cs typeface="Calibri" pitchFamily="34" charset="-120"/>
+              </a:rPr>
+              <a:t>A08:2025 Software/Data Integrity Failures</a:t>
+            </a:r>
+            <a:endParaRPr lang="en-US" sz="1400" dirty="0"/>
+          </a:p>
+        </p:txBody>
+      </p:sp>
+      <p:sp>
+        <p:nvSpPr>
+          <p:cNvPr id="7" name="Text 4"/>
+          <p:cNvSpPr/>
+          <p:nvPr/>
+        </p:nvSpPr>
+        <p:spPr>
+          <a:xfrm>
+            <a:off x="457200" y="4800600"/>
+            <a:ext cx="6949440" cy="274320"/>
+          </a:xfrm>
+          <a:prstGeom prst="rect">
+            <a:avLst/>
+          </a:prstGeom>
+          <a:noFill/>
+          <a:ln/>
+        </p:spPr>
+        <p:txBody>
+          <a:bodyPr wrap="square" lIns="0" tIns="0" rIns="0" bIns="0" rtlCol="0" anchor="ctr"/>
+          <a:lstStyle/>
+          <a:p>
+            <a:pPr indent="0" marL="0">
+              <a:buNone/>
+            </a:pPr>
+            <a:r>
+              <a:rPr lang="en-US" sz="900" dirty="0">
+                <a:solidFill>
+                  <a:srgbClr val="64748B"/>
+                </a:solidFill>
+                <a:latin typeface="Calibri" pitchFamily="34" charset="0"/>
+                <a:ea typeface="Calibri" pitchFamily="34" charset="-122"/>
+                <a:cs typeface="Calibri" pitchFamily="34" charset="-120"/>
+              </a:rPr>
               <a:t>Software Security · Week 12</a:t>
             </a:r>
             <a:endParaRPr lang="en-US" sz="900" dirty="0"/>
@@ -6704,7 +7384,7 @@
       </p:sp>
       <p:pic>
         <p:nvPicPr>
-          <p:cNvPr id="10" name="Image 1" descr="/Users/pop7/Library/CloudStorage/OneDrive-MonsterConnectCo.,Ltd/Lecture/KOSEN69 - software-security/slides/pptx/assets/logo-small.png">    </p:cNvPr>
+          <p:cNvPr id="8" name="Image 1" descr="/Users/pop7/Library/CloudStorage/OneDrive-MonsterConnectCo.,Ltd/Lecture/KOSEN69 - software-security/slides/pptx/assets/logo-small.png">    </p:cNvPr>
           <p:cNvPicPr>
             <a:picLocks noChangeAspect="1"/>
           </p:cNvPicPr>
@@ -6842,7 +7522,7 @@
                 <a:ea typeface="Arial" pitchFamily="34" charset="-122"/>
                 <a:cs typeface="Arial" pitchFamily="34" charset="-120"/>
               </a:rPr>
-              <a:t>Tooling — GitHub Advanced Security (GHAS)</a:t>
+              <a:t>Signing with Cosign (keyless)</a:t>
             </a:r>
             <a:endParaRPr lang="en-US" sz="2600" dirty="0"/>
           </a:p>
@@ -6857,24 +7537,22 @@
         <p:spPr>
           <a:xfrm>
             <a:off x="457200" y="1325880"/>
-            <a:ext cx="8229600" cy="1517904"/>
+            <a:ext cx="8229600" cy="2907792"/>
           </a:xfrm>
           <a:prstGeom prst="roundRect">
             <a:avLst>
-              <a:gd name="adj" fmla="val 4819"/>
+              <a:gd name="adj" fmla="val 1887"/>
             </a:avLst>
           </a:prstGeom>
           <a:solidFill>
-            <a:srgbClr val="F1F5F9"/>
+            <a:srgbClr val="0A1020"/>
           </a:solidFill>
-          <a:ln/>
-          <a:effectLst>
-            <a:outerShdw sx="100000" sy="100000" kx="0" ky="0" algn="bl" rotWithShape="0" blurRad="76200" dist="25400" dir="5400000">
-              <a:srgbClr val="000000">
-                <a:alpha val="12000"/>
-              </a:srgbClr>
-            </a:outerShdw>
-          </a:effectLst>
+          <a:ln w="12700">
+            <a:solidFill>
+              <a:srgbClr val="E8EDF3"/>
+            </a:solidFill>
+            <a:prstDash val="solid"/>
+          </a:ln>
         </p:spPr>
       </p:sp>
       <p:sp>
@@ -6885,8 +7563,8 @@
         </p:nvSpPr>
         <p:spPr>
           <a:xfrm>
-            <a:off x="731520" y="1435608"/>
-            <a:ext cx="7680960" cy="1298448"/>
+            <a:off x="640080" y="1399032"/>
+            <a:ext cx="7863840" cy="2761488"/>
           </a:xfrm>
           <a:prstGeom prst="rect">
             <a:avLst/>
@@ -6895,91 +7573,213 @@
           <a:ln/>
         </p:spPr>
         <p:txBody>
-          <a:bodyPr wrap="square" lIns="0" tIns="0" rIns="0" bIns="0" rtlCol="0" anchor="t"/>
-          <a:lstStyle/>
-          <a:p>
-            <a:pPr marL="342900" indent="-342900">
-              <a:spcAft>
-                <a:spcPts val="600"/>
-              </a:spcAft>
-              <a:buSzPct val="100000"/>
-              <a:buChar char="•"/>
-            </a:pPr>
-            <a:r>
-              <a:rPr lang="en-US" sz="1400" dirty="0">
-                <a:solidFill>
-                  <a:srgbClr val="1F2937"/>
-                </a:solidFill>
-                <a:latin typeface="Calibri" pitchFamily="34" charset="0"/>
-                <a:ea typeface="Calibri" pitchFamily="34" charset="-122"/>
-                <a:cs typeface="Calibri" pitchFamily="34" charset="-120"/>
-              </a:rPr>
-              <a:t>Secret scanning + push protection — block secrets before commit</a:t>
-            </a:r>
-            <a:endParaRPr lang="en-US" sz="1400" dirty="0"/>
-          </a:p>
-          <a:p>
-            <a:pPr marL="342900" indent="-342900">
-              <a:spcAft>
-                <a:spcPts val="600"/>
-              </a:spcAft>
-              <a:buSzPct val="100000"/>
-              <a:buChar char="•"/>
-            </a:pPr>
-            <a:r>
-              <a:rPr lang="en-US" sz="1400" dirty="0">
-                <a:solidFill>
-                  <a:srgbClr val="1F2937"/>
-                </a:solidFill>
-                <a:latin typeface="Calibri" pitchFamily="34" charset="0"/>
-                <a:ea typeface="Calibri" pitchFamily="34" charset="-122"/>
-                <a:cs typeface="Calibri" pitchFamily="34" charset="-120"/>
-              </a:rPr>
-              <a:t>CodeQL code scanning — semantic SAST queries</a:t>
-            </a:r>
-            <a:endParaRPr lang="en-US" sz="1400" dirty="0"/>
-          </a:p>
-          <a:p>
-            <a:pPr marL="342900" indent="-342900">
-              <a:spcAft>
-                <a:spcPts val="600"/>
-              </a:spcAft>
-              <a:buSzPct val="100000"/>
-              <a:buChar char="•"/>
-            </a:pPr>
-            <a:r>
-              <a:rPr lang="en-US" sz="1400" dirty="0">
-                <a:solidFill>
-                  <a:srgbClr val="1F2937"/>
-                </a:solidFill>
-                <a:latin typeface="Calibri" pitchFamily="34" charset="0"/>
-                <a:ea typeface="Calibri" pitchFamily="34" charset="-122"/>
-                <a:cs typeface="Calibri" pitchFamily="34" charset="-120"/>
-              </a:rPr>
-              <a:t>Dependabot — alerts + auto-PRs for vulnerable deps</a:t>
-            </a:r>
-            <a:endParaRPr lang="en-US" sz="1400" dirty="0"/>
-          </a:p>
-          <a:p>
-            <a:pPr marL="342900" indent="-342900">
-              <a:spcAft>
-                <a:spcPts val="600"/>
-              </a:spcAft>
-              <a:buSzPct val="100000"/>
-              <a:buChar char="•"/>
-            </a:pPr>
-            <a:r>
-              <a:rPr lang="en-US" sz="1400" dirty="0">
-                <a:solidFill>
-                  <a:srgbClr val="1F2937"/>
-                </a:solidFill>
-                <a:latin typeface="Calibri" pitchFamily="34" charset="0"/>
-                <a:ea typeface="Calibri" pitchFamily="34" charset="-122"/>
-                <a:cs typeface="Calibri" pitchFamily="34" charset="-120"/>
-              </a:rPr>
-              <a:t>Native in the repo → results in the Security tab</a:t>
-            </a:r>
-            <a:endParaRPr lang="en-US" sz="1400" dirty="0"/>
+          <a:bodyPr wrap="square" lIns="0" tIns="0" rIns="0" bIns="0" rtlCol="0" anchor="t">
+            <a:normAutofit/>
+          </a:bodyPr>
+          <a:lstStyle/>
+          <a:p>
+            <a:pPr indent="0" marL="0">
+              <a:buNone/>
+            </a:pPr>
+            <a:r>
+              <a:rPr lang="en-US" sz="1150" dirty="0">
+                <a:solidFill>
+                  <a:srgbClr val="9FE7D6"/>
+                </a:solidFill>
+                <a:latin typeface="Courier New" pitchFamily="34" charset="0"/>
+                <a:ea typeface="Courier New" pitchFamily="34" charset="-122"/>
+                <a:cs typeface="Courier New" pitchFamily="34" charset="-120"/>
+              </a:rPr>
+              <a:t>IMG=week12-supplychain:lab</a:t>
+            </a:r>
+            <a:endParaRPr lang="en-US" sz="1150" dirty="0"/>
+          </a:p>
+          <a:p>
+            <a:pPr indent="0" marL="0">
+              <a:buNone/>
+            </a:pPr>
+            <a:r>
+              <a:rPr lang="en-US" sz="1150" dirty="0">
+                <a:solidFill>
+                  <a:srgbClr val="9FE7D6"/>
+                </a:solidFill>
+                <a:latin typeface="Courier New" pitchFamily="34" charset="0"/>
+                <a:ea typeface="Courier New" pitchFamily="34" charset="-122"/>
+                <a:cs typeface="Courier New" pitchFamily="34" charset="-120"/>
+              </a:rPr>
+              <a:t>docker run --rm -v "$PWD:/src" -v /var/run/docker.sock:/var/run/docker.sock \</a:t>
+            </a:r>
+            <a:endParaRPr lang="en-US" sz="1150" dirty="0"/>
+          </a:p>
+          <a:p>
+            <a:pPr indent="0" marL="0">
+              <a:buNone/>
+            </a:pPr>
+            <a:r>
+              <a:rPr lang="en-US" sz="1150" dirty="0">
+                <a:solidFill>
+                  <a:srgbClr val="9FE7D6"/>
+                </a:solidFill>
+                <a:latin typeface="Courier New" pitchFamily="34" charset="0"/>
+                <a:ea typeface="Courier New" pitchFamily="34" charset="-122"/>
+                <a:cs typeface="Courier New" pitchFamily="34" charset="-120"/>
+              </a:rPr>
+              <a:t>  aquasec/trivy:latest image --format cyclonedx \</a:t>
+            </a:r>
+            <a:endParaRPr lang="en-US" sz="1150" dirty="0"/>
+          </a:p>
+          <a:p>
+            <a:pPr indent="0" marL="0">
+              <a:buNone/>
+            </a:pPr>
+            <a:r>
+              <a:rPr lang="en-US" sz="1150" dirty="0">
+                <a:solidFill>
+                  <a:srgbClr val="9FE7D6"/>
+                </a:solidFill>
+                <a:latin typeface="Courier New" pitchFamily="34" charset="0"/>
+                <a:ea typeface="Courier New" pitchFamily="34" charset="-122"/>
+                <a:cs typeface="Courier New" pitchFamily="34" charset="-120"/>
+              </a:rPr>
+              <a:t>  --output /src/sbom.cdx.json "$IMG"                          # SBOM</a:t>
+            </a:r>
+            <a:endParaRPr lang="en-US" sz="1150" dirty="0"/>
+          </a:p>
+          <a:p>
+            <a:pPr indent="0" marL="0">
+              <a:buNone/>
+            </a:pPr>
+            <a:r>
+              <a:rPr lang="en-US" sz="1150" dirty="0">
+                <a:solidFill>
+                  <a:srgbClr val="9FE7D6"/>
+                </a:solidFill>
+                <a:latin typeface="Courier New" pitchFamily="34" charset="0"/>
+                <a:ea typeface="Courier New" pitchFamily="34" charset="-122"/>
+                <a:cs typeface="Courier New" pitchFamily="34" charset="-120"/>
+              </a:rPr>
+              <a:t>docker run --rm -e COSIGN_EXPERIMENTAL=1 \</a:t>
+            </a:r>
+            <a:endParaRPr lang="en-US" sz="1150" dirty="0"/>
+          </a:p>
+          <a:p>
+            <a:pPr indent="0" marL="0">
+              <a:buNone/>
+            </a:pPr>
+            <a:r>
+              <a:rPr lang="en-US" sz="1150" dirty="0">
+                <a:solidFill>
+                  <a:srgbClr val="9FE7D6"/>
+                </a:solidFill>
+                <a:latin typeface="Courier New" pitchFamily="34" charset="0"/>
+                <a:ea typeface="Courier New" pitchFamily="34" charset="-122"/>
+                <a:cs typeface="Courier New" pitchFamily="34" charset="-120"/>
+              </a:rPr>
+              <a:t>  -v /var/run/docker.sock:/var/run/docker.sock \</a:t>
+            </a:r>
+            <a:endParaRPr lang="en-US" sz="1150" dirty="0"/>
+          </a:p>
+          <a:p>
+            <a:pPr indent="0" marL="0">
+              <a:buNone/>
+            </a:pPr>
+            <a:r>
+              <a:rPr lang="en-US" sz="1150" dirty="0">
+                <a:solidFill>
+                  <a:srgbClr val="9FE7D6"/>
+                </a:solidFill>
+                <a:latin typeface="Courier New" pitchFamily="34" charset="0"/>
+                <a:ea typeface="Courier New" pitchFamily="34" charset="-122"/>
+                <a:cs typeface="Courier New" pitchFamily="34" charset="-120"/>
+              </a:rPr>
+              <a:t>  gcr.io/projectsigstore/cosign:latest sign --yes "$IMG"       # sign (OIDC)</a:t>
+            </a:r>
+            <a:endParaRPr lang="en-US" sz="1150" dirty="0"/>
+          </a:p>
+          <a:p>
+            <a:pPr indent="0" marL="0">
+              <a:buNone/>
+            </a:pPr>
+            <a:r>
+              <a:rPr lang="en-US" sz="1150" dirty="0">
+                <a:solidFill>
+                  <a:srgbClr val="9FE7D6"/>
+                </a:solidFill>
+                <a:latin typeface="Courier New" pitchFamily="34" charset="0"/>
+                <a:ea typeface="Courier New" pitchFamily="34" charset="-122"/>
+                <a:cs typeface="Courier New" pitchFamily="34" charset="-120"/>
+              </a:rPr>
+              <a:t>docker run --rm -e COSIGN_EXPERIMENTAL=1 \</a:t>
+            </a:r>
+            <a:endParaRPr lang="en-US" sz="1150" dirty="0"/>
+          </a:p>
+          <a:p>
+            <a:pPr indent="0" marL="0">
+              <a:buNone/>
+            </a:pPr>
+            <a:r>
+              <a:rPr lang="en-US" sz="1150" dirty="0">
+                <a:solidFill>
+                  <a:srgbClr val="9FE7D6"/>
+                </a:solidFill>
+                <a:latin typeface="Courier New" pitchFamily="34" charset="0"/>
+                <a:ea typeface="Courier New" pitchFamily="34" charset="-122"/>
+                <a:cs typeface="Courier New" pitchFamily="34" charset="-120"/>
+              </a:rPr>
+              <a:t>  -v /var/run/docker.sock:/var/run/docker.sock \</a:t>
+            </a:r>
+            <a:endParaRPr lang="en-US" sz="1150" dirty="0"/>
+          </a:p>
+          <a:p>
+            <a:pPr indent="0" marL="0">
+              <a:buNone/>
+            </a:pPr>
+            <a:r>
+              <a:rPr lang="en-US" sz="1150" dirty="0">
+                <a:solidFill>
+                  <a:srgbClr val="9FE7D6"/>
+                </a:solidFill>
+                <a:latin typeface="Courier New" pitchFamily="34" charset="0"/>
+                <a:ea typeface="Courier New" pitchFamily="34" charset="-122"/>
+                <a:cs typeface="Courier New" pitchFamily="34" charset="-120"/>
+              </a:rPr>
+              <a:t>  gcr.io/projectsigstore/cosign:latest verify \</a:t>
+            </a:r>
+            <a:endParaRPr lang="en-US" sz="1150" dirty="0"/>
+          </a:p>
+          <a:p>
+            <a:pPr indent="0" marL="0">
+              <a:buNone/>
+            </a:pPr>
+            <a:r>
+              <a:rPr lang="en-US" sz="1150" dirty="0">
+                <a:solidFill>
+                  <a:srgbClr val="9FE7D6"/>
+                </a:solidFill>
+                <a:latin typeface="Courier New" pitchFamily="34" charset="0"/>
+                <a:ea typeface="Courier New" pitchFamily="34" charset="-122"/>
+                <a:cs typeface="Courier New" pitchFamily="34" charset="-120"/>
+              </a:rPr>
+              <a:t>  --certificate-identity-regexp ".*" \</a:t>
+            </a:r>
+            <a:endParaRPr lang="en-US" sz="1150" dirty="0"/>
+          </a:p>
+          <a:p>
+            <a:pPr indent="0" marL="0">
+              <a:buNone/>
+            </a:pPr>
+            <a:r>
+              <a:rPr lang="en-US" sz="1150" dirty="0">
+                <a:solidFill>
+                  <a:srgbClr val="9FE7D6"/>
+                </a:solidFill>
+                <a:latin typeface="Courier New" pitchFamily="34" charset="0"/>
+                <a:ea typeface="Courier New" pitchFamily="34" charset="-122"/>
+                <a:cs typeface="Courier New" pitchFamily="34" charset="-120"/>
+              </a:rPr>
+              <a:t>  --certificate-oidc-issuer-regexp ".*" "$IMG"                 # verify</a:t>
+            </a:r>
+            <a:endParaRPr lang="en-US" sz="1150" dirty="0"/>
           </a:p>
         </p:txBody>
       </p:sp>

--- a/slides/pptx/week12.pptx
+++ b/slides/pptx/week12.pptx
@@ -21,9 +21,11 @@
     <p:sldId id="269" r:id="rId15"/>
     <p:sldId id="270" r:id="rId16"/>
     <p:sldId id="271" r:id="rId17"/>
+    <p:sldId id="272" r:id="rId18"/>
+    <p:sldId id="273" r:id="rId19"/>
   </p:sldIdLst>
   <p:notesMasterIdLst>
-    <p:notesMasterId r:id="rId18"/>
+    <p:notesMasterId r:id="rId20"/>
   </p:notesMasterIdLst>
   <p:sldSz cx="9144000" cy="5143500"/>
   <p:notesSz cx="5143500" cy="9144000"/>
@@ -693,7 +695,7 @@
           <a:p>
             <a:r>
               <a:rPr lang="en-US" dirty="0"/>
-              <a:t>The managed option students will meet in industry. Dependabot is the practical supply-chain workhorse: it opens PRs bumping vulnerable deps automatically. Push protection stops secrets at push time — local commits with a secret are allowed, the block fires on push to the remote (recall W2). ~3 min.</a:t>
+              <a:t>Demo the sign→verify loop. sign.sh runs both tools dockerized — match that here, not a bare local binary. Keyless (Sigstore) = identity-based signing via OIDC through Fulcio, logged in Rekor, no key to leak — name both by name, worksheet Q4 grades on the vocabulary. The deploy gate: refuse any image that doesn't verify → a tampered artifact can't ship. This is the lab's defend step. ~4 min.</a:t>
             </a:r>
             <a:endParaRPr lang="en-US" dirty="0"/>
           </a:p>
@@ -781,7 +783,7 @@
           <a:p>
             <a:r>
               <a:rPr lang="en-US" dirty="0"/>
-              <a:t>The payoff checklist, now with the exact flags Task 4 grades. --require-hashes and single-index-url are what actually stops dependency confusion — "pin + scope" alone is too vague to reconstruct on the exam. Verify-before-deploy kills tampered artifacts; MFA on maintainer/CI accounts kills the xz/CircleCI vector. "Automate in CI" sets up W15. ~4 min.</a:t>
+              <a:t>The managed option students will meet in industry. Dependabot is the practical supply-chain workhorse: it opens PRs bumping vulnerable deps automatically. Push protection stops secrets at push time — local commits with a secret are allowed, the block fires on push to the remote (recall W2). ~3 min.</a:t>
             </a:r>
             <a:endParaRPr lang="en-US" dirty="0"/>
           </a:p>
@@ -869,7 +871,7 @@
           <a:p>
             <a:r>
               <a:rPr lang="en-US" dirty="0"/>
-              <a:t>Explain before lab — all in a controlled local registry (ethics: never publish a real typosquat). Defend side is graded. The SLSA self-assessment makes them reason about their own pipeline. ~3 min.</a:t>
+              <a:t>The payoff checklist, now with the exact flags Task 4 grades. --require-hashes and single-index-url are what actually stops dependency confusion — "pin + scope" alone is too vague to reconstruct on the exam. Verify-before-deploy kills tampered artifacts; MFA on maintainer/CI accounts kills the xz/CircleCI vector. "Automate in CI" sets up W15. ~4 min.</a:t>
             </a:r>
             <a:endParaRPr lang="en-US" dirty="0"/>
           </a:p>
@@ -957,7 +959,7 @@
           <a:p>
             <a:r>
               <a:rPr lang="en-US" dirty="0"/>
-              <a:t>The SLSA self-assessment is the thinking part — they place their own build on the ladder and justify it. AI-resilient tasks count.</a:t>
+              <a:t>The synthesis slide — everything from the last five slides (SAST/SCA, SBOM, Cosign, the defenses checklist) is one column each in this diagram, chained in the order a real dependency actually travels. Walk it left to right ONE time, don't re-teach each hop — the point is showing they were never separate tools, they're six links in the same chain. Land on the closing line before moving to the game. ~5 min.</a:t>
             </a:r>
             <a:endParaRPr lang="en-US" dirty="0"/>
           </a:p>
@@ -1045,7 +1047,7 @@
           <a:p>
             <a:r>
               <a:rPr lang="en-US" dirty="0"/>
-              <a:t>Recap with the three verbs. Cold-call: "the next Log4Shell drops at 2am — what artifact tells you if you're affected?" (the SBOM). ~2 min.</a:t>
+              <a:t>Explain before lab — all in a controlled local registry (ethics: never publish a real typosquat). Defend side is graded. The SLSA self-assessment makes them reason about their own pipeline. ~3 min.</a:t>
             </a:r>
             <a:endParaRPr lang="en-US" dirty="0"/>
           </a:p>
@@ -1133,7 +1135,7 @@
           <a:p>
             <a:r>
               <a:rPr lang="en-US" dirty="0"/>
-              <a:t>Cliffhanger: "Next week — where your code runs. We'll hunt cloud/container misconfigs, the #1 real-world breach cause."</a:t>
+              <a:t>The SLSA self-assessment is the thinking part — they place their own build on the ladder and justify it. AI-resilient tasks count.</a:t>
             </a:r>
             <a:endParaRPr lang="en-US" dirty="0"/>
           </a:p>
@@ -1157,6 +1159,182 @@
             <a:fld id="{F7021451-1387-4CA6-816F-3879F97B5CBC}" type="slidenum">
               <a:rPr lang="en-US"/>
               <a:t>16</a:t>
+            </a:fld>
+            <a:endParaRPr lang="en-US"/>
+          </a:p>
+        </p:txBody>
+      </p:sp>
+    </p:spTree>
+    <p:extLst>
+      <p:ext uri="{BB962C8B-B14F-4D97-AF65-F5344CB8AC3E}">
+        <p14:creationId xmlns:p14="http://schemas.microsoft.com/office/powerpoint/2010/main" val="1024086991"/>
+      </p:ext>
+    </p:extLst>
+  </p:cSld>
+  <p:clrMapOvr>
+    <a:masterClrMapping/>
+  </p:clrMapOvr>
+</p:notes>
+</file>
+
+<file path=ppt/notesSlides/notesSlide17.xml><?xml version="1.0" encoding="utf-8"?>
+<p:notes xmlns:a="http://schemas.openxmlformats.org/drawingml/2006/main" xmlns:r="http://schemas.openxmlformats.org/officeDocument/2006/relationships" xmlns:p="http://schemas.openxmlformats.org/presentationml/2006/main">
+  <p:cSld>
+    <p:spTree>
+      <p:nvGrpSpPr>
+        <p:cNvPr id="1" name=""/>
+        <p:cNvGrpSpPr/>
+        <p:nvPr/>
+      </p:nvGrpSpPr>
+      <p:grpSpPr>
+        <a:xfrm>
+          <a:off x="0" y="0"/>
+          <a:ext cx="0" cy="0"/>
+          <a:chOff x="0" y="0"/>
+          <a:chExt cx="0" cy="0"/>
+        </a:xfrm>
+      </p:grpSpPr>
+      <p:sp>
+        <p:nvSpPr>
+          <p:cNvPr id="2" name="Slide Image Placeholder 1"/>
+          <p:cNvSpPr>
+            <a:spLocks noGrp="1" noRot="1" noChangeAspect="1"/>
+          </p:cNvSpPr>
+          <p:nvPr>
+            <p:ph type="sldImg"/>
+          </p:nvPr>
+        </p:nvSpPr>
+        <p:spPr/>
+      </p:sp>
+      <p:sp>
+        <p:nvSpPr>
+          <p:cNvPr id="3" name="Notes Placeholder 2"/>
+          <p:cNvSpPr>
+            <a:spLocks noGrp="1"/>
+          </p:cNvSpPr>
+          <p:nvPr>
+            <p:ph type="body" idx="1"/>
+          </p:nvPr>
+        </p:nvSpPr>
+        <p:spPr/>
+        <p:txBody>
+          <a:bodyPr/>
+          <a:lstStyle/>
+          <a:p>
+            <a:r>
+              <a:rPr lang="en-US" dirty="0"/>
+              <a:t>Recap with the three verbs. Cold-call: "the next Log4Shell drops at 2am — what artifact tells you if you're affected?" (the SBOM). ~2 min.</a:t>
+            </a:r>
+            <a:endParaRPr lang="en-US" dirty="0"/>
+          </a:p>
+        </p:txBody>
+      </p:sp>
+      <p:sp>
+        <p:nvSpPr>
+          <p:cNvPr id="4" name="Slide Number Placeholder 3"/>
+          <p:cNvSpPr>
+            <a:spLocks noGrp="1"/>
+          </p:cNvSpPr>
+          <p:nvPr>
+            <p:ph type="sldNum" sz="quarter" idx="10"/>
+          </p:nvPr>
+        </p:nvSpPr>
+        <p:spPr/>
+        <p:txBody>
+          <a:bodyPr/>
+          <a:lstStyle/>
+          <a:p>
+            <a:fld id="{F7021451-1387-4CA6-816F-3879F97B5CBC}" type="slidenum">
+              <a:rPr lang="en-US"/>
+              <a:t>17</a:t>
+            </a:fld>
+            <a:endParaRPr lang="en-US"/>
+          </a:p>
+        </p:txBody>
+      </p:sp>
+    </p:spTree>
+    <p:extLst>
+      <p:ext uri="{BB962C8B-B14F-4D97-AF65-F5344CB8AC3E}">
+        <p14:creationId xmlns:p14="http://schemas.microsoft.com/office/powerpoint/2010/main" val="1024086991"/>
+      </p:ext>
+    </p:extLst>
+  </p:cSld>
+  <p:clrMapOvr>
+    <a:masterClrMapping/>
+  </p:clrMapOvr>
+</p:notes>
+</file>
+
+<file path=ppt/notesSlides/notesSlide18.xml><?xml version="1.0" encoding="utf-8"?>
+<p:notes xmlns:a="http://schemas.openxmlformats.org/drawingml/2006/main" xmlns:r="http://schemas.openxmlformats.org/officeDocument/2006/relationships" xmlns:p="http://schemas.openxmlformats.org/presentationml/2006/main">
+  <p:cSld>
+    <p:spTree>
+      <p:nvGrpSpPr>
+        <p:cNvPr id="1" name=""/>
+        <p:cNvGrpSpPr/>
+        <p:nvPr/>
+      </p:nvGrpSpPr>
+      <p:grpSpPr>
+        <a:xfrm>
+          <a:off x="0" y="0"/>
+          <a:ext cx="0" cy="0"/>
+          <a:chOff x="0" y="0"/>
+          <a:chExt cx="0" cy="0"/>
+        </a:xfrm>
+      </p:grpSpPr>
+      <p:sp>
+        <p:nvSpPr>
+          <p:cNvPr id="2" name="Slide Image Placeholder 1"/>
+          <p:cNvSpPr>
+            <a:spLocks noGrp="1" noRot="1" noChangeAspect="1"/>
+          </p:cNvSpPr>
+          <p:nvPr>
+            <p:ph type="sldImg"/>
+          </p:nvPr>
+        </p:nvSpPr>
+        <p:spPr/>
+      </p:sp>
+      <p:sp>
+        <p:nvSpPr>
+          <p:cNvPr id="3" name="Notes Placeholder 2"/>
+          <p:cNvSpPr>
+            <a:spLocks noGrp="1"/>
+          </p:cNvSpPr>
+          <p:nvPr>
+            <p:ph type="body" idx="1"/>
+          </p:nvPr>
+        </p:nvSpPr>
+        <p:spPr/>
+        <p:txBody>
+          <a:bodyPr/>
+          <a:lstStyle/>
+          <a:p>
+            <a:r>
+              <a:rPr lang="en-US" dirty="0"/>
+              <a:t>Cliffhanger: "Next week — where your code runs. We'll hunt cloud/container misconfigs, the #1 real-world breach cause."</a:t>
+            </a:r>
+            <a:endParaRPr lang="en-US" dirty="0"/>
+          </a:p>
+        </p:txBody>
+      </p:sp>
+      <p:sp>
+        <p:nvSpPr>
+          <p:cNvPr id="4" name="Slide Number Placeholder 3"/>
+          <p:cNvSpPr>
+            <a:spLocks noGrp="1"/>
+          </p:cNvSpPr>
+          <p:nvPr>
+            <p:ph type="sldNum" sz="quarter" idx="10"/>
+          </p:nvPr>
+        </p:nvSpPr>
+        <p:spPr/>
+        <p:txBody>
+          <a:bodyPr/>
+          <a:lstStyle/>
+          <a:p>
+            <a:fld id="{F7021451-1387-4CA6-816F-3879F97B5CBC}" type="slidenum">
+              <a:rPr lang="en-US"/>
+              <a:t>18</a:t>
             </a:fld>
             <a:endParaRPr lang="en-US"/>
           </a:p>
@@ -1661,7 +1839,7 @@
           <a:p>
             <a:r>
               <a:rPr lang="en-US" dirty="0"/>
-              <a:t>Hands-on tooling (ties to W2 SCA). This lab is pure Python — no npm project — so it's trivy fs + pip-audit, not npm audit/dependency-check. Run trivy live on the project — it lists CVEs + the fixed version. Q6 of the quiz asks for one real vulnerable dependency they found + remediation. ~4 min.</a:t>
+              <a:t>Let them find the uncomfortable case themselves: merged mode with the private version numerically HIGHER also happens to be "safe" — but say explicitly that this is not a defense, just luck, since the attacker picks their own version number and will publish something higher. The only real fix in this sim is switching to single-index mode. Ties directly to Task 2 and Task 4's defense #2. ~4 min.</a:t>
             </a:r>
             <a:endParaRPr lang="en-US" dirty="0"/>
           </a:p>
@@ -1749,7 +1927,7 @@
           <a:p>
             <a:r>
               <a:rPr lang="en-US" dirty="0"/>
-              <a:t>SBOM = the food-label analogy: you can't manage what you can't list. When the next Log4Shell drops, an SBOM answers "are we affected?" in seconds. SLSA Build Track = levels L0–L3 of build provenance / tamper-resistance (L3 is the top; the old "1–4" numbering was v0.1 and is deprecated). ~5 min.</a:t>
+              <a:t>Hands-on tooling (ties to W2 SCA). This lab is pure Python — no npm project — so it's trivy fs + pip-audit, not npm audit/dependency-check. Run trivy live on the project — it lists CVEs + the fixed version. Q6 of the quiz asks for one real vulnerable dependency they found + remediation. ~4 min.</a:t>
             </a:r>
             <a:endParaRPr lang="en-US" dirty="0"/>
           </a:p>
@@ -1837,7 +2015,7 @@
           <a:p>
             <a:r>
               <a:rPr lang="en-US" dirty="0"/>
-              <a:t>Demo the sign→verify loop. sign.sh runs both tools dockerized — match that here, not a bare local binary. Keyless (Sigstore) = identity-based signing via OIDC through Fulcio, logged in Rekor, no key to leak — name both by name, worksheet Q4 grades on the vocabulary. The deploy gate: refuse any image that doesn't verify → a tampered artifact can't ship. This is the lab's defend step. ~4 min.</a:t>
+              <a:t>SBOM = the food-label analogy: you can't manage what you can't list. When the next Log4Shell drops, an SBOM answers "are we affected?" in seconds. SLSA Build Track = levels L0–L3 of build provenance / tamper-resistance (L3 is the top; the old "1–4" numbering was v0.1 and is deprecated). ~5 min.</a:t>
             </a:r>
             <a:endParaRPr lang="en-US" dirty="0"/>
           </a:p>
@@ -2470,7 +2648,7 @@
                 <a:ea typeface="Arial" pitchFamily="34" charset="-122"/>
                 <a:cs typeface="Arial" pitchFamily="34" charset="-120"/>
               </a:rPr>
-              <a:t>Signing with Cosign (keyless) (cont.)</a:t>
+              <a:t>Signing with Cosign (keyless)</a:t>
             </a:r>
             <a:endParaRPr lang="en-US" sz="2600" dirty="0"/>
           </a:p>
@@ -2485,24 +2663,22 @@
         <p:spPr>
           <a:xfrm>
             <a:off x="457200" y="1325880"/>
-            <a:ext cx="8229600" cy="2523744"/>
+            <a:ext cx="8229600" cy="2907792"/>
           </a:xfrm>
           <a:prstGeom prst="roundRect">
             <a:avLst>
-              <a:gd name="adj" fmla="val 2899"/>
+              <a:gd name="adj" fmla="val 1887"/>
             </a:avLst>
           </a:prstGeom>
           <a:solidFill>
-            <a:srgbClr val="F1F5F9"/>
+            <a:srgbClr val="0A1020"/>
           </a:solidFill>
-          <a:ln/>
-          <a:effectLst>
-            <a:outerShdw sx="100000" sy="100000" kx="0" ky="0" algn="bl" rotWithShape="0" blurRad="76200" dist="25400" dir="5400000">
-              <a:srgbClr val="000000">
-                <a:alpha val="12000"/>
-              </a:srgbClr>
-            </a:outerShdw>
-          </a:effectLst>
+          <a:ln w="12700">
+            <a:solidFill>
+              <a:srgbClr val="E8EDF3"/>
+            </a:solidFill>
+            <a:prstDash val="solid"/>
+          </a:ln>
         </p:spPr>
       </p:sp>
       <p:sp>
@@ -2513,8 +2689,8 @@
         </p:nvSpPr>
         <p:spPr>
           <a:xfrm>
-            <a:off x="731520" y="1435608"/>
-            <a:ext cx="7680960" cy="2304288"/>
+            <a:off x="640080" y="1399032"/>
+            <a:ext cx="7863840" cy="2761488"/>
           </a:xfrm>
           <a:prstGeom prst="rect">
             <a:avLst/>
@@ -2528,88 +2704,208 @@
           </a:bodyPr>
           <a:lstStyle/>
           <a:p>
-            <a:pPr marL="342900" indent="-342900">
-              <a:spcAft>
-                <a:spcPts val="600"/>
-              </a:spcAft>
-              <a:buSzPct val="100000"/>
-              <a:buChar char="•"/>
-            </a:pPr>
-            <a:r>
-              <a:rPr lang="en-US" sz="1400" dirty="0">
-                <a:solidFill>
-                  <a:srgbClr val="1F2937"/>
-                </a:solidFill>
-                <a:latin typeface="Calibri" pitchFamily="34" charset="0"/>
-                <a:ea typeface="Calibri" pitchFamily="34" charset="-122"/>
-                <a:cs typeface="Calibri" pitchFamily="34" charset="-120"/>
-              </a:rPr>
-              <a:t>Unsigned/tampered image → verification fails</a:t>
-            </a:r>
-            <a:endParaRPr lang="en-US" sz="1400" dirty="0"/>
-          </a:p>
-          <a:p>
-            <a:pPr marL="342900" indent="-342900">
-              <a:spcAft>
-                <a:spcPts val="600"/>
-              </a:spcAft>
-              <a:buSzPct val="100000"/>
-              <a:buChar char="•"/>
-            </a:pPr>
-            <a:r>
-              <a:rPr lang="en-US" sz="1400" dirty="0">
-                <a:solidFill>
-                  <a:srgbClr val="1F2937"/>
-                </a:solidFill>
-                <a:latin typeface="Calibri" pitchFamily="34" charset="0"/>
-                <a:ea typeface="Calibri" pitchFamily="34" charset="-122"/>
-                <a:cs typeface="Calibri" pitchFamily="34" charset="-120"/>
-              </a:rPr>
-              <a:t>Every step needs the docker-socket mount (trivy has to reach the local image, not just a local dir) — the SBOM step is a common copy-paste failure if it's dropped</a:t>
-            </a:r>
-            <a:endParaRPr lang="en-US" sz="1400" dirty="0"/>
-          </a:p>
-          <a:p>
-            <a:pPr marL="342900" indent="-342900">
-              <a:spcAft>
-                <a:spcPts val="600"/>
-              </a:spcAft>
-              <a:buSzPct val="100000"/>
-              <a:buChar char="•"/>
-            </a:pPr>
-            <a:r>
-              <a:rPr lang="en-US" sz="1400" dirty="0">
-                <a:solidFill>
-                  <a:srgbClr val="1F2937"/>
-                </a:solidFill>
-                <a:latin typeface="Calibri" pitchFamily="34" charset="0"/>
-                <a:ea typeface="Calibri" pitchFamily="34" charset="-122"/>
-                <a:cs typeface="Calibri" pitchFamily="34" charset="-120"/>
-              </a:rPr>
-              <a:t>cosign verify needs the two --certificate-*-regexp flags in keyless mode — without them it errors, it doesn't just "fail closed"</a:t>
-            </a:r>
-            <a:endParaRPr lang="en-US" sz="1400" dirty="0"/>
-          </a:p>
-          <a:p>
-            <a:pPr marL="342900" indent="-342900">
-              <a:spcAft>
-                <a:spcPts val="600"/>
-              </a:spcAft>
-              <a:buSzPct val="100000"/>
-              <a:buChar char="•"/>
-            </a:pPr>
-            <a:r>
-              <a:rPr lang="en-US" sz="1400" dirty="0">
-                <a:solidFill>
-                  <a:srgbClr val="1F2937"/>
-                </a:solidFill>
-                <a:latin typeface="Calibri" pitchFamily="34" charset="0"/>
-                <a:ea typeface="Calibri" pitchFamily="34" charset="-122"/>
-                <a:cs typeface="Calibri" pitchFamily="34" charset="-120"/>
-              </a:rPr>
-              <a:t>Keyless signing is backed by Fulcio (short-lived cert authority) + Rekor (public transparency log) — no long-lived private key sitting on disk to leak (CWE-321)</a:t>
-            </a:r>
-            <a:endParaRPr lang="en-US" sz="1400" dirty="0"/>
+            <a:pPr indent="0" marL="0">
+              <a:buNone/>
+            </a:pPr>
+            <a:r>
+              <a:rPr lang="en-US" sz="1150" dirty="0">
+                <a:solidFill>
+                  <a:srgbClr val="9FE7D6"/>
+                </a:solidFill>
+                <a:latin typeface="Courier New" pitchFamily="34" charset="0"/>
+                <a:ea typeface="Courier New" pitchFamily="34" charset="-122"/>
+                <a:cs typeface="Courier New" pitchFamily="34" charset="-120"/>
+              </a:rPr>
+              <a:t>IMG=week12-supplychain:lab</a:t>
+            </a:r>
+            <a:endParaRPr lang="en-US" sz="1150" dirty="0"/>
+          </a:p>
+          <a:p>
+            <a:pPr indent="0" marL="0">
+              <a:buNone/>
+            </a:pPr>
+            <a:r>
+              <a:rPr lang="en-US" sz="1150" dirty="0">
+                <a:solidFill>
+                  <a:srgbClr val="9FE7D6"/>
+                </a:solidFill>
+                <a:latin typeface="Courier New" pitchFamily="34" charset="0"/>
+                <a:ea typeface="Courier New" pitchFamily="34" charset="-122"/>
+                <a:cs typeface="Courier New" pitchFamily="34" charset="-120"/>
+              </a:rPr>
+              <a:t>docker run --rm -v "$PWD:/src" -v /var/run/docker.sock:/var/run/docker.sock \</a:t>
+            </a:r>
+            <a:endParaRPr lang="en-US" sz="1150" dirty="0"/>
+          </a:p>
+          <a:p>
+            <a:pPr indent="0" marL="0">
+              <a:buNone/>
+            </a:pPr>
+            <a:r>
+              <a:rPr lang="en-US" sz="1150" dirty="0">
+                <a:solidFill>
+                  <a:srgbClr val="9FE7D6"/>
+                </a:solidFill>
+                <a:latin typeface="Courier New" pitchFamily="34" charset="0"/>
+                <a:ea typeface="Courier New" pitchFamily="34" charset="-122"/>
+                <a:cs typeface="Courier New" pitchFamily="34" charset="-120"/>
+              </a:rPr>
+              <a:t>  aquasec/trivy:latest image --format cyclonedx \</a:t>
+            </a:r>
+            <a:endParaRPr lang="en-US" sz="1150" dirty="0"/>
+          </a:p>
+          <a:p>
+            <a:pPr indent="0" marL="0">
+              <a:buNone/>
+            </a:pPr>
+            <a:r>
+              <a:rPr lang="en-US" sz="1150" dirty="0">
+                <a:solidFill>
+                  <a:srgbClr val="9FE7D6"/>
+                </a:solidFill>
+                <a:latin typeface="Courier New" pitchFamily="34" charset="0"/>
+                <a:ea typeface="Courier New" pitchFamily="34" charset="-122"/>
+                <a:cs typeface="Courier New" pitchFamily="34" charset="-120"/>
+              </a:rPr>
+              <a:t>  --output /src/sbom.cdx.json "$IMG"                          # SBOM</a:t>
+            </a:r>
+            <a:endParaRPr lang="en-US" sz="1150" dirty="0"/>
+          </a:p>
+          <a:p>
+            <a:pPr indent="0" marL="0">
+              <a:buNone/>
+            </a:pPr>
+            <a:r>
+              <a:rPr lang="en-US" sz="1150" dirty="0">
+                <a:solidFill>
+                  <a:srgbClr val="9FE7D6"/>
+                </a:solidFill>
+                <a:latin typeface="Courier New" pitchFamily="34" charset="0"/>
+                <a:ea typeface="Courier New" pitchFamily="34" charset="-122"/>
+                <a:cs typeface="Courier New" pitchFamily="34" charset="-120"/>
+              </a:rPr>
+              <a:t>docker run --rm -e COSIGN_EXPERIMENTAL=1 \</a:t>
+            </a:r>
+            <a:endParaRPr lang="en-US" sz="1150" dirty="0"/>
+          </a:p>
+          <a:p>
+            <a:pPr indent="0" marL="0">
+              <a:buNone/>
+            </a:pPr>
+            <a:r>
+              <a:rPr lang="en-US" sz="1150" dirty="0">
+                <a:solidFill>
+                  <a:srgbClr val="9FE7D6"/>
+                </a:solidFill>
+                <a:latin typeface="Courier New" pitchFamily="34" charset="0"/>
+                <a:ea typeface="Courier New" pitchFamily="34" charset="-122"/>
+                <a:cs typeface="Courier New" pitchFamily="34" charset="-120"/>
+              </a:rPr>
+              <a:t>  -v /var/run/docker.sock:/var/run/docker.sock \</a:t>
+            </a:r>
+            <a:endParaRPr lang="en-US" sz="1150" dirty="0"/>
+          </a:p>
+          <a:p>
+            <a:pPr indent="0" marL="0">
+              <a:buNone/>
+            </a:pPr>
+            <a:r>
+              <a:rPr lang="en-US" sz="1150" dirty="0">
+                <a:solidFill>
+                  <a:srgbClr val="9FE7D6"/>
+                </a:solidFill>
+                <a:latin typeface="Courier New" pitchFamily="34" charset="0"/>
+                <a:ea typeface="Courier New" pitchFamily="34" charset="-122"/>
+                <a:cs typeface="Courier New" pitchFamily="34" charset="-120"/>
+              </a:rPr>
+              <a:t>  gcr.io/projectsigstore/cosign:latest sign --yes "$IMG"       # sign (OIDC)</a:t>
+            </a:r>
+            <a:endParaRPr lang="en-US" sz="1150" dirty="0"/>
+          </a:p>
+          <a:p>
+            <a:pPr indent="0" marL="0">
+              <a:buNone/>
+            </a:pPr>
+            <a:r>
+              <a:rPr lang="en-US" sz="1150" dirty="0">
+                <a:solidFill>
+                  <a:srgbClr val="9FE7D6"/>
+                </a:solidFill>
+                <a:latin typeface="Courier New" pitchFamily="34" charset="0"/>
+                <a:ea typeface="Courier New" pitchFamily="34" charset="-122"/>
+                <a:cs typeface="Courier New" pitchFamily="34" charset="-120"/>
+              </a:rPr>
+              <a:t>docker run --rm -e COSIGN_EXPERIMENTAL=1 \</a:t>
+            </a:r>
+            <a:endParaRPr lang="en-US" sz="1150" dirty="0"/>
+          </a:p>
+          <a:p>
+            <a:pPr indent="0" marL="0">
+              <a:buNone/>
+            </a:pPr>
+            <a:r>
+              <a:rPr lang="en-US" sz="1150" dirty="0">
+                <a:solidFill>
+                  <a:srgbClr val="9FE7D6"/>
+                </a:solidFill>
+                <a:latin typeface="Courier New" pitchFamily="34" charset="0"/>
+                <a:ea typeface="Courier New" pitchFamily="34" charset="-122"/>
+                <a:cs typeface="Courier New" pitchFamily="34" charset="-120"/>
+              </a:rPr>
+              <a:t>  -v /var/run/docker.sock:/var/run/docker.sock \</a:t>
+            </a:r>
+            <a:endParaRPr lang="en-US" sz="1150" dirty="0"/>
+          </a:p>
+          <a:p>
+            <a:pPr indent="0" marL="0">
+              <a:buNone/>
+            </a:pPr>
+            <a:r>
+              <a:rPr lang="en-US" sz="1150" dirty="0">
+                <a:solidFill>
+                  <a:srgbClr val="9FE7D6"/>
+                </a:solidFill>
+                <a:latin typeface="Courier New" pitchFamily="34" charset="0"/>
+                <a:ea typeface="Courier New" pitchFamily="34" charset="-122"/>
+                <a:cs typeface="Courier New" pitchFamily="34" charset="-120"/>
+              </a:rPr>
+              <a:t>  gcr.io/projectsigstore/cosign:latest verify \</a:t>
+            </a:r>
+            <a:endParaRPr lang="en-US" sz="1150" dirty="0"/>
+          </a:p>
+          <a:p>
+            <a:pPr indent="0" marL="0">
+              <a:buNone/>
+            </a:pPr>
+            <a:r>
+              <a:rPr lang="en-US" sz="1150" dirty="0">
+                <a:solidFill>
+                  <a:srgbClr val="9FE7D6"/>
+                </a:solidFill>
+                <a:latin typeface="Courier New" pitchFamily="34" charset="0"/>
+                <a:ea typeface="Courier New" pitchFamily="34" charset="-122"/>
+                <a:cs typeface="Courier New" pitchFamily="34" charset="-120"/>
+              </a:rPr>
+              <a:t>  --certificate-identity-regexp ".*" \</a:t>
+            </a:r>
+            <a:endParaRPr lang="en-US" sz="1150" dirty="0"/>
+          </a:p>
+          <a:p>
+            <a:pPr indent="0" marL="0">
+              <a:buNone/>
+            </a:pPr>
+            <a:r>
+              <a:rPr lang="en-US" sz="1150" dirty="0">
+                <a:solidFill>
+                  <a:srgbClr val="9FE7D6"/>
+                </a:solidFill>
+                <a:latin typeface="Courier New" pitchFamily="34" charset="0"/>
+                <a:ea typeface="Courier New" pitchFamily="34" charset="-122"/>
+                <a:cs typeface="Courier New" pitchFamily="34" charset="-120"/>
+              </a:rPr>
+              <a:t>  --certificate-oidc-issuer-regexp ".*" "$IMG"                 # verify</a:t>
+            </a:r>
+            <a:endParaRPr lang="en-US" sz="1150" dirty="0"/>
           </a:p>
         </p:txBody>
       </p:sp>
@@ -2792,7 +3088,7 @@
                 <a:ea typeface="Arial" pitchFamily="34" charset="-122"/>
                 <a:cs typeface="Arial" pitchFamily="34" charset="-120"/>
               </a:rPr>
-              <a:t>Tooling — GitHub Advanced Security (GHAS)</a:t>
+              <a:t>Signing with Cosign (keyless) (cont.)</a:t>
             </a:r>
             <a:endParaRPr lang="en-US" sz="2600" dirty="0"/>
           </a:p>
@@ -2807,11 +3103,11 @@
         <p:spPr>
           <a:xfrm>
             <a:off x="457200" y="1325880"/>
-            <a:ext cx="8229600" cy="1719072"/>
+            <a:ext cx="8229600" cy="2523744"/>
           </a:xfrm>
           <a:prstGeom prst="roundRect">
             <a:avLst>
-              <a:gd name="adj" fmla="val 4255"/>
+              <a:gd name="adj" fmla="val 2899"/>
             </a:avLst>
           </a:prstGeom>
           <a:solidFill>
@@ -2836,7 +3132,7 @@
         <p:spPr>
           <a:xfrm>
             <a:off x="731520" y="1435608"/>
-            <a:ext cx="7680960" cy="1499616"/>
+            <a:ext cx="7680960" cy="2304288"/>
           </a:xfrm>
           <a:prstGeom prst="rect">
             <a:avLst/>
@@ -2866,7 +3162,7 @@
                 <a:ea typeface="Calibri" pitchFamily="34" charset="-122"/>
                 <a:cs typeface="Calibri" pitchFamily="34" charset="-120"/>
               </a:rPr>
-              <a:t>Secret scanning + push protection — block secrets at push time (before they reach the remote)</a:t>
+              <a:t>Unsigned/tampered image → verification fails</a:t>
             </a:r>
             <a:endParaRPr lang="en-US" sz="1400" dirty="0"/>
           </a:p>
@@ -2887,7 +3183,7 @@
                 <a:ea typeface="Calibri" pitchFamily="34" charset="-122"/>
                 <a:cs typeface="Calibri" pitchFamily="34" charset="-120"/>
               </a:rPr>
-              <a:t>CodeQL code scanning — semantic SAST queries</a:t>
+              <a:t>Every step needs the docker-socket mount (trivy has to reach the local image, not just a local dir) — the SBOM step is a common copy-paste failure if it's dropped</a:t>
             </a:r>
             <a:endParaRPr lang="en-US" sz="1400" dirty="0"/>
           </a:p>
@@ -2908,7 +3204,7 @@
                 <a:ea typeface="Calibri" pitchFamily="34" charset="-122"/>
                 <a:cs typeface="Calibri" pitchFamily="34" charset="-120"/>
               </a:rPr>
-              <a:t>Dependabot — alerts + auto-PRs for vulnerable deps</a:t>
+              <a:t>cosign verify needs the two --certificate-*-regexp flags in keyless mode — without them it errors, it doesn't just "fail closed"</a:t>
             </a:r>
             <a:endParaRPr lang="en-US" sz="1400" dirty="0"/>
           </a:p>
@@ -2929,7 +3225,7 @@
                 <a:ea typeface="Calibri" pitchFamily="34" charset="-122"/>
                 <a:cs typeface="Calibri" pitchFamily="34" charset="-120"/>
               </a:rPr>
-              <a:t>Native in the repo → results in the Security tab</a:t>
+              <a:t>Keyless signing is backed by Fulcio (short-lived cert authority) + Rekor (public transparency log) — no long-lived private key sitting on disk to leak (CWE-321)</a:t>
             </a:r>
             <a:endParaRPr lang="en-US" sz="1400" dirty="0"/>
           </a:p>
@@ -3114,7 +3410,7 @@
                 <a:ea typeface="Arial" pitchFamily="34" charset="-122"/>
                 <a:cs typeface="Arial" pitchFamily="34" charset="-120"/>
               </a:rPr>
-              <a:t>Defenses</a:t>
+              <a:t>Tooling — GitHub Advanced Security (GHAS)</a:t>
             </a:r>
             <a:endParaRPr lang="en-US" sz="2600" dirty="0"/>
           </a:p>
@@ -3129,11 +3425,11 @@
         <p:spPr>
           <a:xfrm>
             <a:off x="457200" y="1325880"/>
-            <a:ext cx="8229600" cy="2743200"/>
+            <a:ext cx="8229600" cy="1719072"/>
           </a:xfrm>
           <a:prstGeom prst="roundRect">
             <a:avLst>
-              <a:gd name="adj" fmla="val 2667"/>
+              <a:gd name="adj" fmla="val 4255"/>
             </a:avLst>
           </a:prstGeom>
           <a:solidFill>
@@ -3158,7 +3454,7 @@
         <p:spPr>
           <a:xfrm>
             <a:off x="731520" y="1435608"/>
-            <a:ext cx="7680960" cy="2523744"/>
+            <a:ext cx="7680960" cy="1499616"/>
           </a:xfrm>
           <a:prstGeom prst="rect">
             <a:avLst/>
@@ -3188,7 +3484,7 @@
                 <a:ea typeface="Calibri" pitchFamily="34" charset="-122"/>
                 <a:cs typeface="Calibri" pitchFamily="34" charset="-120"/>
               </a:rPr>
-              <a:t>pip install --require-hashes — a substituted package's hash won't match; install refuses</a:t>
+              <a:t>Secret scanning + push protection — block secrets at push time (before they reach the remote)</a:t>
             </a:r>
             <a:endParaRPr lang="en-US" sz="1400" dirty="0"/>
           </a:p>
@@ -3209,7 +3505,7 @@
                 <a:ea typeface="Calibri" pitchFamily="34" charset="-122"/>
                 <a:cs typeface="Calibri" pitchFamily="34" charset="-120"/>
               </a:rPr>
-              <a:t>Single --index-url, not --extra-index-url — one trusted index; the resolver won't "shop around" and pick a higher-versioned public package over your internal one</a:t>
+              <a:t>CodeQL code scanning — semantic SAST queries</a:t>
             </a:r>
             <a:endParaRPr lang="en-US" sz="1400" dirty="0"/>
           </a:p>
@@ -3230,7 +3526,7 @@
                 <a:ea typeface="Calibri" pitchFamily="34" charset="-122"/>
                 <a:cs typeface="Calibri" pitchFamily="34" charset="-120"/>
               </a:rPr>
-              <a:t>Verify signatures before deploy (admission policy)</a:t>
+              <a:t>Dependabot — alerts + auto-PRs for vulnerable deps</a:t>
             </a:r>
             <a:endParaRPr lang="en-US" sz="1400" dirty="0"/>
           </a:p>
@@ -3251,49 +3547,7 @@
                 <a:ea typeface="Calibri" pitchFamily="34" charset="-122"/>
                 <a:cs typeface="Calibri" pitchFamily="34" charset="-120"/>
               </a:rPr>
-              <a:t>Generate + store SBOMs per release</a:t>
-            </a:r>
-            <a:endParaRPr lang="en-US" sz="1400" dirty="0"/>
-          </a:p>
-          <a:p>
-            <a:pPr marL="342900" indent="-342900">
-              <a:spcAft>
-                <a:spcPts val="600"/>
-              </a:spcAft>
-              <a:buSzPct val="100000"/>
-              <a:buChar char="•"/>
-            </a:pPr>
-            <a:r>
-              <a:rPr lang="en-US" sz="1400" dirty="0">
-                <a:solidFill>
-                  <a:srgbClr val="1F2937"/>
-                </a:solidFill>
-                <a:latin typeface="Calibri" pitchFamily="34" charset="0"/>
-                <a:ea typeface="Calibri" pitchFamily="34" charset="-122"/>
-                <a:cs typeface="Calibri" pitchFamily="34" charset="-120"/>
-              </a:rPr>
-              <a:t>2FA/MFA on dev/CI/cloud accounts; least privilege</a:t>
-            </a:r>
-            <a:endParaRPr lang="en-US" sz="1400" dirty="0"/>
-          </a:p>
-          <a:p>
-            <a:pPr marL="342900" indent="-342900">
-              <a:spcAft>
-                <a:spcPts val="600"/>
-              </a:spcAft>
-              <a:buSzPct val="100000"/>
-              <a:buChar char="•"/>
-            </a:pPr>
-            <a:r>
-              <a:rPr lang="en-US" sz="1400" dirty="0">
-                <a:solidFill>
-                  <a:srgbClr val="1F2937"/>
-                </a:solidFill>
-                <a:latin typeface="Calibri" pitchFamily="34" charset="0"/>
-                <a:ea typeface="Calibri" pitchFamily="34" charset="-122"/>
-                <a:cs typeface="Calibri" pitchFamily="34" charset="-120"/>
-              </a:rPr>
-              <a:t>Automate SCA in CI (next week)</a:t>
+              <a:t>Native in the repo → results in the Security tab</a:t>
             </a:r>
             <a:endParaRPr lang="en-US" sz="1400" dirty="0"/>
           </a:p>
@@ -3478,7 +3732,7 @@
                 <a:ea typeface="Arial" pitchFamily="34" charset="-122"/>
                 <a:cs typeface="Arial" pitchFamily="34" charset="-120"/>
               </a:rPr>
-              <a:t>📦 Game — Dependency Confusion Heist</a:t>
+              <a:t>Defenses</a:t>
             </a:r>
             <a:endParaRPr lang="en-US" sz="2600" dirty="0"/>
           </a:p>
@@ -3492,16 +3746,25 @@
         </p:nvSpPr>
         <p:spPr>
           <a:xfrm>
-            <a:off x="502920" y="1325880"/>
-            <a:ext cx="384048" cy="384048"/>
-          </a:xfrm>
-          <a:prstGeom prst="ellipse">
-            <a:avLst/>
+            <a:off x="457200" y="1325880"/>
+            <a:ext cx="8229600" cy="2743200"/>
+          </a:xfrm>
+          <a:prstGeom prst="roundRect">
+            <a:avLst>
+              <a:gd name="adj" fmla="val 2667"/>
+            </a:avLst>
           </a:prstGeom>
           <a:solidFill>
-            <a:srgbClr val="E35205"/>
+            <a:srgbClr val="F1F5F9"/>
           </a:solidFill>
           <a:ln/>
+          <a:effectLst>
+            <a:outerShdw sx="100000" sy="100000" kx="0" ky="0" algn="bl" rotWithShape="0" blurRad="76200" dist="25400" dir="5400000">
+              <a:srgbClr val="000000">
+                <a:alpha val="12000"/>
+              </a:srgbClr>
+            </a:outerShdw>
+          </a:effectLst>
         </p:spPr>
       </p:sp>
       <p:sp>
@@ -3512,8 +3775,8 @@
         </p:nvSpPr>
         <p:spPr>
           <a:xfrm>
-            <a:off x="502920" y="1325880"/>
-            <a:ext cx="384048" cy="384048"/>
+            <a:off x="731520" y="1435608"/>
+            <a:ext cx="7680960" cy="2523744"/>
           </a:xfrm>
           <a:prstGeom prst="rect">
             <a:avLst/>
@@ -3522,55 +3785,20 @@
           <a:ln/>
         </p:spPr>
         <p:txBody>
-          <a:bodyPr wrap="square" lIns="0" tIns="0" rIns="0" bIns="0" rtlCol="0" anchor="ctr"/>
-          <a:lstStyle/>
-          <a:p>
-            <a:pPr algn="ctr" indent="0" marL="0">
-              <a:buNone/>
-            </a:pPr>
-            <a:r>
-              <a:rPr lang="en-US" sz="1500" b="1" dirty="0">
-                <a:solidFill>
-                  <a:srgbClr val="0E1726"/>
-                </a:solidFill>
-                <a:latin typeface="Arial" pitchFamily="34" charset="0"/>
-                <a:ea typeface="Arial" pitchFamily="34" charset="-122"/>
-                <a:cs typeface="Arial" pitchFamily="34" charset="-120"/>
-              </a:rPr>
-              <a:t>1</a:t>
-            </a:r>
-            <a:endParaRPr lang="en-US" sz="1500" dirty="0"/>
-          </a:p>
-        </p:txBody>
-      </p:sp>
-      <p:sp>
-        <p:nvSpPr>
-          <p:cNvPr id="7" name="Text 4"/>
-          <p:cNvSpPr/>
-          <p:nvPr/>
-        </p:nvSpPr>
-        <p:spPr>
-          <a:xfrm>
-            <a:off x="1051560" y="1325880"/>
-            <a:ext cx="7589520" cy="658368"/>
-          </a:xfrm>
-          <a:prstGeom prst="rect">
-            <a:avLst/>
-          </a:prstGeom>
-          <a:noFill/>
-          <a:ln/>
-        </p:spPr>
-        <p:txBody>
-          <a:bodyPr wrap="square" lIns="0" tIns="0" rIns="0" bIns="0" rtlCol="0" anchor="ctr">
+          <a:bodyPr wrap="square" lIns="0" tIns="0" rIns="0" bIns="0" rtlCol="0" anchor="t">
             <a:normAutofit/>
           </a:bodyPr>
           <a:lstStyle/>
           <a:p>
-            <a:pPr indent="0" marL="0">
-              <a:buNone/>
-            </a:pPr>
-            <a:r>
-              <a:rPr lang="en-US" sz="1350" dirty="0">
+            <a:pPr marL="342900" indent="-342900">
+              <a:spcAft>
+                <a:spcPts val="600"/>
+              </a:spcAft>
+              <a:buSzPct val="100000"/>
+              <a:buChar char="•"/>
+            </a:pPr>
+            <a:r>
+              <a:rPr lang="en-US" sz="1400" dirty="0">
                 <a:solidFill>
                   <a:srgbClr val="1F2937"/>
                 </a:solidFill>
@@ -3578,99 +3806,20 @@
                 <a:ea typeface="Calibri" pitchFamily="34" charset="-122"/>
                 <a:cs typeface="Calibri" pitchFamily="34" charset="-120"/>
               </a:rPr>
-              <a:t>Attack: in a controlled registry, plant/identify a typosquat or higher-version public pkg that gets pulled in</a:t>
-            </a:r>
-            <a:endParaRPr lang="en-US" sz="1350" dirty="0"/>
-          </a:p>
-        </p:txBody>
-      </p:sp>
-      <p:sp>
-        <p:nvSpPr>
-          <p:cNvPr id="8" name="Shape 5"/>
-          <p:cNvSpPr/>
-          <p:nvPr/>
-        </p:nvSpPr>
-        <p:spPr>
-          <a:xfrm>
-            <a:off x="502920" y="2057400"/>
-            <a:ext cx="384048" cy="384048"/>
-          </a:xfrm>
-          <a:prstGeom prst="ellipse">
-            <a:avLst/>
-          </a:prstGeom>
-          <a:solidFill>
-            <a:srgbClr val="E35205"/>
-          </a:solidFill>
-          <a:ln/>
-        </p:spPr>
-      </p:sp>
-      <p:sp>
-        <p:nvSpPr>
-          <p:cNvPr id="9" name="Text 6"/>
-          <p:cNvSpPr/>
-          <p:nvPr/>
-        </p:nvSpPr>
-        <p:spPr>
-          <a:xfrm>
-            <a:off x="502920" y="2057400"/>
-            <a:ext cx="384048" cy="384048"/>
-          </a:xfrm>
-          <a:prstGeom prst="rect">
-            <a:avLst/>
-          </a:prstGeom>
-          <a:noFill/>
-          <a:ln/>
-        </p:spPr>
-        <p:txBody>
-          <a:bodyPr wrap="square" lIns="0" tIns="0" rIns="0" bIns="0" rtlCol="0" anchor="ctr"/>
-          <a:lstStyle/>
-          <a:p>
-            <a:pPr algn="ctr" indent="0" marL="0">
-              <a:buNone/>
-            </a:pPr>
-            <a:r>
-              <a:rPr lang="en-US" sz="1500" b="1" dirty="0">
-                <a:solidFill>
-                  <a:srgbClr val="0E1726"/>
-                </a:solidFill>
-                <a:latin typeface="Arial" pitchFamily="34" charset="0"/>
-                <a:ea typeface="Arial" pitchFamily="34" charset="-122"/>
-                <a:cs typeface="Arial" pitchFamily="34" charset="-120"/>
-              </a:rPr>
-              <a:t>2</a:t>
-            </a:r>
-            <a:endParaRPr lang="en-US" sz="1500" dirty="0"/>
-          </a:p>
-        </p:txBody>
-      </p:sp>
-      <p:sp>
-        <p:nvSpPr>
-          <p:cNvPr id="10" name="Text 7"/>
-          <p:cNvSpPr/>
-          <p:nvPr/>
-        </p:nvSpPr>
-        <p:spPr>
-          <a:xfrm>
-            <a:off x="1051560" y="2057400"/>
-            <a:ext cx="7589520" cy="402336"/>
-          </a:xfrm>
-          <a:prstGeom prst="rect">
-            <a:avLst/>
-          </a:prstGeom>
-          <a:noFill/>
-          <a:ln/>
-        </p:spPr>
-        <p:txBody>
-          <a:bodyPr wrap="square" lIns="0" tIns="0" rIns="0" bIns="0" rtlCol="0" anchor="ctr">
-            <a:normAutofit/>
-          </a:bodyPr>
-          <a:lstStyle/>
-          <a:p>
-            <a:pPr indent="0" marL="0">
-              <a:buNone/>
-            </a:pPr>
-            <a:r>
-              <a:rPr lang="en-US" sz="1350" dirty="0">
+              <a:t>pip install --require-hashes — a substituted package's hash won't match; install refuses</a:t>
+            </a:r>
+            <a:endParaRPr lang="en-US" sz="1400" dirty="0"/>
+          </a:p>
+          <a:p>
+            <a:pPr marL="342900" indent="-342900">
+              <a:spcAft>
+                <a:spcPts val="600"/>
+              </a:spcAft>
+              <a:buSzPct val="100000"/>
+              <a:buChar char="•"/>
+            </a:pPr>
+            <a:r>
+              <a:rPr lang="en-US" sz="1400" dirty="0">
                 <a:solidFill>
                   <a:srgbClr val="1F2937"/>
                 </a:solidFill>
@@ -3678,45 +3827,129 @@
                 <a:ea typeface="Calibri" pitchFamily="34" charset="-122"/>
                 <a:cs typeface="Calibri" pitchFamily="34" charset="-120"/>
               </a:rPr>
-              <a:t>Defend: pin + scope; generate SBOM; sign &amp; verify with Cosign; add a provenance gate</a:t>
-            </a:r>
-            <a:endParaRPr lang="en-US" sz="1350" dirty="0"/>
-          </a:p>
-        </p:txBody>
-      </p:sp>
-      <p:sp>
-        <p:nvSpPr>
-          <p:cNvPr id="11" name="Text 8"/>
-          <p:cNvSpPr/>
-          <p:nvPr/>
-        </p:nvSpPr>
-        <p:spPr>
-          <a:xfrm>
-            <a:off x="457200" y="4800600"/>
-            <a:ext cx="6949440" cy="274320"/>
-          </a:xfrm>
-          <a:prstGeom prst="rect">
-            <a:avLst/>
-          </a:prstGeom>
-          <a:noFill/>
-          <a:ln/>
-        </p:spPr>
-        <p:txBody>
-          <a:bodyPr wrap="square" lIns="0" tIns="0" rIns="0" bIns="0" rtlCol="0" anchor="ctr"/>
-          <a:lstStyle/>
-          <a:p>
-            <a:pPr indent="0" marL="0">
-              <a:buNone/>
-            </a:pPr>
-            <a:r>
-              <a:rPr lang="en-US" sz="900" dirty="0">
-                <a:solidFill>
-                  <a:srgbClr val="64748B"/>
+              <a:t>Single --index-url, not --extra-index-url — one trusted index; the resolver won't "shop around" and pick a higher-versioned public package over your internal one</a:t>
+            </a:r>
+            <a:endParaRPr lang="en-US" sz="1400" dirty="0"/>
+          </a:p>
+          <a:p>
+            <a:pPr marL="342900" indent="-342900">
+              <a:spcAft>
+                <a:spcPts val="600"/>
+              </a:spcAft>
+              <a:buSzPct val="100000"/>
+              <a:buChar char="•"/>
+            </a:pPr>
+            <a:r>
+              <a:rPr lang="en-US" sz="1400" dirty="0">
+                <a:solidFill>
+                  <a:srgbClr val="1F2937"/>
                 </a:solidFill>
                 <a:latin typeface="Calibri" pitchFamily="34" charset="0"/>
                 <a:ea typeface="Calibri" pitchFamily="34" charset="-122"/>
                 <a:cs typeface="Calibri" pitchFamily="34" charset="-120"/>
               </a:rPr>
+              <a:t>Verify signatures before deploy (admission policy)</a:t>
+            </a:r>
+            <a:endParaRPr lang="en-US" sz="1400" dirty="0"/>
+          </a:p>
+          <a:p>
+            <a:pPr marL="342900" indent="-342900">
+              <a:spcAft>
+                <a:spcPts val="600"/>
+              </a:spcAft>
+              <a:buSzPct val="100000"/>
+              <a:buChar char="•"/>
+            </a:pPr>
+            <a:r>
+              <a:rPr lang="en-US" sz="1400" dirty="0">
+                <a:solidFill>
+                  <a:srgbClr val="1F2937"/>
+                </a:solidFill>
+                <a:latin typeface="Calibri" pitchFamily="34" charset="0"/>
+                <a:ea typeface="Calibri" pitchFamily="34" charset="-122"/>
+                <a:cs typeface="Calibri" pitchFamily="34" charset="-120"/>
+              </a:rPr>
+              <a:t>Generate + store SBOMs per release</a:t>
+            </a:r>
+            <a:endParaRPr lang="en-US" sz="1400" dirty="0"/>
+          </a:p>
+          <a:p>
+            <a:pPr marL="342900" indent="-342900">
+              <a:spcAft>
+                <a:spcPts val="600"/>
+              </a:spcAft>
+              <a:buSzPct val="100000"/>
+              <a:buChar char="•"/>
+            </a:pPr>
+            <a:r>
+              <a:rPr lang="en-US" sz="1400" dirty="0">
+                <a:solidFill>
+                  <a:srgbClr val="1F2937"/>
+                </a:solidFill>
+                <a:latin typeface="Calibri" pitchFamily="34" charset="0"/>
+                <a:ea typeface="Calibri" pitchFamily="34" charset="-122"/>
+                <a:cs typeface="Calibri" pitchFamily="34" charset="-120"/>
+              </a:rPr>
+              <a:t>2FA/MFA on dev/CI/cloud accounts; least privilege</a:t>
+            </a:r>
+            <a:endParaRPr lang="en-US" sz="1400" dirty="0"/>
+          </a:p>
+          <a:p>
+            <a:pPr marL="342900" indent="-342900">
+              <a:spcAft>
+                <a:spcPts val="600"/>
+              </a:spcAft>
+              <a:buSzPct val="100000"/>
+              <a:buChar char="•"/>
+            </a:pPr>
+            <a:r>
+              <a:rPr lang="en-US" sz="1400" dirty="0">
+                <a:solidFill>
+                  <a:srgbClr val="1F2937"/>
+                </a:solidFill>
+                <a:latin typeface="Calibri" pitchFamily="34" charset="0"/>
+                <a:ea typeface="Calibri" pitchFamily="34" charset="-122"/>
+                <a:cs typeface="Calibri" pitchFamily="34" charset="-120"/>
+              </a:rPr>
+              <a:t>Automate SCA in CI (next week)</a:t>
+            </a:r>
+            <a:endParaRPr lang="en-US" sz="1400" dirty="0"/>
+          </a:p>
+        </p:txBody>
+      </p:sp>
+      <p:sp>
+        <p:nvSpPr>
+          <p:cNvPr id="7" name="Text 4"/>
+          <p:cNvSpPr/>
+          <p:nvPr/>
+        </p:nvSpPr>
+        <p:spPr>
+          <a:xfrm>
+            <a:off x="457200" y="4800600"/>
+            <a:ext cx="6949440" cy="274320"/>
+          </a:xfrm>
+          <a:prstGeom prst="rect">
+            <a:avLst/>
+          </a:prstGeom>
+          <a:noFill/>
+          <a:ln/>
+        </p:spPr>
+        <p:txBody>
+          <a:bodyPr wrap="square" lIns="0" tIns="0" rIns="0" bIns="0" rtlCol="0" anchor="ctr"/>
+          <a:lstStyle/>
+          <a:p>
+            <a:pPr indent="0" marL="0">
+              <a:buNone/>
+            </a:pPr>
+            <a:r>
+              <a:rPr lang="en-US" sz="900" dirty="0">
+                <a:solidFill>
+                  <a:srgbClr val="64748B"/>
+                </a:solidFill>
+                <a:latin typeface="Calibri" pitchFamily="34" charset="0"/>
+                <a:ea typeface="Calibri" pitchFamily="34" charset="-122"/>
+                <a:cs typeface="Calibri" pitchFamily="34" charset="-120"/>
+              </a:rPr>
               <a:t>Software Security · Week 12</a:t>
             </a:r>
             <a:endParaRPr lang="en-US" sz="900" dirty="0"/>
@@ -3725,7 +3958,7 @@
       </p:sp>
       <p:pic>
         <p:nvPicPr>
-          <p:cNvPr id="12" name="Image 1" descr="/Users/pop7/Library/CloudStorage/OneDrive-MonsterConnectCo.,Ltd/Lecture/KOSEN69 - software-security/slides/pptx/assets/logo-small.png">    </p:cNvPr>
+          <p:cNvPr id="8" name="Image 1" descr="/Users/pop7/Library/CloudStorage/OneDrive-MonsterConnectCo.,Ltd/Lecture/KOSEN69 - software-security/slides/pptx/assets/logo-small.png">    </p:cNvPr>
           <p:cNvPicPr>
             <a:picLocks noChangeAspect="1"/>
           </p:cNvPicPr>
@@ -3863,7 +4096,7 @@
                 <a:ea typeface="Arial" pitchFamily="34" charset="-122"/>
                 <a:cs typeface="Arial" pitchFamily="34" charset="-120"/>
               </a:rPr>
-              <a:t>Deliverable</a:t>
+              <a:t>The whole journey, one dependency</a:t>
             </a:r>
             <a:endParaRPr lang="en-US" sz="2600" dirty="0"/>
           </a:p>
@@ -3871,36 +4104,14 @@
       </p:sp>
       <p:sp>
         <p:nvSpPr>
-          <p:cNvPr id="5" name="Shape 2"/>
-          <p:cNvSpPr/>
-          <p:nvPr/>
-        </p:nvSpPr>
-        <p:spPr>
-          <a:xfrm>
-            <a:off x="457200" y="1325880"/>
-            <a:ext cx="8229600" cy="822960"/>
-          </a:xfrm>
-          <a:prstGeom prst="roundRect">
-            <a:avLst>
-              <a:gd name="adj" fmla="val 8889"/>
-            </a:avLst>
-          </a:prstGeom>
-          <a:solidFill>
-            <a:srgbClr val="E8EDF3"/>
-          </a:solidFill>
-          <a:ln/>
-        </p:spPr>
-      </p:sp>
-      <p:sp>
-        <p:nvSpPr>
-          <p:cNvPr id="6" name="Text 3"/>
-          <p:cNvSpPr/>
-          <p:nvPr/>
-        </p:nvSpPr>
-        <p:spPr>
-          <a:xfrm>
-            <a:off x="731520" y="1325880"/>
-            <a:ext cx="7680960" cy="822960"/>
+          <p:cNvPr id="5" name="Text 2"/>
+          <p:cNvSpPr/>
+          <p:nvPr/>
+        </p:nvSpPr>
+        <p:spPr>
+          <a:xfrm>
+            <a:off x="548640" y="1325880"/>
+            <a:ext cx="8046720" cy="2194560"/>
           </a:xfrm>
           <a:prstGeom prst="rect">
             <a:avLst/>
@@ -3909,7 +4120,7 @@
           <a:ln/>
         </p:spPr>
         <p:txBody>
-          <a:bodyPr wrap="square" lIns="0" tIns="0" rIns="0" bIns="0" rtlCol="0" anchor="ctr">
+          <a:bodyPr wrap="square" lIns="0" tIns="0" rIns="0" bIns="0" rtlCol="0" anchor="t">
             <a:normAutofit/>
           </a:bodyPr>
           <a:lstStyle/>
@@ -3918,15 +4129,15 @@
               <a:buNone/>
             </a:pPr>
             <a:r>
-              <a:rPr lang="en-US" sz="1400" i="1" dirty="0">
-                <a:solidFill>
-                  <a:srgbClr val="E35205"/>
+              <a:rPr lang="en-US" sz="1400" dirty="0">
+                <a:solidFill>
+                  <a:srgbClr val="1F2937"/>
                 </a:solidFill>
                 <a:latin typeface="Calibri" pitchFamily="34" charset="0"/>
                 <a:ea typeface="Calibri" pitchFamily="34" charset="-122"/>
                 <a:cs typeface="Calibri" pitchFamily="34" charset="-120"/>
               </a:rPr>
-              <a:t>📋 Worksheet 12 — labs/week12-supply-chain/worksheet.md (Parts 1–4) · kickoff: bash sca_scan.sh (trivy fs + pip-audit)</a:t>
+              <a:t>See diagram: Six hops a dependency crosses from a public registry into production, each with its own attack and the control that answers it: registry (typosquatting → one trusted index), resolver (dependency confusion → scope the namespace), fetch (compromised maintainer → lockfile with hashes), build (stale pins → SCA in CI), image (no inventory → SBOM), deploy (unsigned image → Sigstore keyless gate). "We scanned our code" covers none of this — SAST reads the code you wrote, all six hops are code you didn't. (web only)</a:t>
             </a:r>
             <a:endParaRPr lang="en-US" sz="1400" dirty="0"/>
           </a:p>
@@ -3934,43 +4145,14 @@
       </p:sp>
       <p:sp>
         <p:nvSpPr>
-          <p:cNvPr id="7" name="Shape 4"/>
-          <p:cNvSpPr/>
-          <p:nvPr/>
-        </p:nvSpPr>
-        <p:spPr>
-          <a:xfrm>
-            <a:off x="457200" y="2313432"/>
-            <a:ext cx="8229600" cy="1517904"/>
-          </a:xfrm>
-          <a:prstGeom prst="roundRect">
-            <a:avLst>
-              <a:gd name="adj" fmla="val 4819"/>
-            </a:avLst>
-          </a:prstGeom>
-          <a:solidFill>
-            <a:srgbClr val="F1F5F9"/>
-          </a:solidFill>
-          <a:ln/>
-          <a:effectLst>
-            <a:outerShdw sx="100000" sy="100000" kx="0" ky="0" algn="bl" rotWithShape="0" blurRad="76200" dist="25400" dir="5400000">
-              <a:srgbClr val="000000">
-                <a:alpha val="12000"/>
-              </a:srgbClr>
-            </a:outerShdw>
-          </a:effectLst>
-        </p:spPr>
-      </p:sp>
-      <p:sp>
-        <p:nvSpPr>
-          <p:cNvPr id="8" name="Text 5"/>
-          <p:cNvSpPr/>
-          <p:nvPr/>
-        </p:nvSpPr>
-        <p:spPr>
-          <a:xfrm>
-            <a:off x="731520" y="2423160"/>
-            <a:ext cx="7680960" cy="1298448"/>
+          <p:cNvPr id="6" name="Text 3"/>
+          <p:cNvSpPr/>
+          <p:nvPr/>
+        </p:nvSpPr>
+        <p:spPr>
+          <a:xfrm>
+            <a:off x="457200" y="4800600"/>
+            <a:ext cx="6949440" cy="274320"/>
           </a:xfrm>
           <a:prstGeom prst="rect">
             <a:avLst/>
@@ -3979,129 +4161,21 @@
           <a:ln/>
         </p:spPr>
         <p:txBody>
-          <a:bodyPr wrap="square" lIns="0" tIns="0" rIns="0" bIns="0" rtlCol="0" anchor="t">
-            <a:normAutofit/>
-          </a:bodyPr>
-          <a:lstStyle/>
-          <a:p>
-            <a:pPr marL="342900" indent="-342900">
-              <a:spcAft>
-                <a:spcPts val="600"/>
-              </a:spcAft>
-              <a:buSzPct val="100000"/>
-              <a:buChar char="•"/>
-            </a:pPr>
-            <a:r>
-              <a:rPr lang="en-US" sz="1400" dirty="0">
-                <a:solidFill>
-                  <a:srgbClr val="1F2937"/>
+          <a:bodyPr wrap="square" lIns="0" tIns="0" rIns="0" bIns="0" rtlCol="0" anchor="ctr"/>
+          <a:lstStyle/>
+          <a:p>
+            <a:pPr indent="0" marL="0">
+              <a:buNone/>
+            </a:pPr>
+            <a:r>
+              <a:rPr lang="en-US" sz="900" dirty="0">
+                <a:solidFill>
+                  <a:srgbClr val="64748B"/>
                 </a:solidFill>
                 <a:latin typeface="Calibri" pitchFamily="34" charset="0"/>
                 <a:ea typeface="Calibri" pitchFamily="34" charset="-122"/>
                 <a:cs typeface="Calibri" pitchFamily="34" charset="-120"/>
               </a:rPr>
-              <a:t>SCA report + remediation plan (Part 3)</a:t>
-            </a:r>
-            <a:endParaRPr lang="en-US" sz="1400" dirty="0"/>
-          </a:p>
-          <a:p>
-            <a:pPr marL="342900" indent="-342900">
-              <a:spcAft>
-                <a:spcPts val="600"/>
-              </a:spcAft>
-              <a:buSzPct val="100000"/>
-              <a:buChar char="•"/>
-            </a:pPr>
-            <a:r>
-              <a:rPr lang="en-US" sz="1400" dirty="0">
-                <a:solidFill>
-                  <a:srgbClr val="1F2937"/>
-                </a:solidFill>
-                <a:latin typeface="Calibri" pitchFamily="34" charset="0"/>
-                <a:ea typeface="Calibri" pitchFamily="34" charset="-122"/>
-                <a:cs typeface="Calibri" pitchFamily="34" charset="-120"/>
-              </a:rPr>
-              <a:t>SBOM file + sign/verify transcript (Part 3)</a:t>
-            </a:r>
-            <a:endParaRPr lang="en-US" sz="1400" dirty="0"/>
-          </a:p>
-          <a:p>
-            <a:pPr marL="342900" indent="-342900">
-              <a:spcAft>
-                <a:spcPts val="600"/>
-              </a:spcAft>
-              <a:buSzPct val="100000"/>
-              <a:buChar char="•"/>
-            </a:pPr>
-            <a:r>
-              <a:rPr lang="en-US" sz="1400" dirty="0">
-                <a:solidFill>
-                  <a:srgbClr val="1F2937"/>
-                </a:solidFill>
-                <a:latin typeface="Calibri" pitchFamily="34" charset="0"/>
-                <a:ea typeface="Calibri" pitchFamily="34" charset="-122"/>
-                <a:cs typeface="Calibri" pitchFamily="34" charset="-120"/>
-              </a:rPr>
-              <a:t>One-paragraph SLSA self-assessment + XZ Utils case analysis (Part 4)</a:t>
-            </a:r>
-            <a:endParaRPr lang="en-US" sz="1400" dirty="0"/>
-          </a:p>
-          <a:p>
-            <a:pPr marL="342900" indent="-342900">
-              <a:spcAft>
-                <a:spcPts val="600"/>
-              </a:spcAft>
-              <a:buSzPct val="100000"/>
-              <a:buChar char="•"/>
-            </a:pPr>
-            <a:r>
-              <a:rPr lang="en-US" sz="1400" dirty="0">
-                <a:solidFill>
-                  <a:srgbClr val="1F2937"/>
-                </a:solidFill>
-                <a:latin typeface="Calibri" pitchFamily="34" charset="0"/>
-                <a:ea typeface="Calibri" pitchFamily="34" charset="-122"/>
-                <a:cs typeface="Calibri" pitchFamily="34" charset="-120"/>
-              </a:rPr>
-              <a:t>+ Audit the AI / EiPE / Prompt Problem (required, after Part 4 — see worksheet)</a:t>
-            </a:r>
-            <a:endParaRPr lang="en-US" sz="1400" dirty="0"/>
-          </a:p>
-        </p:txBody>
-      </p:sp>
-      <p:sp>
-        <p:nvSpPr>
-          <p:cNvPr id="9" name="Text 6"/>
-          <p:cNvSpPr/>
-          <p:nvPr/>
-        </p:nvSpPr>
-        <p:spPr>
-          <a:xfrm>
-            <a:off x="457200" y="4800600"/>
-            <a:ext cx="6949440" cy="274320"/>
-          </a:xfrm>
-          <a:prstGeom prst="rect">
-            <a:avLst/>
-          </a:prstGeom>
-          <a:noFill/>
-          <a:ln/>
-        </p:spPr>
-        <p:txBody>
-          <a:bodyPr wrap="square" lIns="0" tIns="0" rIns="0" bIns="0" rtlCol="0" anchor="ctr"/>
-          <a:lstStyle/>
-          <a:p>
-            <a:pPr indent="0" marL="0">
-              <a:buNone/>
-            </a:pPr>
-            <a:r>
-              <a:rPr lang="en-US" sz="900" dirty="0">
-                <a:solidFill>
-                  <a:srgbClr val="64748B"/>
-                </a:solidFill>
-                <a:latin typeface="Calibri" pitchFamily="34" charset="0"/>
-                <a:ea typeface="Calibri" pitchFamily="34" charset="-122"/>
-                <a:cs typeface="Calibri" pitchFamily="34" charset="-120"/>
-              </a:rPr>
               <a:t>Software Security · Week 12</a:t>
             </a:r>
             <a:endParaRPr lang="en-US" sz="900" dirty="0"/>
@@ -4110,7 +4184,7 @@
       </p:sp>
       <p:pic>
         <p:nvPicPr>
-          <p:cNvPr id="10" name="Image 1" descr="/Users/pop7/Library/CloudStorage/OneDrive-MonsterConnectCo.,Ltd/Lecture/KOSEN69 - software-security/slides/pptx/assets/logo-small.png">    </p:cNvPr>
+          <p:cNvPr id="7" name="Image 1" descr="/Users/pop7/Library/CloudStorage/OneDrive-MonsterConnectCo.,Ltd/Lecture/KOSEN69 - software-security/slides/pptx/assets/logo-small.png">    </p:cNvPr>
           <p:cNvPicPr>
             <a:picLocks noChangeAspect="1"/>
           </p:cNvPicPr>
@@ -4248,7 +4322,7 @@
                 <a:ea typeface="Arial" pitchFamily="34" charset="-122"/>
                 <a:cs typeface="Arial" pitchFamily="34" charset="-120"/>
               </a:rPr>
-              <a:t>Key takeaways</a:t>
+              <a:t>📦 Game — Dependency Confusion Heist</a:t>
             </a:r>
             <a:endParaRPr lang="en-US" sz="2600" dirty="0"/>
           </a:p>
@@ -4262,25 +4336,16 @@
         </p:nvSpPr>
         <p:spPr>
           <a:xfrm>
-            <a:off x="457200" y="1325880"/>
-            <a:ext cx="8229600" cy="1207008"/>
-          </a:xfrm>
-          <a:prstGeom prst="roundRect">
-            <a:avLst>
-              <a:gd name="adj" fmla="val 6061"/>
-            </a:avLst>
+            <a:off x="502920" y="1325880"/>
+            <a:ext cx="384048" cy="384048"/>
+          </a:xfrm>
+          <a:prstGeom prst="ellipse">
+            <a:avLst/>
           </a:prstGeom>
           <a:solidFill>
-            <a:srgbClr val="F1F5F9"/>
+            <a:srgbClr val="E35205"/>
           </a:solidFill>
           <a:ln/>
-          <a:effectLst>
-            <a:outerShdw sx="100000" sy="100000" kx="0" ky="0" algn="bl" rotWithShape="0" blurRad="76200" dist="25400" dir="5400000">
-              <a:srgbClr val="000000">
-                <a:alpha val="12000"/>
-              </a:srgbClr>
-            </a:outerShdw>
-          </a:effectLst>
         </p:spPr>
       </p:sp>
       <p:sp>
@@ -4291,8 +4356,8 @@
         </p:nvSpPr>
         <p:spPr>
           <a:xfrm>
-            <a:off x="731520" y="1435608"/>
-            <a:ext cx="7680960" cy="987552"/>
+            <a:off x="502920" y="1325880"/>
+            <a:ext cx="384048" cy="384048"/>
           </a:xfrm>
           <a:prstGeom prst="rect">
             <a:avLst/>
@@ -4301,20 +4366,55 @@
           <a:ln/>
         </p:spPr>
         <p:txBody>
-          <a:bodyPr wrap="square" lIns="0" tIns="0" rIns="0" bIns="0" rtlCol="0" anchor="t">
+          <a:bodyPr wrap="square" lIns="0" tIns="0" rIns="0" bIns="0" rtlCol="0" anchor="ctr"/>
+          <a:lstStyle/>
+          <a:p>
+            <a:pPr algn="ctr" indent="0" marL="0">
+              <a:buNone/>
+            </a:pPr>
+            <a:r>
+              <a:rPr lang="en-US" sz="1500" b="1" dirty="0">
+                <a:solidFill>
+                  <a:srgbClr val="0E1726"/>
+                </a:solidFill>
+                <a:latin typeface="Arial" pitchFamily="34" charset="0"/>
+                <a:ea typeface="Arial" pitchFamily="34" charset="-122"/>
+                <a:cs typeface="Arial" pitchFamily="34" charset="-120"/>
+              </a:rPr>
+              <a:t>1</a:t>
+            </a:r>
+            <a:endParaRPr lang="en-US" sz="1500" dirty="0"/>
+          </a:p>
+        </p:txBody>
+      </p:sp>
+      <p:sp>
+        <p:nvSpPr>
+          <p:cNvPr id="7" name="Text 4"/>
+          <p:cNvSpPr/>
+          <p:nvPr/>
+        </p:nvSpPr>
+        <p:spPr>
+          <a:xfrm>
+            <a:off x="1051560" y="1325880"/>
+            <a:ext cx="7589520" cy="658368"/>
+          </a:xfrm>
+          <a:prstGeom prst="rect">
+            <a:avLst/>
+          </a:prstGeom>
+          <a:noFill/>
+          <a:ln/>
+        </p:spPr>
+        <p:txBody>
+          <a:bodyPr wrap="square" lIns="0" tIns="0" rIns="0" bIns="0" rtlCol="0" anchor="ctr">
             <a:normAutofit/>
           </a:bodyPr>
           <a:lstStyle/>
           <a:p>
-            <a:pPr marL="342900" indent="-342900">
-              <a:spcAft>
-                <a:spcPts val="600"/>
-              </a:spcAft>
-              <a:buSzPct val="100000"/>
-              <a:buChar char="•"/>
-            </a:pPr>
-            <a:r>
-              <a:rPr lang="en-US" sz="1400" dirty="0">
+            <a:pPr indent="0" marL="0">
+              <a:buNone/>
+            </a:pPr>
+            <a:r>
+              <a:rPr lang="en-US" sz="1350" dirty="0">
                 <a:solidFill>
                   <a:srgbClr val="1F2937"/>
                 </a:solidFill>
@@ -4322,20 +4422,99 @@
                 <a:ea typeface="Calibri" pitchFamily="34" charset="-122"/>
                 <a:cs typeface="Calibri" pitchFamily="34" charset="-120"/>
               </a:rPr>
-              <a:t>Most of your attack surface is other people's code</a:t>
-            </a:r>
-            <a:endParaRPr lang="en-US" sz="1400" dirty="0"/>
-          </a:p>
-          <a:p>
-            <a:pPr marL="342900" indent="-342900">
-              <a:spcAft>
-                <a:spcPts val="600"/>
-              </a:spcAft>
-              <a:buSzPct val="100000"/>
-              <a:buChar char="•"/>
-            </a:pPr>
-            <a:r>
-              <a:rPr lang="en-US" sz="1400" dirty="0">
+              <a:t>Attack: in a controlled registry, plant/identify a typosquat or higher-version public pkg that gets pulled in</a:t>
+            </a:r>
+            <a:endParaRPr lang="en-US" sz="1350" dirty="0"/>
+          </a:p>
+        </p:txBody>
+      </p:sp>
+      <p:sp>
+        <p:nvSpPr>
+          <p:cNvPr id="8" name="Shape 5"/>
+          <p:cNvSpPr/>
+          <p:nvPr/>
+        </p:nvSpPr>
+        <p:spPr>
+          <a:xfrm>
+            <a:off x="502920" y="2057400"/>
+            <a:ext cx="384048" cy="384048"/>
+          </a:xfrm>
+          <a:prstGeom prst="ellipse">
+            <a:avLst/>
+          </a:prstGeom>
+          <a:solidFill>
+            <a:srgbClr val="E35205"/>
+          </a:solidFill>
+          <a:ln/>
+        </p:spPr>
+      </p:sp>
+      <p:sp>
+        <p:nvSpPr>
+          <p:cNvPr id="9" name="Text 6"/>
+          <p:cNvSpPr/>
+          <p:nvPr/>
+        </p:nvSpPr>
+        <p:spPr>
+          <a:xfrm>
+            <a:off x="502920" y="2057400"/>
+            <a:ext cx="384048" cy="384048"/>
+          </a:xfrm>
+          <a:prstGeom prst="rect">
+            <a:avLst/>
+          </a:prstGeom>
+          <a:noFill/>
+          <a:ln/>
+        </p:spPr>
+        <p:txBody>
+          <a:bodyPr wrap="square" lIns="0" tIns="0" rIns="0" bIns="0" rtlCol="0" anchor="ctr"/>
+          <a:lstStyle/>
+          <a:p>
+            <a:pPr algn="ctr" indent="0" marL="0">
+              <a:buNone/>
+            </a:pPr>
+            <a:r>
+              <a:rPr lang="en-US" sz="1500" b="1" dirty="0">
+                <a:solidFill>
+                  <a:srgbClr val="0E1726"/>
+                </a:solidFill>
+                <a:latin typeface="Arial" pitchFamily="34" charset="0"/>
+                <a:ea typeface="Arial" pitchFamily="34" charset="-122"/>
+                <a:cs typeface="Arial" pitchFamily="34" charset="-120"/>
+              </a:rPr>
+              <a:t>2</a:t>
+            </a:r>
+            <a:endParaRPr lang="en-US" sz="1500" dirty="0"/>
+          </a:p>
+        </p:txBody>
+      </p:sp>
+      <p:sp>
+        <p:nvSpPr>
+          <p:cNvPr id="10" name="Text 7"/>
+          <p:cNvSpPr/>
+          <p:nvPr/>
+        </p:nvSpPr>
+        <p:spPr>
+          <a:xfrm>
+            <a:off x="1051560" y="2057400"/>
+            <a:ext cx="7589520" cy="402336"/>
+          </a:xfrm>
+          <a:prstGeom prst="rect">
+            <a:avLst/>
+          </a:prstGeom>
+          <a:noFill/>
+          <a:ln/>
+        </p:spPr>
+        <p:txBody>
+          <a:bodyPr wrap="square" lIns="0" tIns="0" rIns="0" bIns="0" rtlCol="0" anchor="ctr">
+            <a:normAutofit/>
+          </a:bodyPr>
+          <a:lstStyle/>
+          <a:p>
+            <a:pPr indent="0" marL="0">
+              <a:buNone/>
+            </a:pPr>
+            <a:r>
+              <a:rPr lang="en-US" sz="1350" dirty="0">
                 <a:solidFill>
                   <a:srgbClr val="1F2937"/>
                 </a:solidFill>
@@ -4343,66 +4522,45 @@
                 <a:ea typeface="Calibri" pitchFamily="34" charset="-122"/>
                 <a:cs typeface="Calibri" pitchFamily="34" charset="-120"/>
               </a:rPr>
-              <a:t>Know your ingredients (SBOM), prove your build (SLSA), sign your artifacts</a:t>
-            </a:r>
-            <a:endParaRPr lang="en-US" sz="1400" dirty="0"/>
-          </a:p>
-          <a:p>
-            <a:pPr marL="342900" indent="-342900">
-              <a:spcAft>
-                <a:spcPts val="600"/>
-              </a:spcAft>
-              <a:buSzPct val="100000"/>
-              <a:buChar char="•"/>
-            </a:pPr>
-            <a:r>
-              <a:rPr lang="en-US" sz="1400" dirty="0">
-                <a:solidFill>
-                  <a:srgbClr val="1F2937"/>
+              <a:t>Defend: pin + scope; generate SBOM; sign &amp; verify with Cosign; add a provenance gate</a:t>
+            </a:r>
+            <a:endParaRPr lang="en-US" sz="1350" dirty="0"/>
+          </a:p>
+        </p:txBody>
+      </p:sp>
+      <p:sp>
+        <p:nvSpPr>
+          <p:cNvPr id="11" name="Text 8"/>
+          <p:cNvSpPr/>
+          <p:nvPr/>
+        </p:nvSpPr>
+        <p:spPr>
+          <a:xfrm>
+            <a:off x="457200" y="4800600"/>
+            <a:ext cx="6949440" cy="274320"/>
+          </a:xfrm>
+          <a:prstGeom prst="rect">
+            <a:avLst/>
+          </a:prstGeom>
+          <a:noFill/>
+          <a:ln/>
+        </p:spPr>
+        <p:txBody>
+          <a:bodyPr wrap="square" lIns="0" tIns="0" rIns="0" bIns="0" rtlCol="0" anchor="ctr"/>
+          <a:lstStyle/>
+          <a:p>
+            <a:pPr indent="0" marL="0">
+              <a:buNone/>
+            </a:pPr>
+            <a:r>
+              <a:rPr lang="en-US" sz="900" dirty="0">
+                <a:solidFill>
+                  <a:srgbClr val="64748B"/>
                 </a:solidFill>
                 <a:latin typeface="Calibri" pitchFamily="34" charset="0"/>
                 <a:ea typeface="Calibri" pitchFamily="34" charset="-122"/>
                 <a:cs typeface="Calibri" pitchFamily="34" charset="-120"/>
               </a:rPr>
-              <a:t>Verify before you trust</a:t>
-            </a:r>
-            <a:endParaRPr lang="en-US" sz="1400" dirty="0"/>
-          </a:p>
-        </p:txBody>
-      </p:sp>
-      <p:sp>
-        <p:nvSpPr>
-          <p:cNvPr id="7" name="Text 4"/>
-          <p:cNvSpPr/>
-          <p:nvPr/>
-        </p:nvSpPr>
-        <p:spPr>
-          <a:xfrm>
-            <a:off x="457200" y="4800600"/>
-            <a:ext cx="6949440" cy="274320"/>
-          </a:xfrm>
-          <a:prstGeom prst="rect">
-            <a:avLst/>
-          </a:prstGeom>
-          <a:noFill/>
-          <a:ln/>
-        </p:spPr>
-        <p:txBody>
-          <a:bodyPr wrap="square" lIns="0" tIns="0" rIns="0" bIns="0" rtlCol="0" anchor="ctr"/>
-          <a:lstStyle/>
-          <a:p>
-            <a:pPr indent="0" marL="0">
-              <a:buNone/>
-            </a:pPr>
-            <a:r>
-              <a:rPr lang="en-US" sz="900" dirty="0">
-                <a:solidFill>
-                  <a:srgbClr val="64748B"/>
-                </a:solidFill>
-                <a:latin typeface="Calibri" pitchFamily="34" charset="0"/>
-                <a:ea typeface="Calibri" pitchFamily="34" charset="-122"/>
-                <a:cs typeface="Calibri" pitchFamily="34" charset="-120"/>
-              </a:rPr>
               <a:t>Software Security · Week 12</a:t>
             </a:r>
             <a:endParaRPr lang="en-US" sz="900" dirty="0"/>
@@ -4411,7 +4569,7 @@
       </p:sp>
       <p:pic>
         <p:nvPicPr>
-          <p:cNvPr id="8" name="Image 1" descr="/Users/pop7/Library/CloudStorage/OneDrive-MonsterConnectCo.,Ltd/Lecture/KOSEN69 - software-security/slides/pptx/assets/logo-small.png">    </p:cNvPr>
+          <p:cNvPr id="12" name="Image 1" descr="/Users/pop7/Library/CloudStorage/OneDrive-MonsterConnectCo.,Ltd/Lecture/KOSEN69 - software-security/slides/pptx/assets/logo-small.png">    </p:cNvPr>
           <p:cNvPicPr>
             <a:picLocks noChangeAspect="1"/>
           </p:cNvPicPr>
@@ -4444,6 +4602,692 @@
 <file path=ppt/slides/slide16.xml><?xml version="1.0" encoding="utf-8"?>
 <p:sld xmlns:a="http://schemas.openxmlformats.org/drawingml/2006/main" xmlns:r="http://schemas.openxmlformats.org/officeDocument/2006/relationships" xmlns:p="http://schemas.openxmlformats.org/presentationml/2006/main">
   <p:cSld name="Slide 16">
+    <p:bg>
+      <p:bgPr>
+        <a:solidFill>
+          <a:srgbClr val="FFFFFF"/>
+        </a:solidFill>
+      </p:bgPr>
+    </p:bg>
+    <p:spTree>
+      <p:nvGrpSpPr>
+        <p:cNvPr id="1" name=""/>
+        <p:cNvGrpSpPr/>
+        <p:nvPr/>
+      </p:nvGrpSpPr>
+      <p:grpSpPr>
+        <a:xfrm>
+          <a:off x="0" y="0"/>
+          <a:ext cx="0" cy="0"/>
+          <a:chOff x="0" y="0"/>
+          <a:chExt cx="0" cy="0"/>
+        </a:xfrm>
+      </p:grpSpPr>
+      <p:sp>
+        <p:nvSpPr>
+          <p:cNvPr id="2" name="Shape 0"/>
+          <p:cNvSpPr/>
+          <p:nvPr/>
+        </p:nvSpPr>
+        <p:spPr>
+          <a:xfrm>
+            <a:off x="457200" y="384048"/>
+            <a:ext cx="530352" cy="530352"/>
+          </a:xfrm>
+          <a:prstGeom prst="ellipse">
+            <a:avLst/>
+          </a:prstGeom>
+          <a:solidFill>
+            <a:srgbClr val="E35205"/>
+          </a:solidFill>
+          <a:ln/>
+          <a:effectLst>
+            <a:outerShdw sx="100000" sy="100000" kx="0" ky="0" algn="bl" rotWithShape="0" blurRad="76200" dist="25400" dir="5400000">
+              <a:srgbClr val="000000">
+                <a:alpha val="12000"/>
+              </a:srgbClr>
+            </a:outerShdw>
+          </a:effectLst>
+        </p:spPr>
+      </p:sp>
+      <p:pic>
+        <p:nvPicPr>
+          <p:cNvPr id="3" name="Image 0" descr="preencoded.png">    </p:cNvPr>
+          <p:cNvPicPr>
+            <a:picLocks noChangeAspect="1"/>
+          </p:cNvPicPr>
+          <p:nvPr/>
+        </p:nvPicPr>
+        <p:blipFill>
+          <a:blip r:embed="rId1"/>
+          <a:stretch>
+            <a:fillRect/>
+          </a:stretch>
+        </p:blipFill>
+        <p:spPr>
+          <a:xfrm>
+            <a:off x="594360" y="521208"/>
+            <a:ext cx="256032" cy="256032"/>
+          </a:xfrm>
+          <a:prstGeom prst="rect">
+            <a:avLst/>
+          </a:prstGeom>
+        </p:spPr>
+      </p:pic>
+      <p:sp>
+        <p:nvSpPr>
+          <p:cNvPr id="4" name="Text 1"/>
+          <p:cNvSpPr/>
+          <p:nvPr/>
+        </p:nvSpPr>
+        <p:spPr>
+          <a:xfrm>
+            <a:off x="1143000" y="329184"/>
+            <a:ext cx="7498080" cy="603504"/>
+          </a:xfrm>
+          <a:prstGeom prst="rect">
+            <a:avLst/>
+          </a:prstGeom>
+          <a:noFill/>
+          <a:ln/>
+        </p:spPr>
+        <p:txBody>
+          <a:bodyPr wrap="square" lIns="0" tIns="0" rIns="0" bIns="0" rtlCol="0" anchor="ctr"/>
+          <a:lstStyle/>
+          <a:p>
+            <a:pPr indent="0" marL="0">
+              <a:buNone/>
+            </a:pPr>
+            <a:r>
+              <a:rPr lang="en-US" sz="2600" b="1" dirty="0">
+                <a:solidFill>
+                  <a:srgbClr val="1F2937"/>
+                </a:solidFill>
+                <a:latin typeface="Arial" pitchFamily="34" charset="0"/>
+                <a:ea typeface="Arial" pitchFamily="34" charset="-122"/>
+                <a:cs typeface="Arial" pitchFamily="34" charset="-120"/>
+              </a:rPr>
+              <a:t>Deliverable</a:t>
+            </a:r>
+            <a:endParaRPr lang="en-US" sz="2600" dirty="0"/>
+          </a:p>
+        </p:txBody>
+      </p:sp>
+      <p:sp>
+        <p:nvSpPr>
+          <p:cNvPr id="5" name="Shape 2"/>
+          <p:cNvSpPr/>
+          <p:nvPr/>
+        </p:nvSpPr>
+        <p:spPr>
+          <a:xfrm>
+            <a:off x="457200" y="1325880"/>
+            <a:ext cx="8229600" cy="822960"/>
+          </a:xfrm>
+          <a:prstGeom prst="roundRect">
+            <a:avLst>
+              <a:gd name="adj" fmla="val 8889"/>
+            </a:avLst>
+          </a:prstGeom>
+          <a:solidFill>
+            <a:srgbClr val="E8EDF3"/>
+          </a:solidFill>
+          <a:ln/>
+        </p:spPr>
+      </p:sp>
+      <p:sp>
+        <p:nvSpPr>
+          <p:cNvPr id="6" name="Text 3"/>
+          <p:cNvSpPr/>
+          <p:nvPr/>
+        </p:nvSpPr>
+        <p:spPr>
+          <a:xfrm>
+            <a:off x="731520" y="1325880"/>
+            <a:ext cx="7680960" cy="822960"/>
+          </a:xfrm>
+          <a:prstGeom prst="rect">
+            <a:avLst/>
+          </a:prstGeom>
+          <a:noFill/>
+          <a:ln/>
+        </p:spPr>
+        <p:txBody>
+          <a:bodyPr wrap="square" lIns="0" tIns="0" rIns="0" bIns="0" rtlCol="0" anchor="ctr">
+            <a:normAutofit/>
+          </a:bodyPr>
+          <a:lstStyle/>
+          <a:p>
+            <a:pPr indent="0" marL="0">
+              <a:buNone/>
+            </a:pPr>
+            <a:r>
+              <a:rPr lang="en-US" sz="1400" i="1" dirty="0">
+                <a:solidFill>
+                  <a:srgbClr val="E35205"/>
+                </a:solidFill>
+                <a:latin typeface="Calibri" pitchFamily="34" charset="0"/>
+                <a:ea typeface="Calibri" pitchFamily="34" charset="-122"/>
+                <a:cs typeface="Calibri" pitchFamily="34" charset="-120"/>
+              </a:rPr>
+              <a:t>📋 Worksheet 12 — labs/week12-supply-chain/worksheet.md (Parts 1–4) · kickoff: bash sca_scan.sh (trivy fs + pip-audit)</a:t>
+            </a:r>
+            <a:endParaRPr lang="en-US" sz="1400" dirty="0"/>
+          </a:p>
+        </p:txBody>
+      </p:sp>
+      <p:sp>
+        <p:nvSpPr>
+          <p:cNvPr id="7" name="Shape 4"/>
+          <p:cNvSpPr/>
+          <p:nvPr/>
+        </p:nvSpPr>
+        <p:spPr>
+          <a:xfrm>
+            <a:off x="457200" y="2313432"/>
+            <a:ext cx="8229600" cy="1517904"/>
+          </a:xfrm>
+          <a:prstGeom prst="roundRect">
+            <a:avLst>
+              <a:gd name="adj" fmla="val 4819"/>
+            </a:avLst>
+          </a:prstGeom>
+          <a:solidFill>
+            <a:srgbClr val="F1F5F9"/>
+          </a:solidFill>
+          <a:ln/>
+          <a:effectLst>
+            <a:outerShdw sx="100000" sy="100000" kx="0" ky="0" algn="bl" rotWithShape="0" blurRad="76200" dist="25400" dir="5400000">
+              <a:srgbClr val="000000">
+                <a:alpha val="12000"/>
+              </a:srgbClr>
+            </a:outerShdw>
+          </a:effectLst>
+        </p:spPr>
+      </p:sp>
+      <p:sp>
+        <p:nvSpPr>
+          <p:cNvPr id="8" name="Text 5"/>
+          <p:cNvSpPr/>
+          <p:nvPr/>
+        </p:nvSpPr>
+        <p:spPr>
+          <a:xfrm>
+            <a:off x="731520" y="2423160"/>
+            <a:ext cx="7680960" cy="1298448"/>
+          </a:xfrm>
+          <a:prstGeom prst="rect">
+            <a:avLst/>
+          </a:prstGeom>
+          <a:noFill/>
+          <a:ln/>
+        </p:spPr>
+        <p:txBody>
+          <a:bodyPr wrap="square" lIns="0" tIns="0" rIns="0" bIns="0" rtlCol="0" anchor="t">
+            <a:normAutofit/>
+          </a:bodyPr>
+          <a:lstStyle/>
+          <a:p>
+            <a:pPr marL="342900" indent="-342900">
+              <a:spcAft>
+                <a:spcPts val="600"/>
+              </a:spcAft>
+              <a:buSzPct val="100000"/>
+              <a:buChar char="•"/>
+            </a:pPr>
+            <a:r>
+              <a:rPr lang="en-US" sz="1400" dirty="0">
+                <a:solidFill>
+                  <a:srgbClr val="1F2937"/>
+                </a:solidFill>
+                <a:latin typeface="Calibri" pitchFamily="34" charset="0"/>
+                <a:ea typeface="Calibri" pitchFamily="34" charset="-122"/>
+                <a:cs typeface="Calibri" pitchFamily="34" charset="-120"/>
+              </a:rPr>
+              <a:t>SCA report + remediation plan (Part 3)</a:t>
+            </a:r>
+            <a:endParaRPr lang="en-US" sz="1400" dirty="0"/>
+          </a:p>
+          <a:p>
+            <a:pPr marL="342900" indent="-342900">
+              <a:spcAft>
+                <a:spcPts val="600"/>
+              </a:spcAft>
+              <a:buSzPct val="100000"/>
+              <a:buChar char="•"/>
+            </a:pPr>
+            <a:r>
+              <a:rPr lang="en-US" sz="1400" dirty="0">
+                <a:solidFill>
+                  <a:srgbClr val="1F2937"/>
+                </a:solidFill>
+                <a:latin typeface="Calibri" pitchFamily="34" charset="0"/>
+                <a:ea typeface="Calibri" pitchFamily="34" charset="-122"/>
+                <a:cs typeface="Calibri" pitchFamily="34" charset="-120"/>
+              </a:rPr>
+              <a:t>SBOM file + sign/verify transcript (Part 3)</a:t>
+            </a:r>
+            <a:endParaRPr lang="en-US" sz="1400" dirty="0"/>
+          </a:p>
+          <a:p>
+            <a:pPr marL="342900" indent="-342900">
+              <a:spcAft>
+                <a:spcPts val="600"/>
+              </a:spcAft>
+              <a:buSzPct val="100000"/>
+              <a:buChar char="•"/>
+            </a:pPr>
+            <a:r>
+              <a:rPr lang="en-US" sz="1400" dirty="0">
+                <a:solidFill>
+                  <a:srgbClr val="1F2937"/>
+                </a:solidFill>
+                <a:latin typeface="Calibri" pitchFamily="34" charset="0"/>
+                <a:ea typeface="Calibri" pitchFamily="34" charset="-122"/>
+                <a:cs typeface="Calibri" pitchFamily="34" charset="-120"/>
+              </a:rPr>
+              <a:t>One-paragraph SLSA self-assessment + XZ Utils case analysis (Part 4)</a:t>
+            </a:r>
+            <a:endParaRPr lang="en-US" sz="1400" dirty="0"/>
+          </a:p>
+          <a:p>
+            <a:pPr marL="342900" indent="-342900">
+              <a:spcAft>
+                <a:spcPts val="600"/>
+              </a:spcAft>
+              <a:buSzPct val="100000"/>
+              <a:buChar char="•"/>
+            </a:pPr>
+            <a:r>
+              <a:rPr lang="en-US" sz="1400" dirty="0">
+                <a:solidFill>
+                  <a:srgbClr val="1F2937"/>
+                </a:solidFill>
+                <a:latin typeface="Calibri" pitchFamily="34" charset="0"/>
+                <a:ea typeface="Calibri" pitchFamily="34" charset="-122"/>
+                <a:cs typeface="Calibri" pitchFamily="34" charset="-120"/>
+              </a:rPr>
+              <a:t>+ Audit the AI / EiPE / Prompt Problem (required, after Part 4 — see worksheet)</a:t>
+            </a:r>
+            <a:endParaRPr lang="en-US" sz="1400" dirty="0"/>
+          </a:p>
+        </p:txBody>
+      </p:sp>
+      <p:sp>
+        <p:nvSpPr>
+          <p:cNvPr id="9" name="Text 6"/>
+          <p:cNvSpPr/>
+          <p:nvPr/>
+        </p:nvSpPr>
+        <p:spPr>
+          <a:xfrm>
+            <a:off x="457200" y="4800600"/>
+            <a:ext cx="6949440" cy="274320"/>
+          </a:xfrm>
+          <a:prstGeom prst="rect">
+            <a:avLst/>
+          </a:prstGeom>
+          <a:noFill/>
+          <a:ln/>
+        </p:spPr>
+        <p:txBody>
+          <a:bodyPr wrap="square" lIns="0" tIns="0" rIns="0" bIns="0" rtlCol="0" anchor="ctr"/>
+          <a:lstStyle/>
+          <a:p>
+            <a:pPr indent="0" marL="0">
+              <a:buNone/>
+            </a:pPr>
+            <a:r>
+              <a:rPr lang="en-US" sz="900" dirty="0">
+                <a:solidFill>
+                  <a:srgbClr val="64748B"/>
+                </a:solidFill>
+                <a:latin typeface="Calibri" pitchFamily="34" charset="0"/>
+                <a:ea typeface="Calibri" pitchFamily="34" charset="-122"/>
+                <a:cs typeface="Calibri" pitchFamily="34" charset="-120"/>
+              </a:rPr>
+              <a:t>Software Security · Week 12</a:t>
+            </a:r>
+            <a:endParaRPr lang="en-US" sz="900" dirty="0"/>
+          </a:p>
+        </p:txBody>
+      </p:sp>
+      <p:pic>
+        <p:nvPicPr>
+          <p:cNvPr id="10" name="Image 1" descr="/Users/pop7/Library/CloudStorage/OneDrive-MonsterConnectCo.,Ltd/Lecture/KOSEN69 - software-security/slides/pptx/assets/logo-small.png">    </p:cNvPr>
+          <p:cNvPicPr>
+            <a:picLocks noChangeAspect="1"/>
+          </p:cNvPicPr>
+          <p:nvPr/>
+        </p:nvPicPr>
+        <p:blipFill>
+          <a:blip r:embed="rId2"/>
+          <a:stretch>
+            <a:fillRect/>
+          </a:stretch>
+        </p:blipFill>
+        <p:spPr>
+          <a:xfrm>
+            <a:off x="7882128" y="4700016"/>
+            <a:ext cx="768096" cy="356616"/>
+          </a:xfrm>
+          <a:prstGeom prst="rect">
+            <a:avLst/>
+          </a:prstGeom>
+        </p:spPr>
+      </p:pic>
+    </p:spTree>
+  </p:cSld>
+  <p:clrMapOvr>
+    <a:masterClrMapping/>
+  </p:clrMapOvr>
+</p:sld>
+</file>
+
+<file path=ppt/slides/slide17.xml><?xml version="1.0" encoding="utf-8"?>
+<p:sld xmlns:a="http://schemas.openxmlformats.org/drawingml/2006/main" xmlns:r="http://schemas.openxmlformats.org/officeDocument/2006/relationships" xmlns:p="http://schemas.openxmlformats.org/presentationml/2006/main">
+  <p:cSld name="Slide 17">
+    <p:bg>
+      <p:bgPr>
+        <a:solidFill>
+          <a:srgbClr val="FFFFFF"/>
+        </a:solidFill>
+      </p:bgPr>
+    </p:bg>
+    <p:spTree>
+      <p:nvGrpSpPr>
+        <p:cNvPr id="1" name=""/>
+        <p:cNvGrpSpPr/>
+        <p:nvPr/>
+      </p:nvGrpSpPr>
+      <p:grpSpPr>
+        <a:xfrm>
+          <a:off x="0" y="0"/>
+          <a:ext cx="0" cy="0"/>
+          <a:chOff x="0" y="0"/>
+          <a:chExt cx="0" cy="0"/>
+        </a:xfrm>
+      </p:grpSpPr>
+      <p:sp>
+        <p:nvSpPr>
+          <p:cNvPr id="2" name="Shape 0"/>
+          <p:cNvSpPr/>
+          <p:nvPr/>
+        </p:nvSpPr>
+        <p:spPr>
+          <a:xfrm>
+            <a:off x="457200" y="384048"/>
+            <a:ext cx="530352" cy="530352"/>
+          </a:xfrm>
+          <a:prstGeom prst="ellipse">
+            <a:avLst/>
+          </a:prstGeom>
+          <a:solidFill>
+            <a:srgbClr val="E35205"/>
+          </a:solidFill>
+          <a:ln/>
+          <a:effectLst>
+            <a:outerShdw sx="100000" sy="100000" kx="0" ky="0" algn="bl" rotWithShape="0" blurRad="76200" dist="25400" dir="5400000">
+              <a:srgbClr val="000000">
+                <a:alpha val="12000"/>
+              </a:srgbClr>
+            </a:outerShdw>
+          </a:effectLst>
+        </p:spPr>
+      </p:sp>
+      <p:pic>
+        <p:nvPicPr>
+          <p:cNvPr id="3" name="Image 0" descr="preencoded.png">    </p:cNvPr>
+          <p:cNvPicPr>
+            <a:picLocks noChangeAspect="1"/>
+          </p:cNvPicPr>
+          <p:nvPr/>
+        </p:nvPicPr>
+        <p:blipFill>
+          <a:blip r:embed="rId1"/>
+          <a:stretch>
+            <a:fillRect/>
+          </a:stretch>
+        </p:blipFill>
+        <p:spPr>
+          <a:xfrm>
+            <a:off x="594360" y="521208"/>
+            <a:ext cx="256032" cy="256032"/>
+          </a:xfrm>
+          <a:prstGeom prst="rect">
+            <a:avLst/>
+          </a:prstGeom>
+        </p:spPr>
+      </p:pic>
+      <p:sp>
+        <p:nvSpPr>
+          <p:cNvPr id="4" name="Text 1"/>
+          <p:cNvSpPr/>
+          <p:nvPr/>
+        </p:nvSpPr>
+        <p:spPr>
+          <a:xfrm>
+            <a:off x="1143000" y="329184"/>
+            <a:ext cx="7498080" cy="603504"/>
+          </a:xfrm>
+          <a:prstGeom prst="rect">
+            <a:avLst/>
+          </a:prstGeom>
+          <a:noFill/>
+          <a:ln/>
+        </p:spPr>
+        <p:txBody>
+          <a:bodyPr wrap="square" lIns="0" tIns="0" rIns="0" bIns="0" rtlCol="0" anchor="ctr"/>
+          <a:lstStyle/>
+          <a:p>
+            <a:pPr indent="0" marL="0">
+              <a:buNone/>
+            </a:pPr>
+            <a:r>
+              <a:rPr lang="en-US" sz="2600" b="1" dirty="0">
+                <a:solidFill>
+                  <a:srgbClr val="1F2937"/>
+                </a:solidFill>
+                <a:latin typeface="Arial" pitchFamily="34" charset="0"/>
+                <a:ea typeface="Arial" pitchFamily="34" charset="-122"/>
+                <a:cs typeface="Arial" pitchFamily="34" charset="-120"/>
+              </a:rPr>
+              <a:t>Key takeaways</a:t>
+            </a:r>
+            <a:endParaRPr lang="en-US" sz="2600" dirty="0"/>
+          </a:p>
+        </p:txBody>
+      </p:sp>
+      <p:sp>
+        <p:nvSpPr>
+          <p:cNvPr id="5" name="Shape 2"/>
+          <p:cNvSpPr/>
+          <p:nvPr/>
+        </p:nvSpPr>
+        <p:spPr>
+          <a:xfrm>
+            <a:off x="457200" y="1325880"/>
+            <a:ext cx="8229600" cy="1207008"/>
+          </a:xfrm>
+          <a:prstGeom prst="roundRect">
+            <a:avLst>
+              <a:gd name="adj" fmla="val 6061"/>
+            </a:avLst>
+          </a:prstGeom>
+          <a:solidFill>
+            <a:srgbClr val="F1F5F9"/>
+          </a:solidFill>
+          <a:ln/>
+          <a:effectLst>
+            <a:outerShdw sx="100000" sy="100000" kx="0" ky="0" algn="bl" rotWithShape="0" blurRad="76200" dist="25400" dir="5400000">
+              <a:srgbClr val="000000">
+                <a:alpha val="12000"/>
+              </a:srgbClr>
+            </a:outerShdw>
+          </a:effectLst>
+        </p:spPr>
+      </p:sp>
+      <p:sp>
+        <p:nvSpPr>
+          <p:cNvPr id="6" name="Text 3"/>
+          <p:cNvSpPr/>
+          <p:nvPr/>
+        </p:nvSpPr>
+        <p:spPr>
+          <a:xfrm>
+            <a:off x="731520" y="1435608"/>
+            <a:ext cx="7680960" cy="987552"/>
+          </a:xfrm>
+          <a:prstGeom prst="rect">
+            <a:avLst/>
+          </a:prstGeom>
+          <a:noFill/>
+          <a:ln/>
+        </p:spPr>
+        <p:txBody>
+          <a:bodyPr wrap="square" lIns="0" tIns="0" rIns="0" bIns="0" rtlCol="0" anchor="t">
+            <a:normAutofit/>
+          </a:bodyPr>
+          <a:lstStyle/>
+          <a:p>
+            <a:pPr marL="342900" indent="-342900">
+              <a:spcAft>
+                <a:spcPts val="600"/>
+              </a:spcAft>
+              <a:buSzPct val="100000"/>
+              <a:buChar char="•"/>
+            </a:pPr>
+            <a:r>
+              <a:rPr lang="en-US" sz="1400" dirty="0">
+                <a:solidFill>
+                  <a:srgbClr val="1F2937"/>
+                </a:solidFill>
+                <a:latin typeface="Calibri" pitchFamily="34" charset="0"/>
+                <a:ea typeface="Calibri" pitchFamily="34" charset="-122"/>
+                <a:cs typeface="Calibri" pitchFamily="34" charset="-120"/>
+              </a:rPr>
+              <a:t>Most of your attack surface is other people's code</a:t>
+            </a:r>
+            <a:endParaRPr lang="en-US" sz="1400" dirty="0"/>
+          </a:p>
+          <a:p>
+            <a:pPr marL="342900" indent="-342900">
+              <a:spcAft>
+                <a:spcPts val="600"/>
+              </a:spcAft>
+              <a:buSzPct val="100000"/>
+              <a:buChar char="•"/>
+            </a:pPr>
+            <a:r>
+              <a:rPr lang="en-US" sz="1400" dirty="0">
+                <a:solidFill>
+                  <a:srgbClr val="1F2937"/>
+                </a:solidFill>
+                <a:latin typeface="Calibri" pitchFamily="34" charset="0"/>
+                <a:ea typeface="Calibri" pitchFamily="34" charset="-122"/>
+                <a:cs typeface="Calibri" pitchFamily="34" charset="-120"/>
+              </a:rPr>
+              <a:t>Know your ingredients (SBOM), prove your build (SLSA), sign your artifacts</a:t>
+            </a:r>
+            <a:endParaRPr lang="en-US" sz="1400" dirty="0"/>
+          </a:p>
+          <a:p>
+            <a:pPr marL="342900" indent="-342900">
+              <a:spcAft>
+                <a:spcPts val="600"/>
+              </a:spcAft>
+              <a:buSzPct val="100000"/>
+              <a:buChar char="•"/>
+            </a:pPr>
+            <a:r>
+              <a:rPr lang="en-US" sz="1400" dirty="0">
+                <a:solidFill>
+                  <a:srgbClr val="1F2937"/>
+                </a:solidFill>
+                <a:latin typeface="Calibri" pitchFamily="34" charset="0"/>
+                <a:ea typeface="Calibri" pitchFamily="34" charset="-122"/>
+                <a:cs typeface="Calibri" pitchFamily="34" charset="-120"/>
+              </a:rPr>
+              <a:t>Verify before you trust</a:t>
+            </a:r>
+            <a:endParaRPr lang="en-US" sz="1400" dirty="0"/>
+          </a:p>
+        </p:txBody>
+      </p:sp>
+      <p:sp>
+        <p:nvSpPr>
+          <p:cNvPr id="7" name="Text 4"/>
+          <p:cNvSpPr/>
+          <p:nvPr/>
+        </p:nvSpPr>
+        <p:spPr>
+          <a:xfrm>
+            <a:off x="457200" y="4800600"/>
+            <a:ext cx="6949440" cy="274320"/>
+          </a:xfrm>
+          <a:prstGeom prst="rect">
+            <a:avLst/>
+          </a:prstGeom>
+          <a:noFill/>
+          <a:ln/>
+        </p:spPr>
+        <p:txBody>
+          <a:bodyPr wrap="square" lIns="0" tIns="0" rIns="0" bIns="0" rtlCol="0" anchor="ctr"/>
+          <a:lstStyle/>
+          <a:p>
+            <a:pPr indent="0" marL="0">
+              <a:buNone/>
+            </a:pPr>
+            <a:r>
+              <a:rPr lang="en-US" sz="900" dirty="0">
+                <a:solidFill>
+                  <a:srgbClr val="64748B"/>
+                </a:solidFill>
+                <a:latin typeface="Calibri" pitchFamily="34" charset="0"/>
+                <a:ea typeface="Calibri" pitchFamily="34" charset="-122"/>
+                <a:cs typeface="Calibri" pitchFamily="34" charset="-120"/>
+              </a:rPr>
+              <a:t>Software Security · Week 12</a:t>
+            </a:r>
+            <a:endParaRPr lang="en-US" sz="900" dirty="0"/>
+          </a:p>
+        </p:txBody>
+      </p:sp>
+      <p:pic>
+        <p:nvPicPr>
+          <p:cNvPr id="8" name="Image 1" descr="/Users/pop7/Library/CloudStorage/OneDrive-MonsterConnectCo.,Ltd/Lecture/KOSEN69 - software-security/slides/pptx/assets/logo-small.png">    </p:cNvPr>
+          <p:cNvPicPr>
+            <a:picLocks noChangeAspect="1"/>
+          </p:cNvPicPr>
+          <p:nvPr/>
+        </p:nvPicPr>
+        <p:blipFill>
+          <a:blip r:embed="rId2"/>
+          <a:stretch>
+            <a:fillRect/>
+          </a:stretch>
+        </p:blipFill>
+        <p:spPr>
+          <a:xfrm>
+            <a:off x="7882128" y="4700016"/>
+            <a:ext cx="768096" cy="356616"/>
+          </a:xfrm>
+          <a:prstGeom prst="rect">
+            <a:avLst/>
+          </a:prstGeom>
+        </p:spPr>
+      </p:pic>
+    </p:spTree>
+  </p:cSld>
+  <p:clrMapOvr>
+    <a:masterClrMapping/>
+  </p:clrMapOvr>
+</p:sld>
+</file>
+
+<file path=ppt/slides/slide18.xml><?xml version="1.0" encoding="utf-8"?>
+<p:sld xmlns:a="http://schemas.openxmlformats.org/drawingml/2006/main" xmlns:r="http://schemas.openxmlformats.org/officeDocument/2006/relationships" xmlns:p="http://schemas.openxmlformats.org/presentationml/2006/main">
+  <p:cSld name="Slide 18">
     <p:bg>
       <p:bgPr>
         <a:solidFill>
@@ -6856,7 +7700,7 @@
                 <a:ea typeface="Arial" pitchFamily="34" charset="-122"/>
                 <a:cs typeface="Arial" pitchFamily="34" charset="-120"/>
               </a:rPr>
-              <a:t>SCA — find vulnerable deps</a:t>
+              <a:t>Try it — which package actually installs?</a:t>
             </a:r>
             <a:endParaRPr lang="en-US" sz="2600" dirty="0"/>
           </a:p>
@@ -6864,41 +7708,14 @@
       </p:sp>
       <p:sp>
         <p:nvSpPr>
-          <p:cNvPr id="5" name="Shape 2"/>
-          <p:cNvSpPr/>
-          <p:nvPr/>
-        </p:nvSpPr>
-        <p:spPr>
-          <a:xfrm>
-            <a:off x="457200" y="1325880"/>
-            <a:ext cx="8229600" cy="713232"/>
-          </a:xfrm>
-          <a:prstGeom prst="roundRect">
-            <a:avLst>
-              <a:gd name="adj" fmla="val 7692"/>
-            </a:avLst>
-          </a:prstGeom>
-          <a:solidFill>
-            <a:srgbClr val="0A1020"/>
-          </a:solidFill>
-          <a:ln w="12700">
-            <a:solidFill>
-              <a:srgbClr val="E8EDF3"/>
-            </a:solidFill>
-            <a:prstDash val="solid"/>
-          </a:ln>
-        </p:spPr>
-      </p:sp>
-      <p:sp>
-        <p:nvSpPr>
-          <p:cNvPr id="6" name="Text 3"/>
-          <p:cNvSpPr/>
-          <p:nvPr/>
-        </p:nvSpPr>
-        <p:spPr>
-          <a:xfrm>
-            <a:off x="640080" y="1399032"/>
-            <a:ext cx="7863840" cy="566928"/>
+          <p:cNvPr id="5" name="Text 2"/>
+          <p:cNvSpPr/>
+          <p:nvPr/>
+        </p:nvSpPr>
+        <p:spPr>
+          <a:xfrm>
+            <a:off x="548640" y="1325880"/>
+            <a:ext cx="8046720" cy="822960"/>
           </a:xfrm>
           <a:prstGeom prst="rect">
             <a:avLst/>
@@ -6916,97 +7733,6 @@
               <a:buNone/>
             </a:pPr>
             <a:r>
-              <a:rPr lang="en-US" sz="1150" dirty="0">
-                <a:solidFill>
-                  <a:srgbClr val="9FE7D6"/>
-                </a:solidFill>
-                <a:latin typeface="Courier New" pitchFamily="34" charset="0"/>
-                <a:ea typeface="Courier New" pitchFamily="34" charset="-122"/>
-                <a:cs typeface="Courier New" pitchFamily="34" charset="-120"/>
-              </a:rPr>
-              <a:t>docker run --rm -v "$PWD:/src" aquasec/trivy fs /src   # this lab's Python deps</a:t>
-            </a:r>
-            <a:endParaRPr lang="en-US" sz="1150" dirty="0"/>
-          </a:p>
-          <a:p>
-            <a:pPr indent="0" marL="0">
-              <a:buNone/>
-            </a:pPr>
-            <a:r>
-              <a:rPr lang="en-US" sz="1150" dirty="0">
-                <a:solidFill>
-                  <a:srgbClr val="9FE7D6"/>
-                </a:solidFill>
-                <a:latin typeface="Courier New" pitchFamily="34" charset="0"/>
-                <a:ea typeface="Courier New" pitchFamily="34" charset="-122"/>
-                <a:cs typeface="Courier New" pitchFamily="34" charset="-120"/>
-              </a:rPr>
-              <a:t>pip-audit                                                          # vs PyPI advisories</a:t>
-            </a:r>
-            <a:endParaRPr lang="en-US" sz="1150" dirty="0"/>
-          </a:p>
-        </p:txBody>
-      </p:sp>
-      <p:sp>
-        <p:nvSpPr>
-          <p:cNvPr id="7" name="Shape 4"/>
-          <p:cNvSpPr/>
-          <p:nvPr/>
-        </p:nvSpPr>
-        <p:spPr>
-          <a:xfrm>
-            <a:off x="457200" y="2203704"/>
-            <a:ext cx="8229600" cy="1097280"/>
-          </a:xfrm>
-          <a:prstGeom prst="roundRect">
-            <a:avLst>
-              <a:gd name="adj" fmla="val 6667"/>
-            </a:avLst>
-          </a:prstGeom>
-          <a:solidFill>
-            <a:srgbClr val="F1F5F9"/>
-          </a:solidFill>
-          <a:ln/>
-          <a:effectLst>
-            <a:outerShdw sx="100000" sy="100000" kx="0" ky="0" algn="bl" rotWithShape="0" blurRad="76200" dist="25400" dir="5400000">
-              <a:srgbClr val="000000">
-                <a:alpha val="12000"/>
-              </a:srgbClr>
-            </a:outerShdw>
-          </a:effectLst>
-        </p:spPr>
-      </p:sp>
-      <p:sp>
-        <p:nvSpPr>
-          <p:cNvPr id="8" name="Text 5"/>
-          <p:cNvSpPr/>
-          <p:nvPr/>
-        </p:nvSpPr>
-        <p:spPr>
-          <a:xfrm>
-            <a:off x="731520" y="2313432"/>
-            <a:ext cx="7680960" cy="877824"/>
-          </a:xfrm>
-          <a:prstGeom prst="rect">
-            <a:avLst/>
-          </a:prstGeom>
-          <a:noFill/>
-          <a:ln/>
-        </p:spPr>
-        <p:txBody>
-          <a:bodyPr wrap="square" lIns="0" tIns="0" rIns="0" bIns="0" rtlCol="0" anchor="t">
-            <a:normAutofit/>
-          </a:bodyPr>
-          <a:lstStyle/>
-          <a:p>
-            <a:pPr marL="342900" indent="-342900">
-              <a:spcAft>
-                <a:spcPts val="600"/>
-              </a:spcAft>
-              <a:buSzPct val="100000"/>
-              <a:buChar char="•"/>
-            </a:pPr>
-            <a:r>
               <a:rPr lang="en-US" sz="1400" dirty="0">
                 <a:solidFill>
                   <a:srgbClr val="1F2937"/>
@@ -7015,17 +7741,13 @@
                 <a:ea typeface="Calibri" pitchFamily="34" charset="-122"/>
                 <a:cs typeface="Calibri" pitchFamily="34" charset="-120"/>
               </a:rPr>
-              <a:t>Produces CVEs + fix versions</a:t>
+              <a:t>Set both versions and the index mode. The resolver's real rule decides.</a:t>
             </a:r>
             <a:endParaRPr lang="en-US" sz="1400" dirty="0"/>
           </a:p>
           <a:p>
-            <a:pPr marL="342900" indent="-342900">
-              <a:spcAft>
-                <a:spcPts val="600"/>
-              </a:spcAft>
-              <a:buSzPct val="100000"/>
-              <a:buChar char="•"/>
+            <a:pPr indent="0" marL="0">
+              <a:buNone/>
             </a:pPr>
             <a:r>
               <a:rPr lang="en-US" sz="1400" dirty="0">
@@ -7036,7 +7758,7 @@
                 <a:ea typeface="Calibri" pitchFamily="34" charset="-122"/>
                 <a:cs typeface="Calibri" pitchFamily="34" charset="-120"/>
               </a:rPr>
-              <a:t>CWE-1104 (unmaintained), CWE-829 (untrusted inclusion), CWE-1395 (known-vulnerable 3rd-party dependency)</a:t>
+              <a:t>Try it live: /sim/resolver-confusion (interactive simulation, web only)</a:t>
             </a:r>
             <a:endParaRPr lang="en-US" sz="1400" dirty="0"/>
           </a:p>
@@ -7044,7 +7766,7 @@
       </p:sp>
       <p:sp>
         <p:nvSpPr>
-          <p:cNvPr id="9" name="Text 6"/>
+          <p:cNvPr id="6" name="Text 3"/>
           <p:cNvSpPr/>
           <p:nvPr/>
         </p:nvSpPr>
@@ -7083,7 +7805,7 @@
       </p:sp>
       <p:pic>
         <p:nvPicPr>
-          <p:cNvPr id="10" name="Image 1" descr="/Users/pop7/Library/CloudStorage/OneDrive-MonsterConnectCo.,Ltd/Lecture/KOSEN69 - software-security/slides/pptx/assets/logo-small.png">    </p:cNvPr>
+          <p:cNvPr id="7" name="Image 1" descr="/Users/pop7/Library/CloudStorage/OneDrive-MonsterConnectCo.,Ltd/Lecture/KOSEN69 - software-security/slides/pptx/assets/logo-small.png">    </p:cNvPr>
           <p:cNvPicPr>
             <a:picLocks noChangeAspect="1"/>
           </p:cNvPicPr>
@@ -7221,7 +7943,7 @@
                 <a:ea typeface="Arial" pitchFamily="34" charset="-122"/>
                 <a:cs typeface="Arial" pitchFamily="34" charset="-120"/>
               </a:rPr>
-              <a:t>Integrity: prove what you shipped</a:t>
+              <a:t>SCA — find vulnerable deps</a:t>
             </a:r>
             <a:endParaRPr lang="en-US" sz="2600" dirty="0"/>
           </a:p>
@@ -7236,11 +7958,96 @@
         <p:spPr>
           <a:xfrm>
             <a:off x="457200" y="1325880"/>
-            <a:ext cx="8229600" cy="1207008"/>
+            <a:ext cx="8229600" cy="713232"/>
           </a:xfrm>
           <a:prstGeom prst="roundRect">
             <a:avLst>
-              <a:gd name="adj" fmla="val 6061"/>
+              <a:gd name="adj" fmla="val 7692"/>
+            </a:avLst>
+          </a:prstGeom>
+          <a:solidFill>
+            <a:srgbClr val="0A1020"/>
+          </a:solidFill>
+          <a:ln w="12700">
+            <a:solidFill>
+              <a:srgbClr val="E8EDF3"/>
+            </a:solidFill>
+            <a:prstDash val="solid"/>
+          </a:ln>
+        </p:spPr>
+      </p:sp>
+      <p:sp>
+        <p:nvSpPr>
+          <p:cNvPr id="6" name="Text 3"/>
+          <p:cNvSpPr/>
+          <p:nvPr/>
+        </p:nvSpPr>
+        <p:spPr>
+          <a:xfrm>
+            <a:off x="640080" y="1399032"/>
+            <a:ext cx="7863840" cy="566928"/>
+          </a:xfrm>
+          <a:prstGeom prst="rect">
+            <a:avLst/>
+          </a:prstGeom>
+          <a:noFill/>
+          <a:ln/>
+        </p:spPr>
+        <p:txBody>
+          <a:bodyPr wrap="square" lIns="0" tIns="0" rIns="0" bIns="0" rtlCol="0" anchor="t">
+            <a:normAutofit/>
+          </a:bodyPr>
+          <a:lstStyle/>
+          <a:p>
+            <a:pPr indent="0" marL="0">
+              <a:buNone/>
+            </a:pPr>
+            <a:r>
+              <a:rPr lang="en-US" sz="1150" dirty="0">
+                <a:solidFill>
+                  <a:srgbClr val="9FE7D6"/>
+                </a:solidFill>
+                <a:latin typeface="Courier New" pitchFamily="34" charset="0"/>
+                <a:ea typeface="Courier New" pitchFamily="34" charset="-122"/>
+                <a:cs typeface="Courier New" pitchFamily="34" charset="-120"/>
+              </a:rPr>
+              <a:t>docker run --rm -v "$PWD:/src" aquasec/trivy fs /src   # this lab's Python deps</a:t>
+            </a:r>
+            <a:endParaRPr lang="en-US" sz="1150" dirty="0"/>
+          </a:p>
+          <a:p>
+            <a:pPr indent="0" marL="0">
+              <a:buNone/>
+            </a:pPr>
+            <a:r>
+              <a:rPr lang="en-US" sz="1150" dirty="0">
+                <a:solidFill>
+                  <a:srgbClr val="9FE7D6"/>
+                </a:solidFill>
+                <a:latin typeface="Courier New" pitchFamily="34" charset="0"/>
+                <a:ea typeface="Courier New" pitchFamily="34" charset="-122"/>
+                <a:cs typeface="Courier New" pitchFamily="34" charset="-120"/>
+              </a:rPr>
+              <a:t>pip-audit                                                          # vs PyPI advisories</a:t>
+            </a:r>
+            <a:endParaRPr lang="en-US" sz="1150" dirty="0"/>
+          </a:p>
+        </p:txBody>
+      </p:sp>
+      <p:sp>
+        <p:nvSpPr>
+          <p:cNvPr id="7" name="Shape 4"/>
+          <p:cNvSpPr/>
+          <p:nvPr/>
+        </p:nvSpPr>
+        <p:spPr>
+          <a:xfrm>
+            <a:off x="457200" y="2203704"/>
+            <a:ext cx="8229600" cy="1097280"/>
+          </a:xfrm>
+          <a:prstGeom prst="roundRect">
+            <a:avLst>
+              <a:gd name="adj" fmla="val 6667"/>
             </a:avLst>
           </a:prstGeom>
           <a:solidFill>
@@ -7258,14 +8065,14 @@
       </p:sp>
       <p:sp>
         <p:nvSpPr>
-          <p:cNvPr id="6" name="Text 3"/>
-          <p:cNvSpPr/>
-          <p:nvPr/>
-        </p:nvSpPr>
-        <p:spPr>
-          <a:xfrm>
-            <a:off x="731520" y="1435608"/>
-            <a:ext cx="7680960" cy="987552"/>
+          <p:cNvPr id="8" name="Text 5"/>
+          <p:cNvSpPr/>
+          <p:nvPr/>
+        </p:nvSpPr>
+        <p:spPr>
+          <a:xfrm>
+            <a:off x="731520" y="2313432"/>
+            <a:ext cx="7680960" cy="877824"/>
           </a:xfrm>
           <a:prstGeom prst="rect">
             <a:avLst/>
@@ -7295,7 +8102,7 @@
                 <a:ea typeface="Calibri" pitchFamily="34" charset="-122"/>
                 <a:cs typeface="Calibri" pitchFamily="34" charset="-120"/>
               </a:rPr>
-              <a:t>SBOM (CycloneDX/SPDX) — ingredient list of the build</a:t>
+              <a:t>Produces CVEs + fix versions</a:t>
             </a:r>
             <a:endParaRPr lang="en-US" sz="1400" dirty="0"/>
           </a:p>
@@ -7316,66 +8123,45 @@
                 <a:ea typeface="Calibri" pitchFamily="34" charset="-122"/>
                 <a:cs typeface="Calibri" pitchFamily="34" charset="-120"/>
               </a:rPr>
-              <a:t>SLSA — levels of build provenance &amp; tamper-resistance</a:t>
+              <a:t>CWE-1104 (unmaintained), CWE-829 (untrusted inclusion), CWE-1395 (known-vulnerable 3rd-party dependency)</a:t>
             </a:r>
             <a:endParaRPr lang="en-US" sz="1400" dirty="0"/>
           </a:p>
-          <a:p>
-            <a:pPr marL="342900" indent="-342900">
-              <a:spcAft>
-                <a:spcPts val="600"/>
-              </a:spcAft>
-              <a:buSzPct val="100000"/>
-              <a:buChar char="•"/>
-            </a:pPr>
-            <a:r>
-              <a:rPr lang="en-US" sz="1400" dirty="0">
-                <a:solidFill>
-                  <a:srgbClr val="1F2937"/>
+        </p:txBody>
+      </p:sp>
+      <p:sp>
+        <p:nvSpPr>
+          <p:cNvPr id="9" name="Text 6"/>
+          <p:cNvSpPr/>
+          <p:nvPr/>
+        </p:nvSpPr>
+        <p:spPr>
+          <a:xfrm>
+            <a:off x="457200" y="4800600"/>
+            <a:ext cx="6949440" cy="274320"/>
+          </a:xfrm>
+          <a:prstGeom prst="rect">
+            <a:avLst/>
+          </a:prstGeom>
+          <a:noFill/>
+          <a:ln/>
+        </p:spPr>
+        <p:txBody>
+          <a:bodyPr wrap="square" lIns="0" tIns="0" rIns="0" bIns="0" rtlCol="0" anchor="ctr"/>
+          <a:lstStyle/>
+          <a:p>
+            <a:pPr indent="0" marL="0">
+              <a:buNone/>
+            </a:pPr>
+            <a:r>
+              <a:rPr lang="en-US" sz="900" dirty="0">
+                <a:solidFill>
+                  <a:srgbClr val="64748B"/>
                 </a:solidFill>
                 <a:latin typeface="Calibri" pitchFamily="34" charset="0"/>
                 <a:ea typeface="Calibri" pitchFamily="34" charset="-122"/>
                 <a:cs typeface="Calibri" pitchFamily="34" charset="-120"/>
               </a:rPr>
-              <a:t>A08:2025 Software/Data Integrity Failures</a:t>
-            </a:r>
-            <a:endParaRPr lang="en-US" sz="1400" dirty="0"/>
-          </a:p>
-        </p:txBody>
-      </p:sp>
-      <p:sp>
-        <p:nvSpPr>
-          <p:cNvPr id="7" name="Text 4"/>
-          <p:cNvSpPr/>
-          <p:nvPr/>
-        </p:nvSpPr>
-        <p:spPr>
-          <a:xfrm>
-            <a:off x="457200" y="4800600"/>
-            <a:ext cx="6949440" cy="274320"/>
-          </a:xfrm>
-          <a:prstGeom prst="rect">
-            <a:avLst/>
-          </a:prstGeom>
-          <a:noFill/>
-          <a:ln/>
-        </p:spPr>
-        <p:txBody>
-          <a:bodyPr wrap="square" lIns="0" tIns="0" rIns="0" bIns="0" rtlCol="0" anchor="ctr"/>
-          <a:lstStyle/>
-          <a:p>
-            <a:pPr indent="0" marL="0">
-              <a:buNone/>
-            </a:pPr>
-            <a:r>
-              <a:rPr lang="en-US" sz="900" dirty="0">
-                <a:solidFill>
-                  <a:srgbClr val="64748B"/>
-                </a:solidFill>
-                <a:latin typeface="Calibri" pitchFamily="34" charset="0"/>
-                <a:ea typeface="Calibri" pitchFamily="34" charset="-122"/>
-                <a:cs typeface="Calibri" pitchFamily="34" charset="-120"/>
-              </a:rPr>
               <a:t>Software Security · Week 12</a:t>
             </a:r>
             <a:endParaRPr lang="en-US" sz="900" dirty="0"/>
@@ -7384,7 +8170,7 @@
       </p:sp>
       <p:pic>
         <p:nvPicPr>
-          <p:cNvPr id="8" name="Image 1" descr="/Users/pop7/Library/CloudStorage/OneDrive-MonsterConnectCo.,Ltd/Lecture/KOSEN69 - software-security/slides/pptx/assets/logo-small.png">    </p:cNvPr>
+          <p:cNvPr id="10" name="Image 1" descr="/Users/pop7/Library/CloudStorage/OneDrive-MonsterConnectCo.,Ltd/Lecture/KOSEN69 - software-security/slides/pptx/assets/logo-small.png">    </p:cNvPr>
           <p:cNvPicPr>
             <a:picLocks noChangeAspect="1"/>
           </p:cNvPicPr>
@@ -7522,7 +8308,7 @@
                 <a:ea typeface="Arial" pitchFamily="34" charset="-122"/>
                 <a:cs typeface="Arial" pitchFamily="34" charset="-120"/>
               </a:rPr>
-              <a:t>Signing with Cosign (keyless)</a:t>
+              <a:t>Integrity: prove what you shipped</a:t>
             </a:r>
             <a:endParaRPr lang="en-US" sz="2600" dirty="0"/>
           </a:p>
@@ -7537,22 +8323,24 @@
         <p:spPr>
           <a:xfrm>
             <a:off x="457200" y="1325880"/>
-            <a:ext cx="8229600" cy="2907792"/>
+            <a:ext cx="8229600" cy="1207008"/>
           </a:xfrm>
           <a:prstGeom prst="roundRect">
             <a:avLst>
-              <a:gd name="adj" fmla="val 1887"/>
+              <a:gd name="adj" fmla="val 6061"/>
             </a:avLst>
           </a:prstGeom>
           <a:solidFill>
-            <a:srgbClr val="0A1020"/>
+            <a:srgbClr val="F1F5F9"/>
           </a:solidFill>
-          <a:ln w="12700">
-            <a:solidFill>
-              <a:srgbClr val="E8EDF3"/>
-            </a:solidFill>
-            <a:prstDash val="solid"/>
-          </a:ln>
+          <a:ln/>
+          <a:effectLst>
+            <a:outerShdw sx="100000" sy="100000" kx="0" ky="0" algn="bl" rotWithShape="0" blurRad="76200" dist="25400" dir="5400000">
+              <a:srgbClr val="000000">
+                <a:alpha val="12000"/>
+              </a:srgbClr>
+            </a:outerShdw>
+          </a:effectLst>
         </p:spPr>
       </p:sp>
       <p:sp>
@@ -7563,8 +8351,8 @@
         </p:nvSpPr>
         <p:spPr>
           <a:xfrm>
-            <a:off x="640080" y="1399032"/>
-            <a:ext cx="7863840" cy="2761488"/>
+            <a:off x="731520" y="1435608"/>
+            <a:ext cx="7680960" cy="987552"/>
           </a:xfrm>
           <a:prstGeom prst="rect">
             <a:avLst/>
@@ -7578,208 +8366,67 @@
           </a:bodyPr>
           <a:lstStyle/>
           <a:p>
-            <a:pPr indent="0" marL="0">
-              <a:buNone/>
-            </a:pPr>
-            <a:r>
-              <a:rPr lang="en-US" sz="1150" dirty="0">
-                <a:solidFill>
-                  <a:srgbClr val="9FE7D6"/>
-                </a:solidFill>
-                <a:latin typeface="Courier New" pitchFamily="34" charset="0"/>
-                <a:ea typeface="Courier New" pitchFamily="34" charset="-122"/>
-                <a:cs typeface="Courier New" pitchFamily="34" charset="-120"/>
-              </a:rPr>
-              <a:t>IMG=week12-supplychain:lab</a:t>
-            </a:r>
-            <a:endParaRPr lang="en-US" sz="1150" dirty="0"/>
-          </a:p>
-          <a:p>
-            <a:pPr indent="0" marL="0">
-              <a:buNone/>
-            </a:pPr>
-            <a:r>
-              <a:rPr lang="en-US" sz="1150" dirty="0">
-                <a:solidFill>
-                  <a:srgbClr val="9FE7D6"/>
-                </a:solidFill>
-                <a:latin typeface="Courier New" pitchFamily="34" charset="0"/>
-                <a:ea typeface="Courier New" pitchFamily="34" charset="-122"/>
-                <a:cs typeface="Courier New" pitchFamily="34" charset="-120"/>
-              </a:rPr>
-              <a:t>docker run --rm -v "$PWD:/src" -v /var/run/docker.sock:/var/run/docker.sock \</a:t>
-            </a:r>
-            <a:endParaRPr lang="en-US" sz="1150" dirty="0"/>
-          </a:p>
-          <a:p>
-            <a:pPr indent="0" marL="0">
-              <a:buNone/>
-            </a:pPr>
-            <a:r>
-              <a:rPr lang="en-US" sz="1150" dirty="0">
-                <a:solidFill>
-                  <a:srgbClr val="9FE7D6"/>
-                </a:solidFill>
-                <a:latin typeface="Courier New" pitchFamily="34" charset="0"/>
-                <a:ea typeface="Courier New" pitchFamily="34" charset="-122"/>
-                <a:cs typeface="Courier New" pitchFamily="34" charset="-120"/>
-              </a:rPr>
-              <a:t>  aquasec/trivy:latest image --format cyclonedx \</a:t>
-            </a:r>
-            <a:endParaRPr lang="en-US" sz="1150" dirty="0"/>
-          </a:p>
-          <a:p>
-            <a:pPr indent="0" marL="0">
-              <a:buNone/>
-            </a:pPr>
-            <a:r>
-              <a:rPr lang="en-US" sz="1150" dirty="0">
-                <a:solidFill>
-                  <a:srgbClr val="9FE7D6"/>
-                </a:solidFill>
-                <a:latin typeface="Courier New" pitchFamily="34" charset="0"/>
-                <a:ea typeface="Courier New" pitchFamily="34" charset="-122"/>
-                <a:cs typeface="Courier New" pitchFamily="34" charset="-120"/>
-              </a:rPr>
-              <a:t>  --output /src/sbom.cdx.json "$IMG"                          # SBOM</a:t>
-            </a:r>
-            <a:endParaRPr lang="en-US" sz="1150" dirty="0"/>
-          </a:p>
-          <a:p>
-            <a:pPr indent="0" marL="0">
-              <a:buNone/>
-            </a:pPr>
-            <a:r>
-              <a:rPr lang="en-US" sz="1150" dirty="0">
-                <a:solidFill>
-                  <a:srgbClr val="9FE7D6"/>
-                </a:solidFill>
-                <a:latin typeface="Courier New" pitchFamily="34" charset="0"/>
-                <a:ea typeface="Courier New" pitchFamily="34" charset="-122"/>
-                <a:cs typeface="Courier New" pitchFamily="34" charset="-120"/>
-              </a:rPr>
-              <a:t>docker run --rm -e COSIGN_EXPERIMENTAL=1 \</a:t>
-            </a:r>
-            <a:endParaRPr lang="en-US" sz="1150" dirty="0"/>
-          </a:p>
-          <a:p>
-            <a:pPr indent="0" marL="0">
-              <a:buNone/>
-            </a:pPr>
-            <a:r>
-              <a:rPr lang="en-US" sz="1150" dirty="0">
-                <a:solidFill>
-                  <a:srgbClr val="9FE7D6"/>
-                </a:solidFill>
-                <a:latin typeface="Courier New" pitchFamily="34" charset="0"/>
-                <a:ea typeface="Courier New" pitchFamily="34" charset="-122"/>
-                <a:cs typeface="Courier New" pitchFamily="34" charset="-120"/>
-              </a:rPr>
-              <a:t>  -v /var/run/docker.sock:/var/run/docker.sock \</a:t>
-            </a:r>
-            <a:endParaRPr lang="en-US" sz="1150" dirty="0"/>
-          </a:p>
-          <a:p>
-            <a:pPr indent="0" marL="0">
-              <a:buNone/>
-            </a:pPr>
-            <a:r>
-              <a:rPr lang="en-US" sz="1150" dirty="0">
-                <a:solidFill>
-                  <a:srgbClr val="9FE7D6"/>
-                </a:solidFill>
-                <a:latin typeface="Courier New" pitchFamily="34" charset="0"/>
-                <a:ea typeface="Courier New" pitchFamily="34" charset="-122"/>
-                <a:cs typeface="Courier New" pitchFamily="34" charset="-120"/>
-              </a:rPr>
-              <a:t>  gcr.io/projectsigstore/cosign:latest sign --yes "$IMG"       # sign (OIDC)</a:t>
-            </a:r>
-            <a:endParaRPr lang="en-US" sz="1150" dirty="0"/>
-          </a:p>
-          <a:p>
-            <a:pPr indent="0" marL="0">
-              <a:buNone/>
-            </a:pPr>
-            <a:r>
-              <a:rPr lang="en-US" sz="1150" dirty="0">
-                <a:solidFill>
-                  <a:srgbClr val="9FE7D6"/>
-                </a:solidFill>
-                <a:latin typeface="Courier New" pitchFamily="34" charset="0"/>
-                <a:ea typeface="Courier New" pitchFamily="34" charset="-122"/>
-                <a:cs typeface="Courier New" pitchFamily="34" charset="-120"/>
-              </a:rPr>
-              <a:t>docker run --rm -e COSIGN_EXPERIMENTAL=1 \</a:t>
-            </a:r>
-            <a:endParaRPr lang="en-US" sz="1150" dirty="0"/>
-          </a:p>
-          <a:p>
-            <a:pPr indent="0" marL="0">
-              <a:buNone/>
-            </a:pPr>
-            <a:r>
-              <a:rPr lang="en-US" sz="1150" dirty="0">
-                <a:solidFill>
-                  <a:srgbClr val="9FE7D6"/>
-                </a:solidFill>
-                <a:latin typeface="Courier New" pitchFamily="34" charset="0"/>
-                <a:ea typeface="Courier New" pitchFamily="34" charset="-122"/>
-                <a:cs typeface="Courier New" pitchFamily="34" charset="-120"/>
-              </a:rPr>
-              <a:t>  -v /var/run/docker.sock:/var/run/docker.sock \</a:t>
-            </a:r>
-            <a:endParaRPr lang="en-US" sz="1150" dirty="0"/>
-          </a:p>
-          <a:p>
-            <a:pPr indent="0" marL="0">
-              <a:buNone/>
-            </a:pPr>
-            <a:r>
-              <a:rPr lang="en-US" sz="1150" dirty="0">
-                <a:solidFill>
-                  <a:srgbClr val="9FE7D6"/>
-                </a:solidFill>
-                <a:latin typeface="Courier New" pitchFamily="34" charset="0"/>
-                <a:ea typeface="Courier New" pitchFamily="34" charset="-122"/>
-                <a:cs typeface="Courier New" pitchFamily="34" charset="-120"/>
-              </a:rPr>
-              <a:t>  gcr.io/projectsigstore/cosign:latest verify \</a:t>
-            </a:r>
-            <a:endParaRPr lang="en-US" sz="1150" dirty="0"/>
-          </a:p>
-          <a:p>
-            <a:pPr indent="0" marL="0">
-              <a:buNone/>
-            </a:pPr>
-            <a:r>
-              <a:rPr lang="en-US" sz="1150" dirty="0">
-                <a:solidFill>
-                  <a:srgbClr val="9FE7D6"/>
-                </a:solidFill>
-                <a:latin typeface="Courier New" pitchFamily="34" charset="0"/>
-                <a:ea typeface="Courier New" pitchFamily="34" charset="-122"/>
-                <a:cs typeface="Courier New" pitchFamily="34" charset="-120"/>
-              </a:rPr>
-              <a:t>  --certificate-identity-regexp ".*" \</a:t>
-            </a:r>
-            <a:endParaRPr lang="en-US" sz="1150" dirty="0"/>
-          </a:p>
-          <a:p>
-            <a:pPr indent="0" marL="0">
-              <a:buNone/>
-            </a:pPr>
-            <a:r>
-              <a:rPr lang="en-US" sz="1150" dirty="0">
-                <a:solidFill>
-                  <a:srgbClr val="9FE7D6"/>
-                </a:solidFill>
-                <a:latin typeface="Courier New" pitchFamily="34" charset="0"/>
-                <a:ea typeface="Courier New" pitchFamily="34" charset="-122"/>
-                <a:cs typeface="Courier New" pitchFamily="34" charset="-120"/>
-              </a:rPr>
-              <a:t>  --certificate-oidc-issuer-regexp ".*" "$IMG"                 # verify</a:t>
-            </a:r>
-            <a:endParaRPr lang="en-US" sz="1150" dirty="0"/>
+            <a:pPr marL="342900" indent="-342900">
+              <a:spcAft>
+                <a:spcPts val="600"/>
+              </a:spcAft>
+              <a:buSzPct val="100000"/>
+              <a:buChar char="•"/>
+            </a:pPr>
+            <a:r>
+              <a:rPr lang="en-US" sz="1400" dirty="0">
+                <a:solidFill>
+                  <a:srgbClr val="1F2937"/>
+                </a:solidFill>
+                <a:latin typeface="Calibri" pitchFamily="34" charset="0"/>
+                <a:ea typeface="Calibri" pitchFamily="34" charset="-122"/>
+                <a:cs typeface="Calibri" pitchFamily="34" charset="-120"/>
+              </a:rPr>
+              <a:t>SBOM (CycloneDX/SPDX) — ingredient list of the build</a:t>
+            </a:r>
+            <a:endParaRPr lang="en-US" sz="1400" dirty="0"/>
+          </a:p>
+          <a:p>
+            <a:pPr marL="342900" indent="-342900">
+              <a:spcAft>
+                <a:spcPts val="600"/>
+              </a:spcAft>
+              <a:buSzPct val="100000"/>
+              <a:buChar char="•"/>
+            </a:pPr>
+            <a:r>
+              <a:rPr lang="en-US" sz="1400" dirty="0">
+                <a:solidFill>
+                  <a:srgbClr val="1F2937"/>
+                </a:solidFill>
+                <a:latin typeface="Calibri" pitchFamily="34" charset="0"/>
+                <a:ea typeface="Calibri" pitchFamily="34" charset="-122"/>
+                <a:cs typeface="Calibri" pitchFamily="34" charset="-120"/>
+              </a:rPr>
+              <a:t>SLSA — levels of build provenance &amp; tamper-resistance</a:t>
+            </a:r>
+            <a:endParaRPr lang="en-US" sz="1400" dirty="0"/>
+          </a:p>
+          <a:p>
+            <a:pPr marL="342900" indent="-342900">
+              <a:spcAft>
+                <a:spcPts val="600"/>
+              </a:spcAft>
+              <a:buSzPct val="100000"/>
+              <a:buChar char="•"/>
+            </a:pPr>
+            <a:r>
+              <a:rPr lang="en-US" sz="1400" dirty="0">
+                <a:solidFill>
+                  <a:srgbClr val="1F2937"/>
+                </a:solidFill>
+                <a:latin typeface="Calibri" pitchFamily="34" charset="0"/>
+                <a:ea typeface="Calibri" pitchFamily="34" charset="-122"/>
+                <a:cs typeface="Calibri" pitchFamily="34" charset="-120"/>
+              </a:rPr>
+              <a:t>A08:2025 Software/Data Integrity Failures</a:t>
+            </a:r>
+            <a:endParaRPr lang="en-US" sz="1400" dirty="0"/>
           </a:p>
         </p:txBody>
       </p:sp>
